--- a/documents/Pascal-S 到 C 编译器设计与实现（交流汇报）.pptx
+++ b/documents/Pascal-S 到 C 编译器设计与实现（交流汇报）.pptx
@@ -417,39 +417,39 @@
           <a:p>
             <a:pPr lvl="0"/>
             <a:r>
-              <a:rPr lang="en-US" smtClean="0"/>
+              <a:rPr lang="en-US"/>
               <a:t>Click to edit Master text styles</a:t>
             </a:r>
-            <a:endParaRPr lang="en-US" smtClean="0"/>
+            <a:endParaRPr lang="en-US"/>
           </a:p>
           <a:p>
             <a:pPr lvl="1"/>
             <a:r>
-              <a:rPr lang="en-US" smtClean="0"/>
+              <a:rPr lang="en-US"/>
               <a:t>Second level</a:t>
             </a:r>
-            <a:endParaRPr lang="en-US" smtClean="0"/>
+            <a:endParaRPr lang="en-US"/>
           </a:p>
           <a:p>
             <a:pPr lvl="2"/>
             <a:r>
-              <a:rPr lang="en-US" smtClean="0"/>
+              <a:rPr lang="en-US"/>
               <a:t>Third level</a:t>
             </a:r>
-            <a:endParaRPr lang="en-US" smtClean="0"/>
+            <a:endParaRPr lang="en-US"/>
           </a:p>
           <a:p>
             <a:pPr lvl="3"/>
             <a:r>
-              <a:rPr lang="en-US" smtClean="0"/>
+              <a:rPr lang="en-US"/>
               <a:t>Fourth level</a:t>
             </a:r>
-            <a:endParaRPr lang="en-US" smtClean="0"/>
+            <a:endParaRPr lang="en-US"/>
           </a:p>
           <a:p>
             <a:pPr lvl="4"/>
             <a:r>
-              <a:rPr lang="en-US" smtClean="0"/>
+              <a:rPr lang="en-US"/>
               <a:t>Fifth level</a:t>
             </a:r>
             <a:endParaRPr lang="cs-CZ"/>
@@ -693,10 +693,10 @@
           </a:lstStyle>
           <a:p>
             <a:r>
-              <a:rPr lang="cs-CZ" smtClean="0"/>
+              <a:rPr lang="cs-CZ"/>
               <a:t>1.7.2013</a:t>
             </a:r>
-            <a:endParaRPr lang="cs-CZ" smtClean="0"/>
+            <a:endParaRPr lang="cs-CZ"/>
           </a:p>
         </p:txBody>
       </p:sp>
@@ -769,9 +769,139 @@
                   <a:srgbClr val="000000"/>
                 </a:solidFill>
               </a:rPr>
-              <a:t>大家好，欢迎参加我们的中期汇报。本次汇报的主题是“Pascal-S到C编译器的设计与实现”，这是我们编译原理课程设计的项目。</a:t>
-            </a:r>
-            <a:endParaRPr lang="en-US" sz="1400" b="0" i="0" u="none" strike="noStrike">
+              <a:t>大家好，</a:t>
+            </a:r>
+            <a:r>
+              <a:rPr lang="en-US">
+                <a:solidFill>
+                  <a:srgbClr val="000000"/>
+                </a:solidFill>
+                <a:sym typeface="+mn-ea"/>
+              </a:rPr>
+              <a:t>我是</a:t>
+            </a:r>
+            <a:r>
+              <a:rPr lang="zh-CN" altLang="en-US">
+                <a:solidFill>
+                  <a:srgbClr val="000000"/>
+                </a:solidFill>
+                <a:sym typeface="+mn-ea"/>
+              </a:rPr>
+              <a:t>金介然</a:t>
+            </a:r>
+            <a:r>
+              <a:rPr lang="en-US">
+                <a:solidFill>
+                  <a:srgbClr val="000000"/>
+                </a:solidFill>
+                <a:sym typeface="+mn-ea"/>
+              </a:rPr>
+              <a:t>，</a:t>
+            </a:r>
+            <a:r>
+              <a:rPr lang="zh-CN" altLang="en-US">
+                <a:solidFill>
+                  <a:srgbClr val="000000"/>
+                </a:solidFill>
+                <a:sym typeface="+mn-ea"/>
+              </a:rPr>
+              <a:t>我们</a:t>
+            </a:r>
+            <a:r>
+              <a:rPr lang="en-US">
+                <a:solidFill>
+                  <a:srgbClr val="000000"/>
+                </a:solidFill>
+                <a:sym typeface="+mn-ea"/>
+              </a:rPr>
+              <a:t>团队成员还有</a:t>
+            </a:r>
+            <a:r>
+              <a:rPr lang="zh-CN" altLang="en-US">
+                <a:solidFill>
+                  <a:srgbClr val="000000"/>
+                </a:solidFill>
+                <a:sym typeface="+mn-ea"/>
+              </a:rPr>
+              <a:t>丁乐航</a:t>
+            </a:r>
+            <a:r>
+              <a:rPr lang="en-US">
+                <a:solidFill>
+                  <a:srgbClr val="000000"/>
+                </a:solidFill>
+                <a:sym typeface="+mn-ea"/>
+              </a:rPr>
+              <a:t>、何俊辉和李璇。</a:t>
+            </a:r>
+            <a:r>
+              <a:rPr lang="en-US" sz="1400" b="0" i="0" u="none" strike="noStrike">
+                <a:solidFill>
+                  <a:srgbClr val="000000"/>
+                </a:solidFill>
+              </a:rPr>
+              <a:t>本次</a:t>
+            </a:r>
+            <a:r>
+              <a:rPr lang="zh-CN" altLang="en-US" sz="1400" b="0" i="0" u="none" strike="noStrike">
+                <a:solidFill>
+                  <a:srgbClr val="000000"/>
+                </a:solidFill>
+              </a:rPr>
+              <a:t>我汇报的标题</a:t>
+            </a:r>
+            <a:r>
+              <a:rPr lang="en-US" sz="1400" b="0" i="0" u="none" strike="noStrike">
+                <a:solidFill>
+                  <a:srgbClr val="000000"/>
+                </a:solidFill>
+              </a:rPr>
+              <a:t>是“Pascal-S到C编译器的设计与实现”，</a:t>
+            </a:r>
+            <a:r>
+              <a:rPr lang="zh-CN" altLang="en-US" sz="1400" b="0" i="0" u="none" strike="noStrike">
+                <a:solidFill>
+                  <a:srgbClr val="000000"/>
+                </a:solidFill>
+              </a:rPr>
+              <a:t>也就</a:t>
+            </a:r>
+            <a:r>
+              <a:rPr lang="en-US" sz="1400" b="0" i="0" u="none" strike="noStrike">
+                <a:solidFill>
+                  <a:srgbClr val="000000"/>
+                </a:solidFill>
+              </a:rPr>
+              <a:t>是我们编译原理课程设计的项目。</a:t>
+            </a:r>
+            <a:r>
+              <a:rPr lang="en-US">
+                <a:solidFill>
+                  <a:srgbClr val="000000"/>
+                </a:solidFill>
+                <a:sym typeface="+mn-ea"/>
+              </a:rPr>
+              <a:t>目前，我们已经完成了</a:t>
+            </a:r>
+            <a:r>
+              <a:rPr lang="zh-CN" altLang="en-US">
+                <a:solidFill>
+                  <a:srgbClr val="000000"/>
+                </a:solidFill>
+                <a:sym typeface="+mn-ea"/>
+              </a:rPr>
+              <a:t>我们自定义的</a:t>
+            </a:r>
+            <a:r>
+              <a:rPr lang="en-US">
+                <a:solidFill>
+                  <a:srgbClr val="000000"/>
+                </a:solidFill>
+                <a:sym typeface="+mn-ea"/>
+              </a:rPr>
+              <a:t>第二个里程碑M2，即词法分析模块的开发与测试，并准备进入第三个里程碑M3的开发。</a:t>
+            </a:r>
+            <a:endParaRPr lang="en-US" b="0" i="0" u="none" strike="noStrike">
               <a:solidFill>
                 <a:srgbClr val="000000"/>
               </a:solidFill>
@@ -783,35 +913,7 @@
                 <a:spcPct val="100000"/>
               </a:lnSpc>
             </a:pPr>
-            <a:r>
-              <a:rPr lang="en-US" sz="1400" b="0" i="0" u="none" strike="noStrike">
-                <a:solidFill>
-                  <a:srgbClr val="000000"/>
-                </a:solidFill>
-              </a:rPr>
-              <a:t>目前，我们已经完成了第二个里程碑M2，即词法分析模块的开发与测试，并准备进入第三个里程碑M3的开发。</a:t>
-            </a:r>
-            <a:endParaRPr lang="en-US" sz="1400" b="0" i="0" u="none" strike="noStrike">
-              <a:solidFill>
-                <a:srgbClr val="000000"/>
-              </a:solidFill>
-            </a:endParaRPr>
-          </a:p>
-          <a:p>
-            <a:pPr indent="0" algn="l">
-              <a:lnSpc>
-                <a:spcPct val="100000"/>
-              </a:lnSpc>
-            </a:pPr>
-            <a:r>
-              <a:rPr lang="en-US" sz="1400" b="0" i="0" u="none" strike="noStrike">
-                <a:solidFill>
-                  <a:srgbClr val="000000"/>
-                </a:solidFill>
-              </a:rPr>
-              <a:t>我是组长丁乐航，团队成员还有金介然、何俊辉和李璇。本次汇报将严格基于已完成的事实和可验证的证据展开。</a:t>
-            </a:r>
-            <a:endParaRPr lang="en-US" sz="1400" b="0" i="0" u="none" strike="noStrike">
+            <a:endParaRPr lang="en-US" b="0" i="0" u="none" strike="noStrike">
               <a:solidFill>
                 <a:srgbClr val="000000"/>
               </a:solidFill>
@@ -876,10 +978,10 @@
           </a:lstStyle>
           <a:p>
             <a:r>
-              <a:rPr lang="cs-CZ" smtClean="0"/>
+              <a:rPr lang="cs-CZ"/>
               <a:t>‹#›</a:t>
             </a:r>
-            <a:endParaRPr lang="cs-CZ" smtClean="0"/>
+            <a:endParaRPr lang="cs-CZ"/>
           </a:p>
         </p:txBody>
       </p:sp>
@@ -965,10 +1067,10 @@
           </a:lstStyle>
           <a:p>
             <a:r>
-              <a:rPr lang="cs-CZ" smtClean="0"/>
+              <a:rPr lang="cs-CZ"/>
               <a:t>1.7.2013</a:t>
             </a:r>
-            <a:endParaRPr lang="cs-CZ" smtClean="0"/>
+            <a:endParaRPr lang="cs-CZ"/>
           </a:p>
         </p:txBody>
       </p:sp>
@@ -984,8 +1086,8 @@
         </p:nvSpPr>
         <p:spPr>
           <a:xfrm>
-            <a:off x="2857500" y="512763"/>
-            <a:ext cx="3429000" cy="2566987"/>
+            <a:off x="2290763" y="512763"/>
+            <a:ext cx="4562475" cy="2566987"/>
           </a:xfrm>
           <a:prstGeom prst="rect">
             <a:avLst/>
@@ -1041,7 +1143,87 @@
                   <a:srgbClr val="000000"/>
                 </a:solidFill>
               </a:rPr>
-              <a:t>在开发过程中，我们也遇到了一些挑战。例如，原始文法文档的乱码问题、团队成员对规则的理解偏差以及版本控制的配置问题。面对这些问题，我们没有回避，而是积极分析根因，采取了有效的措施，如冻结统一文档、明确错误码规则、制定配置规范等，并最终将所有问题闭环解决。这体现了我们团队的工程化管理能力和问题解决能力。</a:t>
+              <a:t>在开发过程中，我们也遇到了一些挑战。例如，</a:t>
+            </a:r>
+            <a:r>
+              <a:rPr lang="zh-CN" altLang="en-US" sz="1400" b="0" i="0" u="none" strike="noStrike">
+                <a:solidFill>
+                  <a:srgbClr val="000000"/>
+                </a:solidFill>
+              </a:rPr>
+              <a:t>原始文法</a:t>
+            </a:r>
+            <a:r>
+              <a:rPr lang="en-US" sz="1400" b="0" i="0" u="none" strike="noStrike">
+                <a:solidFill>
+                  <a:srgbClr val="000000"/>
+                </a:solidFill>
+              </a:rPr>
+              <a:t>的epsilon乱码问题、团队成员对</a:t>
+            </a:r>
+            <a:r>
+              <a:rPr lang="zh-CN" altLang="en-US" sz="1400" b="0" i="0" u="none" strike="noStrike">
+                <a:solidFill>
+                  <a:srgbClr val="000000"/>
+                </a:solidFill>
+              </a:rPr>
+              <a:t>文法</a:t>
+            </a:r>
+            <a:r>
+              <a:rPr lang="en-US" sz="1400" b="0" i="0" u="none" strike="noStrike">
+                <a:solidFill>
+                  <a:srgbClr val="000000"/>
+                </a:solidFill>
+              </a:rPr>
+              <a:t>规则的理解</a:t>
+            </a:r>
+            <a:r>
+              <a:rPr lang="zh-CN" altLang="en-US" sz="1400" b="0" i="0" u="none" strike="noStrike">
+                <a:solidFill>
+                  <a:srgbClr val="000000"/>
+                </a:solidFill>
+              </a:rPr>
+              <a:t>不同</a:t>
+            </a:r>
+            <a:r>
+              <a:rPr lang="en-US" sz="1400" b="0" i="0" u="none" strike="noStrike">
+                <a:solidFill>
+                  <a:srgbClr val="000000"/>
+                </a:solidFill>
+              </a:rPr>
+              <a:t>以及版本控制的配置问题。面对这些问题，</a:t>
+            </a:r>
+            <a:r>
+              <a:rPr lang="zh-CN" altLang="en-US" sz="1400" b="0" i="0" u="none" strike="noStrike">
+                <a:solidFill>
+                  <a:srgbClr val="000000"/>
+                </a:solidFill>
+              </a:rPr>
+              <a:t>我们积极</a:t>
+            </a:r>
+            <a:r>
+              <a:rPr lang="en-US" sz="1400" b="0" i="0" u="none" strike="noStrike">
+                <a:solidFill>
+                  <a:srgbClr val="000000"/>
+                </a:solidFill>
+              </a:rPr>
+              <a:t>采取了有效的措施，如</a:t>
+            </a:r>
+            <a:r>
+              <a:rPr lang="zh-CN" altLang="en-US" sz="1400" b="0" i="0" u="none" strike="noStrike">
+                <a:solidFill>
+                  <a:srgbClr val="000000"/>
+                </a:solidFill>
+              </a:rPr>
+              <a:t>编写口径冻结</a:t>
+            </a:r>
+            <a:r>
+              <a:rPr lang="en-US" sz="1400" b="0" i="0" u="none" strike="noStrike">
+                <a:solidFill>
+                  <a:srgbClr val="000000"/>
+                </a:solidFill>
+              </a:rPr>
+              <a:t>文档、明确错误码规则、制定配置规范等，并最终将所有问题闭环解决。</a:t>
             </a:r>
             <a:endParaRPr lang="en-US" sz="1400" b="0" i="0" u="none" strike="noStrike">
               <a:solidFill>
@@ -1108,10 +1290,10 @@
           </a:lstStyle>
           <a:p>
             <a:r>
-              <a:rPr lang="cs-CZ" smtClean="0"/>
+              <a:rPr lang="cs-CZ"/>
               <a:t>‹#›</a:t>
             </a:r>
-            <a:endParaRPr lang="cs-CZ" smtClean="0"/>
+            <a:endParaRPr lang="cs-CZ"/>
           </a:p>
         </p:txBody>
       </p:sp>
@@ -1197,10 +1379,10 @@
           </a:lstStyle>
           <a:p>
             <a:r>
-              <a:rPr lang="cs-CZ" smtClean="0"/>
+              <a:rPr lang="cs-CZ"/>
               <a:t>1.7.2013</a:t>
             </a:r>
-            <a:endParaRPr lang="cs-CZ" smtClean="0"/>
+            <a:endParaRPr lang="cs-CZ"/>
           </a:p>
         </p:txBody>
       </p:sp>
@@ -1273,7 +1455,7 @@
                   <a:srgbClr val="000000"/>
                 </a:solidFill>
               </a:rPr>
-              <a:t>基于当前稳定的状态，我们对M3阶段进行了详细的规划。这个阶段的核心任务是实现语法分析，并初步引入错误恢复机制。我们将分步骤完成文法规则的落地、语法分析器的接入、错误恢复的实现以及测试用例的编写。每个任务都有明确的负责人和可验收标准，确保M3阶段能够高效、高质量地完成。</a:t>
+              <a:t>基于当前稳定的状态，我们对M3阶段进行了详细的规划。这个阶段的核心任务是实现语法分析，并初步引入错误恢复机制。</a:t>
             </a:r>
             <a:endParaRPr lang="en-US" sz="1400" b="0" i="0" u="none" strike="noStrike">
               <a:solidFill>
@@ -1340,10 +1522,10 @@
           </a:lstStyle>
           <a:p>
             <a:r>
-              <a:rPr lang="cs-CZ" smtClean="0"/>
+              <a:rPr lang="cs-CZ"/>
               <a:t>‹#›</a:t>
             </a:r>
-            <a:endParaRPr lang="cs-CZ" smtClean="0"/>
+            <a:endParaRPr lang="cs-CZ"/>
           </a:p>
         </p:txBody>
       </p:sp>
@@ -1429,10 +1611,10 @@
           </a:lstStyle>
           <a:p>
             <a:r>
-              <a:rPr lang="cs-CZ" smtClean="0"/>
+              <a:rPr lang="cs-CZ"/>
               <a:t>1.7.2013</a:t>
             </a:r>
-            <a:endParaRPr lang="cs-CZ" smtClean="0"/>
+            <a:endParaRPr lang="cs-CZ"/>
           </a:p>
         </p:txBody>
       </p:sp>
@@ -1448,8 +1630,8 @@
         </p:nvSpPr>
         <p:spPr>
           <a:xfrm>
-            <a:off x="2857500" y="512763"/>
-            <a:ext cx="3429000" cy="2566987"/>
+            <a:off x="2290763" y="512763"/>
+            <a:ext cx="4562475" cy="2566987"/>
           </a:xfrm>
           <a:prstGeom prst="rect">
             <a:avLst/>
@@ -1505,7 +1687,23 @@
                   <a:srgbClr val="000000"/>
                 </a:solidFill>
               </a:rPr>
-              <a:t>最后，对本次汇报进行总结。我们已经完成了前两个里程碑的全部工作，并且所有成果都经过了严格的测试验证。目前项目状态良好，可以顺利进入下一阶段的语法分析开发。我们已经做好了充分的答辩准备，期待各位老师的提问，并特别希望能得到关于后续语法错误恢复和语义分析方面的指导。我的汇报到此结束，谢谢大家！</a:t>
+              <a:t>最后，对本次</a:t>
+            </a:r>
+            <a:r>
+              <a:rPr lang="zh-CN" altLang="en-US" sz="1400" b="0" i="0" u="none" strike="noStrike">
+                <a:solidFill>
+                  <a:srgbClr val="000000"/>
+                </a:solidFill>
+              </a:rPr>
+              <a:t>汇报分享</a:t>
+            </a:r>
+            <a:r>
+              <a:rPr lang="en-US" sz="1400" b="0" i="0" u="none" strike="noStrike">
+                <a:solidFill>
+                  <a:srgbClr val="000000"/>
+                </a:solidFill>
+              </a:rPr>
+              <a:t>进行总结。我们已经完成了前两个里程碑的全部工作，并且所有成果都经过了严格的测试验证。目前项目状态良好，可以顺利进入下一阶段的开发。我的汇报到此结束，谢谢大家！</a:t>
             </a:r>
             <a:endParaRPr lang="en-US" sz="1400" b="0" i="0" u="none" strike="noStrike">
               <a:solidFill>
@@ -1572,10 +1770,10 @@
           </a:lstStyle>
           <a:p>
             <a:r>
-              <a:rPr lang="cs-CZ" smtClean="0"/>
+              <a:rPr lang="cs-CZ"/>
               <a:t>‹#›</a:t>
             </a:r>
-            <a:endParaRPr lang="cs-CZ" smtClean="0"/>
+            <a:endParaRPr lang="cs-CZ"/>
           </a:p>
         </p:txBody>
       </p:sp>
@@ -1661,10 +1859,10 @@
           </a:lstStyle>
           <a:p>
             <a:r>
-              <a:rPr lang="cs-CZ" smtClean="0"/>
+              <a:rPr lang="cs-CZ"/>
               <a:t>1.7.2013</a:t>
             </a:r>
-            <a:endParaRPr lang="cs-CZ" smtClean="0"/>
+            <a:endParaRPr lang="cs-CZ"/>
           </a:p>
         </p:txBody>
       </p:sp>
@@ -1680,8 +1878,8 @@
         </p:nvSpPr>
         <p:spPr>
           <a:xfrm>
-            <a:off x="2857500" y="512763"/>
-            <a:ext cx="3429000" cy="2566987"/>
+            <a:off x="2290763" y="512763"/>
+            <a:ext cx="4562475" cy="2566987"/>
           </a:xfrm>
           <a:prstGeom prst="rect">
             <a:avLst/>
@@ -1732,14 +1930,62 @@
               </a:lnSpc>
             </a:pPr>
             <a:r>
-              <a:rPr lang="en-US" sz="1400" b="0" i="0" u="none" strike="noStrike">
+              <a:rPr lang="en-US" sz="1400" b="0" i="0" u="none" strike="noStrike" dirty="0">
                 <a:solidFill>
                   <a:srgbClr val="000000"/>
                 </a:solidFill>
               </a:rPr>
-              <a:t>首先，明确我们的项目目标和验收标准。我们的最终目标是实现一个能将Pascal-S源代码自动转换为等价C代码的编译器。整个过程需要经历词法、语法、语义分析和代码生成几个核心阶段。</a:t>
-            </a:r>
-            <a:endParaRPr lang="en-US" sz="1400" b="0" i="0" u="none" strike="noStrike">
+              <a:t>首先</a:t>
+            </a:r>
+            <a:r>
+              <a:rPr lang="zh-CN" altLang="en-US" sz="1400" b="0" i="0" u="none" strike="noStrike" dirty="0">
+                <a:solidFill>
+                  <a:srgbClr val="000000"/>
+                </a:solidFill>
+              </a:rPr>
+              <a:t>明确</a:t>
+            </a:r>
+            <a:r>
+              <a:rPr lang="en-US" sz="1400" b="0" i="0" u="none" strike="noStrike" dirty="0">
+                <a:solidFill>
+                  <a:srgbClr val="000000"/>
+                </a:solidFill>
+              </a:rPr>
+              <a:t>我们的</a:t>
+            </a:r>
+            <a:r>
+              <a:rPr lang="zh-CN" altLang="en-US" sz="1400" b="0" i="0" u="none" strike="noStrike" dirty="0">
+                <a:solidFill>
+                  <a:srgbClr val="000000"/>
+                </a:solidFill>
+              </a:rPr>
+              <a:t>需求：也就是</a:t>
+            </a:r>
+            <a:r>
+              <a:rPr lang="en-US" sz="1400" b="0" i="0" u="none" strike="noStrike" dirty="0">
+                <a:solidFill>
+                  <a:srgbClr val="000000"/>
+                </a:solidFill>
+              </a:rPr>
+              <a:t>项目目标和验收标准。我们的最终目标是实现一个能将Pascal-S源代码自动转换为等价C</a:t>
+            </a:r>
+            <a:r>
+              <a:rPr lang="zh-CN" altLang="en-US" sz="1400" b="0" i="0" u="none" strike="noStrike" dirty="0">
+                <a:solidFill>
+                  <a:srgbClr val="000000"/>
+                </a:solidFill>
+              </a:rPr>
+              <a:t>语言</a:t>
+            </a:r>
+            <a:r>
+              <a:rPr lang="en-US" sz="1400" b="0" i="0" u="none" strike="noStrike" dirty="0">
+                <a:solidFill>
+                  <a:srgbClr val="000000"/>
+                </a:solidFill>
+              </a:rPr>
+              <a:t>代码的编译器。整个过程需要经历词法、语法、语义分析和代码生成几个核心阶段。</a:t>
+            </a:r>
+            <a:endParaRPr lang="en-US" sz="1400" b="0" i="0" u="none" strike="noStrike" dirty="0">
               <a:solidFill>
                 <a:srgbClr val="000000"/>
               </a:solidFill>
@@ -1752,14 +1998,38 @@
               </a:lnSpc>
             </a:pPr>
             <a:r>
-              <a:rPr lang="en-US" sz="1400" b="0" i="0" u="none" strike="noStrike">
+              <a:rPr lang="en-US" sz="1400" b="0" i="0" u="none" strike="noStrike" dirty="0" err="1">
                 <a:solidFill>
                   <a:srgbClr val="000000"/>
                 </a:solidFill>
               </a:rPr>
-              <a:t>同时，我们必须严格遵守几个硬性验收约束，比如可执行文件名为pascc，支持-i参数输入，并生成同名的.c文件。</a:t>
-            </a:r>
-            <a:endParaRPr lang="en-US" sz="1400" b="0" i="0" u="none" strike="noStrike">
+              <a:t>同时，我们必须严格遵守几个验收</a:t>
+            </a:r>
+            <a:r>
+              <a:rPr lang="zh-CN" altLang="en-US" sz="1400" b="0" i="0" u="none" strike="noStrike" dirty="0" err="1">
+                <a:solidFill>
+                  <a:srgbClr val="000000"/>
+                </a:solidFill>
+              </a:rPr>
+              <a:t>规定</a:t>
+            </a:r>
+            <a:r>
+              <a:rPr lang="en-US" sz="1400" b="0" i="0" u="none" strike="noStrike" dirty="0" err="1">
+                <a:solidFill>
+                  <a:srgbClr val="000000"/>
+                </a:solidFill>
+              </a:rPr>
+              <a:t>，比如可执行文件名为pascc，支持-i参数输入，并生成同名的.c文件</a:t>
+            </a:r>
+            <a:r>
+              <a:rPr lang="en-US" sz="1400" b="0" i="0" u="none" strike="noStrike" dirty="0">
+                <a:solidFill>
+                  <a:srgbClr val="000000"/>
+                </a:solidFill>
+              </a:rPr>
+              <a:t>。</a:t>
+            </a:r>
+            <a:endParaRPr lang="en-US" sz="1400" b="0" i="0" u="none" strike="noStrike" dirty="0">
               <a:solidFill>
                 <a:srgbClr val="000000"/>
               </a:solidFill>
@@ -1772,14 +2042,54 @@
               </a:lnSpc>
             </a:pPr>
             <a:r>
-              <a:rPr lang="en-US" sz="1400" b="0" i="0" u="none" strike="noStrike">
+              <a:rPr lang="en-US" sz="1400" b="0" i="0" u="none" strike="noStrike" dirty="0" err="1">
                 <a:solidFill>
                   <a:srgbClr val="000000"/>
                 </a:solidFill>
               </a:rPr>
-              <a:t>本次中期汇报，我们将重点展示前两个里程碑，即工程搭建和词法分析的完成情况。</a:t>
-            </a:r>
-            <a:endParaRPr lang="en-US" sz="1400" b="0" i="0" u="none" strike="noStrike">
+              <a:t>本次</a:t>
+            </a:r>
+            <a:r>
+              <a:rPr lang="zh-CN" altLang="en-US" sz="1400" b="0" i="0" u="none" strike="noStrike" dirty="0" err="1">
+                <a:solidFill>
+                  <a:srgbClr val="000000"/>
+                </a:solidFill>
+              </a:rPr>
+              <a:t>讨论</a:t>
+            </a:r>
+            <a:r>
+              <a:rPr lang="en-US" sz="1400" b="0" i="0" u="none" strike="noStrike" dirty="0" err="1">
+                <a:solidFill>
+                  <a:srgbClr val="000000"/>
+                </a:solidFill>
+              </a:rPr>
+              <a:t>汇报，我们将重点展示前两个</a:t>
+            </a:r>
+            <a:r>
+              <a:rPr lang="zh-CN" altLang="en-US" sz="1400" b="0" i="0" u="none" strike="noStrike" dirty="0" err="1">
+                <a:solidFill>
+                  <a:srgbClr val="000000"/>
+                </a:solidFill>
+              </a:rPr>
+              <a:t>阶段的</a:t>
+            </a:r>
+            <a:r>
+              <a:rPr lang="en-US" sz="1400" b="0" i="0" u="none" strike="noStrike" dirty="0" err="1">
+                <a:solidFill>
+                  <a:srgbClr val="000000"/>
+                </a:solidFill>
+              </a:rPr>
+              <a:t>里程碑，即工程搭建和词法分析的完成情况</a:t>
+            </a:r>
+            <a:r>
+              <a:rPr lang="en-US" sz="1400" b="0" i="0" u="none" strike="noStrike" dirty="0">
+                <a:solidFill>
+                  <a:srgbClr val="000000"/>
+                </a:solidFill>
+              </a:rPr>
+              <a:t>。</a:t>
+            </a:r>
+            <a:endParaRPr lang="en-US" sz="1400" b="0" i="0" u="none" strike="noStrike" dirty="0">
               <a:solidFill>
                 <a:srgbClr val="000000"/>
               </a:solidFill>
@@ -1844,10 +2154,10 @@
           </a:lstStyle>
           <a:p>
             <a:r>
-              <a:rPr lang="cs-CZ" smtClean="0"/>
+              <a:rPr lang="cs-CZ"/>
               <a:t>‹#›</a:t>
             </a:r>
-            <a:endParaRPr lang="cs-CZ" smtClean="0"/>
+            <a:endParaRPr lang="cs-CZ"/>
           </a:p>
         </p:txBody>
       </p:sp>
@@ -1933,10 +2243,10 @@
           </a:lstStyle>
           <a:p>
             <a:r>
-              <a:rPr lang="cs-CZ" smtClean="0"/>
+              <a:rPr lang="cs-CZ"/>
               <a:t>1.7.2013</a:t>
             </a:r>
-            <a:endParaRPr lang="cs-CZ" smtClean="0"/>
+            <a:endParaRPr lang="cs-CZ"/>
           </a:p>
         </p:txBody>
       </p:sp>
@@ -1952,8 +2262,8 @@
         </p:nvSpPr>
         <p:spPr>
           <a:xfrm>
-            <a:off x="2857500" y="512763"/>
-            <a:ext cx="3429000" cy="2566987"/>
+            <a:off x="2290763" y="512763"/>
+            <a:ext cx="4562475" cy="2566987"/>
           </a:xfrm>
           <a:prstGeom prst="rect">
             <a:avLst/>
@@ -2009,7 +2319,97 @@
                   <a:srgbClr val="000000"/>
                 </a:solidFill>
               </a:rPr>
-              <a:t>为了清晰地展示项目进展，我们将整个开发过程划分为多个里程碑。这里列出了前三个关键里程碑的全称和核心目标。</a:t>
+              <a:t>为了清晰地展示项目进展，我们</a:t>
+            </a:r>
+            <a:r>
+              <a:rPr lang="zh-CN" altLang="en-US" sz="1400" b="0" i="0" u="none" strike="noStrike">
+                <a:solidFill>
+                  <a:srgbClr val="000000"/>
+                </a:solidFill>
+              </a:rPr>
+              <a:t>在概要设计的时候</a:t>
+            </a:r>
+            <a:r>
+              <a:rPr lang="en-US" sz="1400" b="0" i="0" u="none" strike="noStrike">
+                <a:solidFill>
+                  <a:srgbClr val="000000"/>
+                </a:solidFill>
+              </a:rPr>
+              <a:t>将整个开发过程划分为多个里程碑。</a:t>
+            </a:r>
+            <a:r>
+              <a:rPr lang="en-US">
+                <a:solidFill>
+                  <a:srgbClr val="000000"/>
+                </a:solidFill>
+                <a:sym typeface="+mn-ea"/>
+              </a:rPr>
+              <a:t>每个里程碑的完成都有明确的判定标准，即“功能实现、测试通过、可验证证据”，这确保了我们每一</a:t>
+            </a:r>
+            <a:r>
+              <a:rPr lang="zh-CN" altLang="en-US">
+                <a:solidFill>
+                  <a:srgbClr val="000000"/>
+                </a:solidFill>
+                <a:sym typeface="+mn-ea"/>
+              </a:rPr>
+              <a:t>阶段</a:t>
+            </a:r>
+            <a:r>
+              <a:rPr lang="en-US">
+                <a:solidFill>
+                  <a:srgbClr val="000000"/>
+                </a:solidFill>
+                <a:sym typeface="+mn-ea"/>
+              </a:rPr>
+              <a:t>的质量都是</a:t>
+            </a:r>
+            <a:r>
+              <a:rPr lang="zh-CN" altLang="en-US">
+                <a:solidFill>
+                  <a:srgbClr val="000000"/>
+                </a:solidFill>
+                <a:sym typeface="+mn-ea"/>
+              </a:rPr>
+              <a:t>稳定的，更方便任务交接，开发时</a:t>
+            </a:r>
+            <a:r>
+              <a:rPr lang="zh-CN" altLang="en-US">
+                <a:solidFill>
+                  <a:srgbClr val="000000"/>
+                </a:solidFill>
+                <a:sym typeface="+mn-ea"/>
+              </a:rPr>
+              <a:t>的思路也更清晰</a:t>
+            </a:r>
+            <a:r>
+              <a:rPr lang="en-US">
+                <a:solidFill>
+                  <a:srgbClr val="000000"/>
+                </a:solidFill>
+                <a:sym typeface="+mn-ea"/>
+              </a:rPr>
+              <a:t>。</a:t>
+            </a:r>
+            <a:endParaRPr lang="en-US" b="0" i="0" u="none" strike="noStrike">
+              <a:solidFill>
+                <a:srgbClr val="000000"/>
+              </a:solidFill>
+            </a:endParaRPr>
+          </a:p>
+          <a:p>
+            <a:pPr indent="0" algn="l">
+              <a:lnSpc>
+                <a:spcPct val="100000"/>
+              </a:lnSpc>
+            </a:pPr>
+            <a:r>
+              <a:rPr lang="en-US" sz="1400" b="0" i="0" u="none" strike="noStrike">
+                <a:solidFill>
+                  <a:srgbClr val="000000"/>
+                </a:solidFill>
+              </a:rPr>
+              <a:t>这里列出了前三个关键里程碑的全称和核心目标。</a:t>
             </a:r>
             <a:endParaRPr lang="en-US" sz="1400" b="0" i="0" u="none" strike="noStrike">
               <a:solidFill>
@@ -2029,7 +2429,39 @@
                   <a:srgbClr val="000000"/>
                 </a:solidFill>
               </a:rPr>
-              <a:t>我们目前正处于M2完成、准备进入M3的节点。M1阶段我们完成了基础的工程搭建，M2阶段核心的词法分析模块已经开发完毕并通过了严格的测试。</a:t>
+              <a:t>M1阶段我们</a:t>
+            </a:r>
+            <a:r>
+              <a:rPr lang="zh-CN" altLang="en-US" sz="1400" b="0" i="0" u="none" strike="noStrike">
+                <a:solidFill>
+                  <a:srgbClr val="000000"/>
+                </a:solidFill>
+              </a:rPr>
+              <a:t>已经</a:t>
+            </a:r>
+            <a:r>
+              <a:rPr lang="en-US" sz="1400" b="0" i="0" u="none" strike="noStrike">
+                <a:solidFill>
+                  <a:srgbClr val="000000"/>
+                </a:solidFill>
+              </a:rPr>
+              <a:t>完成了基础的工程搭建</a:t>
+            </a:r>
+            <a:r>
+              <a:rPr lang="zh-CN" altLang="en-US" sz="1400" b="0" i="0" u="none" strike="noStrike">
+                <a:solidFill>
+                  <a:srgbClr val="000000"/>
+                </a:solidFill>
+              </a:rPr>
+              <a:t>并总结出了一个文法口径冻结草案</a:t>
+            </a:r>
+            <a:r>
+              <a:rPr lang="en-US" sz="1400" b="0" i="0" u="none" strike="noStrike">
+                <a:solidFill>
+                  <a:srgbClr val="000000"/>
+                </a:solidFill>
+              </a:rPr>
+              <a:t>，M2阶段核心的词法分析模块已经开发完毕并通过了严格的测试。</a:t>
             </a:r>
             <a:endParaRPr lang="en-US" sz="1400" b="0" i="0" u="none" strike="noStrike">
               <a:solidFill>
@@ -2049,9 +2481,297 @@
                   <a:srgbClr val="000000"/>
                 </a:solidFill>
               </a:rPr>
-              <a:t>接下来的M3阶段，我们将重点攻克语法分析和错误恢复功能。每个里程碑的完成都有明确的判定标准，即“功能实现、测试通过、可验证证据”，这确保了我们每一步交付的质量都是可追溯、可验证的。</a:t>
-            </a:r>
-            <a:endParaRPr lang="en-US" sz="1400" b="0" i="0" u="none" strike="noStrike">
+              <a:t>接下来的M3阶段，我们将重点攻克语法分析和错误恢复功能。</a:t>
+            </a:r>
+            <a:r>
+              <a:rPr lang="en-US" altLang="zh-CN" sz="1400" b="0" i="0" u="none" strike="noStrike">
+                <a:solidFill>
+                  <a:srgbClr val="000000"/>
+                </a:solidFill>
+              </a:rPr>
+              <a:t>1. M1</a:t>
+            </a:r>
+            <a:r>
+              <a:rPr lang="zh-CN" altLang="en-US" sz="1400" b="0" i="0" u="none" strike="noStrike">
+                <a:solidFill>
+                  <a:srgbClr val="000000"/>
+                </a:solidFill>
+              </a:rPr>
+              <a:t>：完成需求复核、文法边界确认、目录结构与构建脚本初始化，形成可运行的工程骨</a:t>
+            </a:r>
+            <a:endParaRPr lang="zh-CN" altLang="en-US" sz="1400" b="0" i="0" u="none" strike="noStrike">
+              <a:solidFill>
+                <a:srgbClr val="000000"/>
+              </a:solidFill>
+            </a:endParaRPr>
+          </a:p>
+          <a:p>
+            <a:pPr indent="0" algn="l">
+              <a:lnSpc>
+                <a:spcPct val="100000"/>
+              </a:lnSpc>
+            </a:pPr>
+            <a:r>
+              <a:rPr lang="zh-CN" altLang="en-US" sz="1400" b="0" i="0" u="none" strike="noStrike">
+                <a:solidFill>
+                  <a:srgbClr val="000000"/>
+                </a:solidFill>
+              </a:rPr>
+              <a:t>架。</a:t>
+            </a:r>
+            <a:endParaRPr lang="zh-CN" altLang="en-US" sz="1400" b="0" i="0" u="none" strike="noStrike">
+              <a:solidFill>
+                <a:srgbClr val="000000"/>
+              </a:solidFill>
+            </a:endParaRPr>
+          </a:p>
+          <a:p>
+            <a:pPr indent="0" algn="l">
+              <a:lnSpc>
+                <a:spcPct val="100000"/>
+              </a:lnSpc>
+            </a:pPr>
+            <a:r>
+              <a:rPr lang="en-US" altLang="zh-CN" sz="1400" b="0" i="0" u="none" strike="noStrike">
+                <a:solidFill>
+                  <a:srgbClr val="000000"/>
+                </a:solidFill>
+              </a:rPr>
+              <a:t>2. M2</a:t>
+            </a:r>
+            <a:r>
+              <a:rPr lang="zh-CN" altLang="en-US" sz="1400" b="0" i="0" u="none" strike="noStrike">
+                <a:solidFill>
+                  <a:srgbClr val="000000"/>
+                </a:solidFill>
+              </a:rPr>
+              <a:t>：完成词法分析模块开发与词法测试用例，打通</a:t>
+            </a:r>
+            <a:r>
+              <a:rPr lang="en-US" altLang="zh-CN" sz="1400" b="0" i="0" u="none" strike="noStrike">
+                <a:solidFill>
+                  <a:srgbClr val="000000"/>
+                </a:solidFill>
+              </a:rPr>
+              <a:t> Token </a:t>
+            </a:r>
+            <a:r>
+              <a:rPr lang="zh-CN" altLang="en-US" sz="1400" b="0" i="0" u="none" strike="noStrike">
+                <a:solidFill>
+                  <a:srgbClr val="000000"/>
+                </a:solidFill>
+              </a:rPr>
+              <a:t>输出链路。</a:t>
+            </a:r>
+            <a:endParaRPr lang="zh-CN" altLang="en-US" sz="1400" b="0" i="0" u="none" strike="noStrike">
+              <a:solidFill>
+                <a:srgbClr val="000000"/>
+              </a:solidFill>
+            </a:endParaRPr>
+          </a:p>
+          <a:p>
+            <a:pPr indent="0" algn="l">
+              <a:lnSpc>
+                <a:spcPct val="100000"/>
+              </a:lnSpc>
+            </a:pPr>
+            <a:r>
+              <a:rPr lang="en-US" altLang="zh-CN" sz="1400" b="0" i="0" u="none" strike="noStrike">
+                <a:solidFill>
+                  <a:srgbClr val="000000"/>
+                </a:solidFill>
+              </a:rPr>
+              <a:t>3.M3</a:t>
+            </a:r>
+            <a:r>
+              <a:rPr lang="zh-CN" altLang="en-US" sz="1400" b="0" i="0" u="none" strike="noStrike">
+                <a:solidFill>
+                  <a:srgbClr val="000000"/>
+                </a:solidFill>
+              </a:rPr>
+              <a:t>：完成语法分析模块开发，接入</a:t>
+            </a:r>
+            <a:r>
+              <a:rPr lang="en-US" altLang="zh-CN" sz="1400" b="0" i="0" u="none" strike="noStrike">
+                <a:solidFill>
+                  <a:srgbClr val="000000"/>
+                </a:solidFill>
+              </a:rPr>
+              <a:t> YACC / Bison</a:t>
+            </a:r>
+            <a:r>
+              <a:rPr lang="zh-CN" altLang="en-US" sz="1400" b="0" i="0" u="none" strike="noStrike">
+                <a:solidFill>
+                  <a:srgbClr val="000000"/>
+                </a:solidFill>
+              </a:rPr>
+              <a:t>，建立基础错误恢复机制并打通主流</a:t>
+            </a:r>
+            <a:endParaRPr lang="zh-CN" altLang="en-US" sz="1400" b="0" i="0" u="none" strike="noStrike">
+              <a:solidFill>
+                <a:srgbClr val="000000"/>
+              </a:solidFill>
+            </a:endParaRPr>
+          </a:p>
+          <a:p>
+            <a:pPr indent="0" algn="l">
+              <a:lnSpc>
+                <a:spcPct val="100000"/>
+              </a:lnSpc>
+            </a:pPr>
+            <a:r>
+              <a:rPr lang="zh-CN" altLang="en-US" sz="1400" b="0" i="0" u="none" strike="noStrike">
+                <a:solidFill>
+                  <a:srgbClr val="000000"/>
+                </a:solidFill>
+              </a:rPr>
+              <a:t>程。</a:t>
+            </a:r>
+            <a:endParaRPr lang="zh-CN" altLang="en-US" sz="1400" b="0" i="0" u="none" strike="noStrike">
+              <a:solidFill>
+                <a:srgbClr val="000000"/>
+              </a:solidFill>
+            </a:endParaRPr>
+          </a:p>
+          <a:p>
+            <a:pPr indent="0" algn="l">
+              <a:lnSpc>
+                <a:spcPct val="100000"/>
+              </a:lnSpc>
+            </a:pPr>
+            <a:r>
+              <a:rPr lang="en-US" altLang="zh-CN" sz="1400" b="0" i="0" u="none" strike="noStrike">
+                <a:solidFill>
+                  <a:srgbClr val="000000"/>
+                </a:solidFill>
+              </a:rPr>
+              <a:t>4. </a:t>
+            </a:r>
+            <a:r>
+              <a:rPr lang="en-US" sz="1400" b="0" i="0" u="none" strike="noStrike">
+                <a:solidFill>
+                  <a:srgbClr val="000000"/>
+                </a:solidFill>
+              </a:rPr>
+              <a:t>M4</a:t>
+            </a:r>
+            <a:r>
+              <a:rPr lang="zh-CN" altLang="en-US" sz="1400" b="0" i="0" u="none" strike="noStrike">
+                <a:solidFill>
+                  <a:srgbClr val="000000"/>
+                </a:solidFill>
+              </a:rPr>
+              <a:t>：完成语义分析与符号表实现，补齐类型检查、作用域检查、参数检查等核心语义规</a:t>
+            </a:r>
+            <a:endParaRPr lang="zh-CN" altLang="en-US" sz="1400" b="0" i="0" u="none" strike="noStrike">
+              <a:solidFill>
+                <a:srgbClr val="000000"/>
+              </a:solidFill>
+            </a:endParaRPr>
+          </a:p>
+          <a:p>
+            <a:pPr indent="0" algn="l">
+              <a:lnSpc>
+                <a:spcPct val="100000"/>
+              </a:lnSpc>
+            </a:pPr>
+            <a:r>
+              <a:rPr lang="zh-CN" altLang="en-US" sz="1400" b="0" i="0" u="none" strike="noStrike">
+                <a:solidFill>
+                  <a:srgbClr val="000000"/>
+                </a:solidFill>
+              </a:rPr>
+              <a:t>则。</a:t>
+            </a:r>
+            <a:endParaRPr lang="zh-CN" altLang="en-US" sz="1400" b="0" i="0" u="none" strike="noStrike">
+              <a:solidFill>
+                <a:srgbClr val="000000"/>
+              </a:solidFill>
+            </a:endParaRPr>
+          </a:p>
+          <a:p>
+            <a:pPr indent="0" algn="l">
+              <a:lnSpc>
+                <a:spcPct val="100000"/>
+              </a:lnSpc>
+            </a:pPr>
+            <a:r>
+              <a:rPr lang="en-US" altLang="zh-CN" sz="1400" b="0" i="0" u="none" strike="noStrike">
+                <a:solidFill>
+                  <a:srgbClr val="000000"/>
+                </a:solidFill>
+              </a:rPr>
+              <a:t>5. </a:t>
+            </a:r>
+            <a:r>
+              <a:rPr lang="en-US" sz="1400" b="0" i="0" u="none" strike="noStrike">
+                <a:solidFill>
+                  <a:srgbClr val="000000"/>
+                </a:solidFill>
+              </a:rPr>
+              <a:t>M5</a:t>
+            </a:r>
+            <a:r>
+              <a:rPr lang="zh-CN" altLang="en-US" sz="1400" b="0" i="0" u="none" strike="noStrike">
+                <a:solidFill>
+                  <a:srgbClr val="000000"/>
+                </a:solidFill>
+              </a:rPr>
+              <a:t>：完成语法制导翻译与代码生成，确保输出</a:t>
+            </a:r>
+            <a:r>
+              <a:rPr lang="en-US" altLang="zh-CN" sz="1400" b="0" i="0" u="none" strike="noStrike">
+                <a:solidFill>
+                  <a:srgbClr val="000000"/>
+                </a:solidFill>
+              </a:rPr>
+              <a:t> C </a:t>
+            </a:r>
+            <a:r>
+              <a:rPr lang="zh-CN" altLang="en-US" sz="1400" b="0" i="0" u="none" strike="noStrike">
+                <a:solidFill>
+                  <a:srgbClr val="000000"/>
+                </a:solidFill>
+              </a:rPr>
+              <a:t>文件可编译并满足同名同目录约束。</a:t>
+            </a:r>
+            <a:endParaRPr lang="zh-CN" altLang="en-US" sz="1400" b="0" i="0" u="none" strike="noStrike">
+              <a:solidFill>
+                <a:srgbClr val="000000"/>
+              </a:solidFill>
+            </a:endParaRPr>
+          </a:p>
+          <a:p>
+            <a:pPr indent="0" algn="l">
+              <a:lnSpc>
+                <a:spcPct val="100000"/>
+              </a:lnSpc>
+            </a:pPr>
+            <a:r>
+              <a:rPr lang="en-US" altLang="zh-CN" sz="1400" b="0" i="0" u="none" strike="noStrike">
+                <a:solidFill>
+                  <a:srgbClr val="000000"/>
+                </a:solidFill>
+              </a:rPr>
+              <a:t>6</a:t>
+            </a:r>
+            <a:r>
+              <a:rPr lang="en-US" sz="1400" b="0" i="0" u="none" strike="noStrike">
+                <a:solidFill>
+                  <a:srgbClr val="000000"/>
+                </a:solidFill>
+              </a:rPr>
+              <a:t>.M6</a:t>
+            </a:r>
+            <a:r>
+              <a:rPr lang="zh-CN" altLang="en-US" sz="1400" b="0" i="0" u="none" strike="noStrike">
+                <a:solidFill>
+                  <a:srgbClr val="000000"/>
+                </a:solidFill>
+              </a:rPr>
+              <a:t>：完成联调、回归测试与平台对齐验证，整理交付文档并进行预验收演练。</a:t>
+            </a:r>
+            <a:endParaRPr lang="zh-CN" altLang="en-US" sz="1400" b="0" i="0" u="none" strike="noStrike">
               <a:solidFill>
                 <a:srgbClr val="000000"/>
               </a:solidFill>
@@ -2116,10 +2836,10 @@
           </a:lstStyle>
           <a:p>
             <a:r>
-              <a:rPr lang="cs-CZ" smtClean="0"/>
+              <a:rPr lang="cs-CZ"/>
               <a:t>‹#›</a:t>
             </a:r>
-            <a:endParaRPr lang="cs-CZ" smtClean="0"/>
+            <a:endParaRPr lang="cs-CZ"/>
           </a:p>
         </p:txBody>
       </p:sp>
@@ -2205,10 +2925,10 @@
           </a:lstStyle>
           <a:p>
             <a:r>
-              <a:rPr lang="cs-CZ" smtClean="0"/>
+              <a:rPr lang="cs-CZ"/>
               <a:t>1.7.2013</a:t>
             </a:r>
-            <a:endParaRPr lang="cs-CZ" smtClean="0"/>
+            <a:endParaRPr lang="cs-CZ"/>
           </a:p>
         </p:txBody>
       </p:sp>
@@ -2281,7 +3001,23 @@
                   <a:srgbClr val="000000"/>
                 </a:solidFill>
               </a:rPr>
-              <a:t>回顾M1阶段，我们的核心工作是“搭骨架、定规则”。我们建立了标准的工程目录结构，统一了文法规则，确保了后续开发的一致性。同时，我们打通了从命令行输入到生成.c文件的最小链路，并建立了完善的文档记录机制。这些工作虽然不直接实现功能，但为M2阶段词法分析的顺利开发铺平了道路，有效减少了后期可能出现的返工。</a:t>
+              <a:t>回顾M1阶段，我们的核心工作是“搭骨架、定规则”。我们建立了标准的工程目录结构，统一了文法规则，确保了后续开发的一致性。同时，我们打通了从命令行输入到生成.c文件的最小链路，并建立了完善的文档记录机制。这些工作虽然不直接实现功能，但</a:t>
+            </a:r>
+            <a:r>
+              <a:rPr lang="zh-CN" altLang="en-US" sz="1400" b="0" i="0" u="none" strike="noStrike">
+                <a:solidFill>
+                  <a:srgbClr val="000000"/>
+                </a:solidFill>
+              </a:rPr>
+              <a:t>可以让我们更顺利地进行所有后续开发</a:t>
+            </a:r>
+            <a:r>
+              <a:rPr lang="en-US" sz="1400" b="0" i="0" u="none" strike="noStrike">
+                <a:solidFill>
+                  <a:srgbClr val="000000"/>
+                </a:solidFill>
+              </a:rPr>
+              <a:t>。</a:t>
             </a:r>
             <a:endParaRPr lang="en-US" sz="1400" b="0" i="0" u="none" strike="noStrike">
               <a:solidFill>
@@ -2348,10 +3084,10 @@
           </a:lstStyle>
           <a:p>
             <a:r>
-              <a:rPr lang="cs-CZ" smtClean="0"/>
+              <a:rPr lang="cs-CZ"/>
               <a:t>‹#›</a:t>
             </a:r>
-            <a:endParaRPr lang="cs-CZ" smtClean="0"/>
+            <a:endParaRPr lang="cs-CZ"/>
           </a:p>
         </p:txBody>
       </p:sp>
@@ -2437,10 +3173,10 @@
           </a:lstStyle>
           <a:p>
             <a:r>
-              <a:rPr lang="cs-CZ" smtClean="0"/>
+              <a:rPr lang="cs-CZ"/>
               <a:t>1.7.2013</a:t>
             </a:r>
-            <a:endParaRPr lang="cs-CZ" smtClean="0"/>
+            <a:endParaRPr lang="cs-CZ"/>
           </a:p>
         </p:txBody>
       </p:sp>
@@ -2456,8 +3192,8 @@
         </p:nvSpPr>
         <p:spPr>
           <a:xfrm>
-            <a:off x="2857500" y="512763"/>
-            <a:ext cx="3429000" cy="2566987"/>
+            <a:off x="2290763" y="512763"/>
+            <a:ext cx="4562475" cy="2566987"/>
           </a:xfrm>
           <a:prstGeom prst="rect">
             <a:avLst/>
@@ -2513,7 +3249,23 @@
                   <a:srgbClr val="000000"/>
                 </a:solidFill>
               </a:rPr>
-              <a:t>进入M2阶段，我们的目标非常明确：实现一个功能完整、健壮且可测试的词法分析器。这里列出了我们为M2设定的四个完成标准，涵盖了功能正确性、错误处理、接口规范和测试验证四个方面。这些标准是客观、可量化的，确保我们的交付成果是可靠且易于验证的。</a:t>
+              <a:t>进入M2阶段，我们的目标非常明确：实现一个功能完整</a:t>
+            </a:r>
+            <a:r>
+              <a:rPr lang="zh-CN" altLang="en-US" sz="1400" b="0" i="0" u="none" strike="noStrike">
+                <a:solidFill>
+                  <a:srgbClr val="000000"/>
+                </a:solidFill>
+              </a:rPr>
+              <a:t>、</a:t>
+            </a:r>
+            <a:r>
+              <a:rPr lang="en-US" sz="1400" b="0" i="0" u="none" strike="noStrike">
+                <a:solidFill>
+                  <a:srgbClr val="000000"/>
+                </a:solidFill>
+              </a:rPr>
+              <a:t>可测试的词法分析器。这里列出了我们为M2设定的四个完成标准，涵盖了功能正确性、错误处理、接口规范和测试验证四个方面。</a:t>
             </a:r>
             <a:endParaRPr lang="en-US" sz="1400" b="0" i="0" u="none" strike="noStrike">
               <a:solidFill>
@@ -2580,10 +3332,10 @@
           </a:lstStyle>
           <a:p>
             <a:r>
-              <a:rPr lang="cs-CZ" smtClean="0"/>
+              <a:rPr lang="cs-CZ"/>
               <a:t>‹#›</a:t>
             </a:r>
-            <a:endParaRPr lang="cs-CZ" smtClean="0"/>
+            <a:endParaRPr lang="cs-CZ"/>
           </a:p>
         </p:txBody>
       </p:sp>
@@ -2669,10 +3421,10 @@
           </a:lstStyle>
           <a:p>
             <a:r>
-              <a:rPr lang="cs-CZ" smtClean="0"/>
+              <a:rPr lang="cs-CZ"/>
               <a:t>1.7.2013</a:t>
             </a:r>
-            <a:endParaRPr lang="cs-CZ" smtClean="0"/>
+            <a:endParaRPr lang="cs-CZ"/>
           </a:p>
         </p:txBody>
       </p:sp>
@@ -2688,8 +3440,8 @@
         </p:nvSpPr>
         <p:spPr>
           <a:xfrm>
-            <a:off x="2857500" y="512763"/>
-            <a:ext cx="3429000" cy="2566987"/>
+            <a:off x="2290763" y="512763"/>
+            <a:ext cx="4562475" cy="2566987"/>
           </a:xfrm>
           <a:prstGeom prst="rect">
             <a:avLst/>
@@ -2745,7 +3497,67 @@
                   <a:srgbClr val="000000"/>
                 </a:solidFill>
               </a:rPr>
-              <a:t>在设计上，我们采用了清晰的模块化结构。左侧的图展示了词法分析的核心流程：输入源代码字符串，经过处理后，输出Token流和错误流。</a:t>
+              <a:t>在设计上，我们采用了清晰的模块化结构。左侧的图展示了词法分析的核心流程：</a:t>
+            </a:r>
+            <a:r>
+              <a:rPr lang="zh-CN" altLang="en-US" sz="1400" b="0" i="0" u="none" strike="noStrike">
+                <a:solidFill>
+                  <a:srgbClr val="000000"/>
+                </a:solidFill>
+              </a:rPr>
+              <a:t>先接入源码输入，由词法分析核心完成核心处理，过程中同步生成词法令牌流和词法错误流，这两个流数据会一同传入编译器驱动模块，最终驱动模块根据整体处理情况，判定并走向编译成功或编译失败的不同执行路径。</a:t>
+            </a:r>
+            <a:endParaRPr lang="zh-CN" altLang="en-US" sz="1400" b="0" i="0" u="none" strike="noStrike">
+              <a:solidFill>
+                <a:srgbClr val="000000"/>
+              </a:solidFill>
+            </a:endParaRPr>
+          </a:p>
+          <a:p>
+            <a:pPr indent="0" algn="l">
+              <a:lnSpc>
+                <a:spcPct val="100000"/>
+              </a:lnSpc>
+            </a:pPr>
+            <a:r>
+              <a:rPr lang="en-US" sz="1400" b="0" i="0" u="none" strike="noStrike">
+                <a:solidFill>
+                  <a:srgbClr val="000000"/>
+                </a:solidFill>
+              </a:rPr>
+              <a:t>我们设计</a:t>
+            </a:r>
+            <a:r>
+              <a:rPr lang="zh-CN" altLang="en-US" sz="1400" b="0" i="0" u="none" strike="noStrike">
+                <a:solidFill>
+                  <a:srgbClr val="000000"/>
+                </a:solidFill>
+              </a:rPr>
+              <a:t>的</a:t>
+            </a:r>
+            <a:r>
+              <a:rPr lang="en-US" sz="1400" b="0" i="0" u="none" strike="noStrike">
+                <a:solidFill>
+                  <a:srgbClr val="000000"/>
+                </a:solidFill>
+              </a:rPr>
+              <a:t>数据结构和接口</a:t>
+            </a:r>
+            <a:r>
+              <a:rPr lang="zh-CN" altLang="en-US" sz="1400" b="0" i="0" u="none" strike="noStrike">
+                <a:solidFill>
+                  <a:srgbClr val="000000"/>
+                </a:solidFill>
+              </a:rPr>
+              <a:t>支持</a:t>
+            </a:r>
+            <a:r>
+              <a:rPr lang="en-US" sz="1400" b="0" i="0" u="none" strike="noStrike">
+                <a:solidFill>
+                  <a:srgbClr val="000000"/>
+                </a:solidFill>
+              </a:rPr>
+              <a:t>结果和错误并行返回，使得错误处理更加灵活。同时，我们全面支持了Pascal-S语言的各种词法规则，包括大小写不敏感、多种常量类型和复合符号的识别。</a:t>
             </a:r>
             <a:endParaRPr lang="en-US" sz="1400" b="0" i="0" u="none" strike="noStrike">
               <a:solidFill>
@@ -2765,26 +3577,6 @@
                   <a:srgbClr val="000000"/>
                 </a:solidFill>
               </a:rPr>
-              <a:t>我们精心设计了数据结构和接口，特别是将结果和错误并行返回的设计，使得错误处理更加灵活。同时，我们全面支持了Pascal-S语言的各种词法规则，包括大小写不敏感、多种常量类型和复合符号的识别。</a:t>
-            </a:r>
-            <a:endParaRPr lang="en-US" sz="1400" b="0" i="0" u="none" strike="noStrike">
-              <a:solidFill>
-                <a:srgbClr val="000000"/>
-              </a:solidFill>
-            </a:endParaRPr>
-          </a:p>
-          <a:p>
-            <a:pPr indent="0" algn="l">
-              <a:lnSpc>
-                <a:spcPct val="100000"/>
-              </a:lnSpc>
-            </a:pPr>
-            <a:r>
-              <a:rPr lang="en-US" sz="1400" b="0" i="0" u="none" strike="noStrike">
-                <a:solidFill>
-                  <a:srgbClr val="000000"/>
-                </a:solidFill>
-              </a:rPr>
               <a:t>在驱动对接方面，词法分析作为第一道关卡，一旦发现严重错误，会立即终止流程并返回特定退出码，保证了系统的健壮性。</a:t>
             </a:r>
             <a:endParaRPr lang="en-US" sz="1400" b="0" i="0" u="none" strike="noStrike">
@@ -2852,10 +3644,10 @@
           </a:lstStyle>
           <a:p>
             <a:r>
-              <a:rPr lang="cs-CZ" smtClean="0"/>
+              <a:rPr lang="cs-CZ"/>
               <a:t>‹#›</a:t>
             </a:r>
-            <a:endParaRPr lang="cs-CZ" smtClean="0"/>
+            <a:endParaRPr lang="cs-CZ"/>
           </a:p>
         </p:txBody>
       </p:sp>
@@ -2941,10 +3733,10 @@
           </a:lstStyle>
           <a:p>
             <a:r>
-              <a:rPr lang="cs-CZ" smtClean="0"/>
+              <a:rPr lang="cs-CZ"/>
               <a:t>1.7.2013</a:t>
             </a:r>
-            <a:endParaRPr lang="cs-CZ" smtClean="0"/>
+            <a:endParaRPr lang="cs-CZ"/>
           </a:p>
         </p:txBody>
       </p:sp>
@@ -2960,8 +3752,8 @@
         </p:nvSpPr>
         <p:spPr>
           <a:xfrm>
-            <a:off x="2857500" y="512763"/>
-            <a:ext cx="3429000" cy="2566987"/>
+            <a:off x="2290763" y="512763"/>
+            <a:ext cx="4562475" cy="2566987"/>
           </a:xfrm>
           <a:prstGeom prst="rect">
             <a:avLst/>
@@ -3017,7 +3809,7 @@
                   <a:srgbClr val="000000"/>
                 </a:solidFill>
               </a:rPr>
-              <a:t>为了确保词法分析的严谨性，我们将M1阶段定义的文法规则转化为具体的错误检测逻辑。这张表格清晰地展示了我们为各种违规情况定义的错误码，例如标识符过长、注释嵌套等。每个错误码都对应着明确的触发条件，并且所有词法错误最终都会通过统一的错误码E199来汇总，保证了程序对外接口的一致性。</a:t>
+              <a:t>为了确保词法分析的严谨性，我们将M1阶段定义的文法规则转化为具体的错误检测逻辑。这张表格清晰地展示了我们为各种违规情况定义的错误码，例如标识符过长、注释嵌套等。</a:t>
             </a:r>
             <a:endParaRPr lang="en-US" sz="1400" b="0" i="0" u="none" strike="noStrike">
               <a:solidFill>
@@ -3084,10 +3876,10 @@
           </a:lstStyle>
           <a:p>
             <a:r>
-              <a:rPr lang="cs-CZ" smtClean="0"/>
+              <a:rPr lang="cs-CZ"/>
               <a:t>‹#›</a:t>
             </a:r>
-            <a:endParaRPr lang="cs-CZ" smtClean="0"/>
+            <a:endParaRPr lang="cs-CZ"/>
           </a:p>
         </p:txBody>
       </p:sp>
@@ -3173,10 +3965,10 @@
           </a:lstStyle>
           <a:p>
             <a:r>
-              <a:rPr lang="cs-CZ" smtClean="0"/>
+              <a:rPr lang="cs-CZ"/>
               <a:t>1.7.2013</a:t>
             </a:r>
-            <a:endParaRPr lang="cs-CZ" smtClean="0"/>
+            <a:endParaRPr lang="cs-CZ"/>
           </a:p>
         </p:txBody>
       </p:sp>
@@ -3192,8 +3984,8 @@
         </p:nvSpPr>
         <p:spPr>
           <a:xfrm>
-            <a:off x="2857500" y="512763"/>
-            <a:ext cx="3429000" cy="2566987"/>
+            <a:off x="2290763" y="512763"/>
+            <a:ext cx="4562475" cy="2566987"/>
           </a:xfrm>
           <a:prstGeom prst="rect">
             <a:avLst/>
@@ -3244,14 +4036,65 @@
               </a:lnSpc>
             </a:pPr>
             <a:r>
-              <a:rPr lang="en-US" sz="1400" b="0" i="0" u="none" strike="noStrike">
+              <a:rPr lang="en-US" sz="1400" b="0" i="0" u="none" strike="noStrike" dirty="0">
                 <a:solidFill>
                   <a:srgbClr val="000000"/>
                 </a:solidFill>
               </a:rPr>
-              <a:t>测试是验证成果的关键。我们构建了自动化的测试框架，编写了全面的测试用例。通过正常样例，我们验证词法分析器能否正确识别所有合法元素；通过异常样例，我们验证它能否准确捕获并报告各种错误。整个测试过程可以通过ctest一键执行，确保了测试的可重复性和效率，这也是我们中期汇报的核心价值所在。</a:t>
-            </a:r>
-            <a:endParaRPr lang="en-US" sz="1400" b="0" i="0" u="none" strike="noStrike">
+              <a:t>测试是验证成果的关键</a:t>
+            </a:r>
+            <a:r>
+              <a:rPr lang="zh-CN" altLang="en-US" sz="1400" b="0" i="0" u="none" strike="noStrike" dirty="0">
+                <a:solidFill>
+                  <a:srgbClr val="000000"/>
+                </a:solidFill>
+              </a:rPr>
+              <a:t>方法</a:t>
+            </a:r>
+            <a:r>
+              <a:rPr lang="en-US" sz="1400" b="0" i="0" u="none" strike="noStrike" dirty="0">
+                <a:solidFill>
+                  <a:srgbClr val="000000"/>
+                </a:solidFill>
+              </a:rPr>
+              <a:t>。我们构建了自动化的测试框架，</a:t>
+            </a:r>
+            <a:r>
+              <a:rPr lang="en-US" dirty="0">
+                <a:solidFill>
+                  <a:srgbClr val="000000"/>
+                </a:solidFill>
+                <a:sym typeface="+mn-ea"/>
+              </a:rPr>
+              <a:t>整个测试过程可以通过ctest一键</a:t>
+            </a:r>
+            <a:r>
+              <a:rPr lang="zh-CN" altLang="en-US" dirty="0">
+                <a:solidFill>
+                  <a:srgbClr val="000000"/>
+                </a:solidFill>
+                <a:sym typeface="+mn-ea"/>
+              </a:rPr>
+              <a:t>构建运行</a:t>
+            </a:r>
+            <a:r>
+              <a:rPr lang="en-US" dirty="0">
+                <a:solidFill>
+                  <a:srgbClr val="000000"/>
+                </a:solidFill>
+                <a:sym typeface="+mn-ea"/>
+              </a:rPr>
+              <a:t>，确保了测试的可重复性和效率。</a:t>
+            </a:r>
+            <a:r>
+              <a:rPr lang="en-US" sz="1400" b="0" i="0" u="none" strike="noStrike" dirty="0">
+                <a:solidFill>
+                  <a:srgbClr val="000000"/>
+                </a:solidFill>
+              </a:rPr>
+              <a:t>通过正常样例，我们验证词法分析器能否正确识别所有合法元素；通过异常样例，我们验证它能否准确捕获并报告各种错误。</a:t>
+            </a:r>
+            <a:endParaRPr lang="en-US" sz="1400" b="0" i="0" u="none" strike="noStrike" dirty="0">
               <a:solidFill>
                 <a:srgbClr val="000000"/>
               </a:solidFill>
@@ -3316,10 +4159,10 @@
           </a:lstStyle>
           <a:p>
             <a:r>
-              <a:rPr lang="cs-CZ" smtClean="0"/>
+              <a:rPr lang="cs-CZ"/>
               <a:t>‹#›</a:t>
             </a:r>
-            <a:endParaRPr lang="cs-CZ" smtClean="0"/>
+            <a:endParaRPr lang="cs-CZ"/>
           </a:p>
         </p:txBody>
       </p:sp>
@@ -3405,10 +4248,10 @@
           </a:lstStyle>
           <a:p>
             <a:r>
-              <a:rPr lang="cs-CZ" smtClean="0"/>
+              <a:rPr lang="cs-CZ"/>
               <a:t>1.7.2013</a:t>
             </a:r>
-            <a:endParaRPr lang="cs-CZ" smtClean="0"/>
+            <a:endParaRPr lang="cs-CZ"/>
           </a:p>
         </p:txBody>
       </p:sp>
@@ -3424,8 +4267,8 @@
         </p:nvSpPr>
         <p:spPr>
           <a:xfrm>
-            <a:off x="2857500" y="512763"/>
-            <a:ext cx="3429000" cy="2566987"/>
+            <a:off x="2290763" y="512763"/>
+            <a:ext cx="4562475" cy="2566987"/>
           </a:xfrm>
           <a:prstGeom prst="rect">
             <a:avLst/>
@@ -3481,7 +4324,39 @@
                   <a:srgbClr val="000000"/>
                 </a:solidFill>
               </a:rPr>
-              <a:t>这是我们本次汇报的核心证据页。大家可以看到，我们的项目能够成功构建，所有自动化测试都已通过。通过运行合法样例，程序正确生成了.c文件；运行非法样例，程序也准确地输出了错误码并返回了非零退出码。这些真实的终端输出证明了我们的词法分析模块已经达到了预期的设计目标，M2阶段已成功完成。</a:t>
+              <a:t>大家可以看到，我们的项目能够成功构建，所有自动化测试都已通过。通过运行合法样例，程序正确生成了.c文件；运行非法样例，程序也准确地输出了</a:t>
+            </a:r>
+            <a:r>
+              <a:rPr lang="zh-CN" altLang="en-US" sz="1400" b="0" i="0" u="none" strike="noStrike">
+                <a:solidFill>
+                  <a:srgbClr val="000000"/>
+                </a:solidFill>
+              </a:rPr>
+              <a:t>对应的</a:t>
+            </a:r>
+            <a:r>
+              <a:rPr lang="en-US" sz="1400" b="0" i="0" u="none" strike="noStrike">
+                <a:solidFill>
+                  <a:srgbClr val="000000"/>
+                </a:solidFill>
+              </a:rPr>
+              <a:t>错误码并返回了非零退出码。这些真实的终端输出</a:t>
+            </a:r>
+            <a:r>
+              <a:rPr lang="zh-CN" altLang="en-US" sz="1400" b="0" i="0" u="none" strike="noStrike">
+                <a:solidFill>
+                  <a:srgbClr val="000000"/>
+                </a:solidFill>
+              </a:rPr>
+              <a:t>说明</a:t>
+            </a:r>
+            <a:r>
+              <a:rPr lang="en-US" sz="1400" b="0" i="0" u="none" strike="noStrike">
+                <a:solidFill>
+                  <a:srgbClr val="000000"/>
+                </a:solidFill>
+              </a:rPr>
+              <a:t>我们的词法分析模块已经达到了预期的设计目标，M2阶段已成功完成。</a:t>
             </a:r>
             <a:endParaRPr lang="en-US" sz="1400" b="0" i="0" u="none" strike="noStrike">
               <a:solidFill>
@@ -3548,10 +4423,10 @@
           </a:lstStyle>
           <a:p>
             <a:r>
-              <a:rPr lang="cs-CZ" smtClean="0"/>
+              <a:rPr lang="cs-CZ"/>
               <a:t>‹#›</a:t>
             </a:r>
-            <a:endParaRPr lang="cs-CZ" smtClean="0"/>
+            <a:endParaRPr lang="cs-CZ"/>
           </a:p>
         </p:txBody>
       </p:sp>
@@ -3568,7 +4443,7 @@
   <p:cSld name="TITLE">
     <p:spTree>
       <p:nvGrpSpPr>
-        <p:cNvPr id="11" name="Shape 11"/>
+        <p:cNvPr id="1" name="Shape 11"/>
         <p:cNvGrpSpPr/>
         <p:nvPr/>
       </p:nvGrpSpPr>
@@ -3583,7 +4458,9 @@
       <p:sp>
         <p:nvSpPr>
           <p:cNvPr id="12" name="Shape 30"/>
-          <p:cNvSpPr txBox="1"/>
+          <p:cNvSpPr txBox="1">
+            <a:spLocks noGrp="1"/>
+          </p:cNvSpPr>
           <p:nvPr>
             <p:ph type="ctrTitle"/>
           </p:nvPr>
@@ -3719,7 +4596,9 @@
       <p:sp>
         <p:nvSpPr>
           <p:cNvPr id="13" name="Shape 31"/>
-          <p:cNvSpPr txBox="1"/>
+          <p:cNvSpPr txBox="1">
+            <a:spLocks noGrp="1"/>
+          </p:cNvSpPr>
           <p:nvPr>
             <p:ph type="subTitle" idx="1"/>
           </p:nvPr>
@@ -3902,7 +4781,9 @@
       <p:sp>
         <p:nvSpPr>
           <p:cNvPr id="14" name="Shape 32"/>
-          <p:cNvSpPr txBox="1"/>
+          <p:cNvSpPr txBox="1">
+            <a:spLocks noGrp="1"/>
+          </p:cNvSpPr>
           <p:nvPr>
             <p:ph type="dt" idx="10"/>
           </p:nvPr>
@@ -4031,7 +4912,9 @@
       <p:sp>
         <p:nvSpPr>
           <p:cNvPr id="15" name="Shape 33"/>
-          <p:cNvSpPr txBox="1"/>
+          <p:cNvSpPr txBox="1">
+            <a:spLocks noGrp="1"/>
+          </p:cNvSpPr>
           <p:nvPr>
             <p:ph type="ftr" idx="11"/>
           </p:nvPr>
@@ -4160,7 +5043,9 @@
       <p:sp>
         <p:nvSpPr>
           <p:cNvPr id="16" name="Shape 34"/>
-          <p:cNvSpPr txBox="1"/>
+          <p:cNvSpPr txBox="1">
+            <a:spLocks noGrp="1"/>
+          </p:cNvSpPr>
           <p:nvPr>
             <p:ph type="sldNum" idx="12"/>
           </p:nvPr>
@@ -4258,7 +5143,7 @@
               <a:buNone/>
             </a:pPr>
             <a:fld id="{00000000-1234-1234-1234-123412341234}" type="slidenum">
-              <a:rPr lang="zh-CN"/>
+              <a:rPr lang="en-US" altLang="zh-CN"/>
             </a:fld>
             <a:endParaRPr lang="zh-CN"/>
           </a:p>
@@ -4277,7 +5162,7 @@
   <p:cSld name="VERTICAL_TEXT">
     <p:spTree>
       <p:nvGrpSpPr>
-        <p:cNvPr id="68" name="Shape 68"/>
+        <p:cNvPr id="1" name="Shape 68"/>
         <p:cNvGrpSpPr/>
         <p:nvPr/>
       </p:nvGrpSpPr>
@@ -4292,7 +5177,9 @@
       <p:sp>
         <p:nvSpPr>
           <p:cNvPr id="69" name="Shape 49"/>
-          <p:cNvSpPr txBox="1"/>
+          <p:cNvSpPr txBox="1">
+            <a:spLocks noGrp="1"/>
+          </p:cNvSpPr>
           <p:nvPr>
             <p:ph type="title"/>
           </p:nvPr>
@@ -4427,7 +5314,9 @@
       <p:sp>
         <p:nvSpPr>
           <p:cNvPr id="70" name="Shape 50"/>
-          <p:cNvSpPr txBox="1"/>
+          <p:cNvSpPr txBox="1">
+            <a:spLocks noGrp="1"/>
+          </p:cNvSpPr>
           <p:nvPr>
             <p:ph type="body" idx="1"/>
           </p:nvPr>
@@ -4610,7 +5499,9 @@
       <p:sp>
         <p:nvSpPr>
           <p:cNvPr id="71" name="Shape 51"/>
-          <p:cNvSpPr txBox="1"/>
+          <p:cNvSpPr txBox="1">
+            <a:spLocks noGrp="1"/>
+          </p:cNvSpPr>
           <p:nvPr>
             <p:ph type="dt" idx="10"/>
           </p:nvPr>
@@ -4739,7 +5630,9 @@
       <p:sp>
         <p:nvSpPr>
           <p:cNvPr id="72" name="Shape 52"/>
-          <p:cNvSpPr txBox="1"/>
+          <p:cNvSpPr txBox="1">
+            <a:spLocks noGrp="1"/>
+          </p:cNvSpPr>
           <p:nvPr>
             <p:ph type="ftr" idx="11"/>
           </p:nvPr>
@@ -4868,7 +5761,9 @@
       <p:sp>
         <p:nvSpPr>
           <p:cNvPr id="73" name="Shape 53"/>
-          <p:cNvSpPr txBox="1"/>
+          <p:cNvSpPr txBox="1">
+            <a:spLocks noGrp="1"/>
+          </p:cNvSpPr>
           <p:nvPr>
             <p:ph type="sldNum" idx="12"/>
           </p:nvPr>
@@ -4966,7 +5861,7 @@
               <a:buNone/>
             </a:pPr>
             <a:fld id="{00000000-1234-1234-1234-123412341234}" type="slidenum">
-              <a:rPr lang="zh-CN"/>
+              <a:rPr lang="en-US" altLang="zh-CN"/>
             </a:fld>
             <a:endParaRPr lang="zh-CN"/>
           </a:p>
@@ -4985,7 +5880,7 @@
   <p:cSld name="VERTICAL_TITLE_AND_VERTICAL_TEXT">
     <p:spTree>
       <p:nvGrpSpPr>
-        <p:cNvPr id="74" name="Shape 74"/>
+        <p:cNvPr id="1" name="Shape 74"/>
         <p:cNvGrpSpPr/>
         <p:nvPr/>
       </p:nvGrpSpPr>
@@ -5000,7 +5895,9 @@
       <p:sp>
         <p:nvSpPr>
           <p:cNvPr id="75" name="Shape 15"/>
-          <p:cNvSpPr txBox="1"/>
+          <p:cNvSpPr txBox="1">
+            <a:spLocks noGrp="1"/>
+          </p:cNvSpPr>
           <p:nvPr>
             <p:ph type="title"/>
           </p:nvPr>
@@ -5135,7 +6032,9 @@
       <p:sp>
         <p:nvSpPr>
           <p:cNvPr id="76" name="Shape 16"/>
-          <p:cNvSpPr txBox="1"/>
+          <p:cNvSpPr txBox="1">
+            <a:spLocks noGrp="1"/>
+          </p:cNvSpPr>
           <p:nvPr>
             <p:ph type="body" idx="1"/>
           </p:nvPr>
@@ -5318,7 +6217,9 @@
       <p:sp>
         <p:nvSpPr>
           <p:cNvPr id="77" name="Shape 17"/>
-          <p:cNvSpPr txBox="1"/>
+          <p:cNvSpPr txBox="1">
+            <a:spLocks noGrp="1"/>
+          </p:cNvSpPr>
           <p:nvPr>
             <p:ph type="dt" idx="10"/>
           </p:nvPr>
@@ -5447,7 +6348,9 @@
       <p:sp>
         <p:nvSpPr>
           <p:cNvPr id="78" name="Shape 18"/>
-          <p:cNvSpPr txBox="1"/>
+          <p:cNvSpPr txBox="1">
+            <a:spLocks noGrp="1"/>
+          </p:cNvSpPr>
           <p:nvPr>
             <p:ph type="ftr" idx="11"/>
           </p:nvPr>
@@ -5576,7 +6479,9 @@
       <p:sp>
         <p:nvSpPr>
           <p:cNvPr id="79" name="Shape 19"/>
-          <p:cNvSpPr txBox="1"/>
+          <p:cNvSpPr txBox="1">
+            <a:spLocks noGrp="1"/>
+          </p:cNvSpPr>
           <p:nvPr>
             <p:ph type="sldNum" idx="12"/>
           </p:nvPr>
@@ -5674,7 +6579,7 @@
               <a:buNone/>
             </a:pPr>
             <a:fld id="{00000000-1234-1234-1234-123412341234}" type="slidenum">
-              <a:rPr lang="zh-CN"/>
+              <a:rPr lang="en-US" altLang="zh-CN"/>
             </a:fld>
             <a:endParaRPr lang="zh-CN"/>
           </a:p>
@@ -5718,7 +6623,7 @@
   <p:cSld name="OBJECT">
     <p:spTree>
       <p:nvGrpSpPr>
-        <p:cNvPr id="17" name="Shape 17"/>
+        <p:cNvPr id="1" name="Shape 17"/>
         <p:cNvGrpSpPr/>
         <p:nvPr/>
       </p:nvGrpSpPr>
@@ -5733,7 +6638,9 @@
       <p:sp>
         <p:nvSpPr>
           <p:cNvPr id="18" name="Shape 54"/>
-          <p:cNvSpPr txBox="1"/>
+          <p:cNvSpPr txBox="1">
+            <a:spLocks noGrp="1"/>
+          </p:cNvSpPr>
           <p:nvPr>
             <p:ph type="title"/>
           </p:nvPr>
@@ -5868,7 +6775,9 @@
       <p:sp>
         <p:nvSpPr>
           <p:cNvPr id="19" name="Shape 55"/>
-          <p:cNvSpPr txBox="1"/>
+          <p:cNvSpPr txBox="1">
+            <a:spLocks noGrp="1"/>
+          </p:cNvSpPr>
           <p:nvPr>
             <p:ph type="body" idx="1"/>
           </p:nvPr>
@@ -6051,7 +6960,9 @@
       <p:sp>
         <p:nvSpPr>
           <p:cNvPr id="20" name="Shape 56"/>
-          <p:cNvSpPr txBox="1"/>
+          <p:cNvSpPr txBox="1">
+            <a:spLocks noGrp="1"/>
+          </p:cNvSpPr>
           <p:nvPr>
             <p:ph type="dt" idx="10"/>
           </p:nvPr>
@@ -6180,7 +7091,9 @@
       <p:sp>
         <p:nvSpPr>
           <p:cNvPr id="21" name="Shape 57"/>
-          <p:cNvSpPr txBox="1"/>
+          <p:cNvSpPr txBox="1">
+            <a:spLocks noGrp="1"/>
+          </p:cNvSpPr>
           <p:nvPr>
             <p:ph type="ftr" idx="11"/>
           </p:nvPr>
@@ -6309,7 +7222,9 @@
       <p:sp>
         <p:nvSpPr>
           <p:cNvPr id="22" name="Shape 58"/>
-          <p:cNvSpPr txBox="1"/>
+          <p:cNvSpPr txBox="1">
+            <a:spLocks noGrp="1"/>
+          </p:cNvSpPr>
           <p:nvPr>
             <p:ph type="sldNum" idx="12"/>
           </p:nvPr>
@@ -6407,7 +7322,7 @@
               <a:buNone/>
             </a:pPr>
             <a:fld id="{00000000-1234-1234-1234-123412341234}" type="slidenum">
-              <a:rPr lang="zh-CN"/>
+              <a:rPr lang="en-US" altLang="zh-CN"/>
             </a:fld>
             <a:endParaRPr lang="zh-CN"/>
           </a:p>
@@ -6426,7 +7341,7 @@
   <p:cSld name="SECTION_HEADER">
     <p:spTree>
       <p:nvGrpSpPr>
-        <p:cNvPr id="23" name="Shape 23"/>
+        <p:cNvPr id="1" name="Shape 23"/>
         <p:cNvGrpSpPr/>
         <p:nvPr/>
       </p:nvGrpSpPr>
@@ -6441,7 +7356,9 @@
       <p:sp>
         <p:nvSpPr>
           <p:cNvPr id="24" name="Shape 59"/>
-          <p:cNvSpPr txBox="1"/>
+          <p:cNvSpPr txBox="1">
+            <a:spLocks noGrp="1"/>
+          </p:cNvSpPr>
           <p:nvPr>
             <p:ph type="title"/>
           </p:nvPr>
@@ -6577,7 +7494,9 @@
       <p:sp>
         <p:nvSpPr>
           <p:cNvPr id="25" name="Shape 60"/>
-          <p:cNvSpPr txBox="1"/>
+          <p:cNvSpPr txBox="1">
+            <a:spLocks noGrp="1"/>
+          </p:cNvSpPr>
           <p:nvPr>
             <p:ph type="body" idx="1"/>
           </p:nvPr>
@@ -6796,7 +7715,9 @@
       <p:sp>
         <p:nvSpPr>
           <p:cNvPr id="26" name="Shape 61"/>
-          <p:cNvSpPr txBox="1"/>
+          <p:cNvSpPr txBox="1">
+            <a:spLocks noGrp="1"/>
+          </p:cNvSpPr>
           <p:nvPr>
             <p:ph type="dt" idx="10"/>
           </p:nvPr>
@@ -6925,7 +7846,9 @@
       <p:sp>
         <p:nvSpPr>
           <p:cNvPr id="27" name="Shape 62"/>
-          <p:cNvSpPr txBox="1"/>
+          <p:cNvSpPr txBox="1">
+            <a:spLocks noGrp="1"/>
+          </p:cNvSpPr>
           <p:nvPr>
             <p:ph type="ftr" idx="11"/>
           </p:nvPr>
@@ -7054,7 +7977,9 @@
       <p:sp>
         <p:nvSpPr>
           <p:cNvPr id="28" name="Shape 63"/>
-          <p:cNvSpPr txBox="1"/>
+          <p:cNvSpPr txBox="1">
+            <a:spLocks noGrp="1"/>
+          </p:cNvSpPr>
           <p:nvPr>
             <p:ph type="sldNum" idx="12"/>
           </p:nvPr>
@@ -7152,7 +8077,7 @@
               <a:buNone/>
             </a:pPr>
             <a:fld id="{00000000-1234-1234-1234-123412341234}" type="slidenum">
-              <a:rPr lang="zh-CN"/>
+              <a:rPr lang="en-US" altLang="zh-CN"/>
             </a:fld>
             <a:endParaRPr lang="zh-CN"/>
           </a:p>
@@ -7171,7 +8096,7 @@
   <p:cSld name="TWO_OBJECTS">
     <p:spTree>
       <p:nvGrpSpPr>
-        <p:cNvPr id="29" name="Shape 29"/>
+        <p:cNvPr id="1" name="Shape 29"/>
         <p:cNvGrpSpPr/>
         <p:nvPr/>
       </p:nvGrpSpPr>
@@ -7186,7 +8111,9 @@
       <p:sp>
         <p:nvSpPr>
           <p:cNvPr id="30" name="Shape 9"/>
-          <p:cNvSpPr txBox="1"/>
+          <p:cNvSpPr txBox="1">
+            <a:spLocks noGrp="1"/>
+          </p:cNvSpPr>
           <p:nvPr>
             <p:ph type="title"/>
           </p:nvPr>
@@ -7321,7 +8248,9 @@
       <p:sp>
         <p:nvSpPr>
           <p:cNvPr id="31" name="Shape 10"/>
-          <p:cNvSpPr txBox="1"/>
+          <p:cNvSpPr txBox="1">
+            <a:spLocks noGrp="1"/>
+          </p:cNvSpPr>
           <p:nvPr>
             <p:ph type="body" idx="1"/>
           </p:nvPr>
@@ -7504,7 +8433,9 @@
       <p:sp>
         <p:nvSpPr>
           <p:cNvPr id="32" name="Shape 11"/>
-          <p:cNvSpPr txBox="1"/>
+          <p:cNvSpPr txBox="1">
+            <a:spLocks noGrp="1"/>
+          </p:cNvSpPr>
           <p:nvPr>
             <p:ph type="body" idx="2"/>
           </p:nvPr>
@@ -7687,7 +8618,9 @@
       <p:sp>
         <p:nvSpPr>
           <p:cNvPr id="33" name="Shape 12"/>
-          <p:cNvSpPr txBox="1"/>
+          <p:cNvSpPr txBox="1">
+            <a:spLocks noGrp="1"/>
+          </p:cNvSpPr>
           <p:nvPr>
             <p:ph type="dt" idx="10"/>
           </p:nvPr>
@@ -7816,7 +8749,9 @@
       <p:sp>
         <p:nvSpPr>
           <p:cNvPr id="34" name="Shape 13"/>
-          <p:cNvSpPr txBox="1"/>
+          <p:cNvSpPr txBox="1">
+            <a:spLocks noGrp="1"/>
+          </p:cNvSpPr>
           <p:nvPr>
             <p:ph type="ftr" idx="11"/>
           </p:nvPr>
@@ -7945,7 +8880,9 @@
       <p:sp>
         <p:nvSpPr>
           <p:cNvPr id="35" name="Shape 14"/>
-          <p:cNvSpPr txBox="1"/>
+          <p:cNvSpPr txBox="1">
+            <a:spLocks noGrp="1"/>
+          </p:cNvSpPr>
           <p:nvPr>
             <p:ph type="sldNum" idx="12"/>
           </p:nvPr>
@@ -8043,7 +8980,7 @@
               <a:buNone/>
             </a:pPr>
             <a:fld id="{00000000-1234-1234-1234-123412341234}" type="slidenum">
-              <a:rPr lang="zh-CN"/>
+              <a:rPr lang="en-US" altLang="zh-CN"/>
             </a:fld>
             <a:endParaRPr lang="zh-CN"/>
           </a:p>
@@ -8062,7 +8999,7 @@
   <p:cSld name="TWO_OBJECTS_WITH_TEXT">
     <p:spTree>
       <p:nvGrpSpPr>
-        <p:cNvPr id="36" name="Shape 36"/>
+        <p:cNvPr id="1" name="Shape 36"/>
         <p:cNvGrpSpPr/>
         <p:nvPr/>
       </p:nvGrpSpPr>
@@ -8077,7 +9014,9 @@
       <p:sp>
         <p:nvSpPr>
           <p:cNvPr id="37" name="Shape 35"/>
-          <p:cNvSpPr txBox="1"/>
+          <p:cNvSpPr txBox="1">
+            <a:spLocks noGrp="1"/>
+          </p:cNvSpPr>
           <p:nvPr>
             <p:ph type="title"/>
           </p:nvPr>
@@ -8212,7 +9151,9 @@
       <p:sp>
         <p:nvSpPr>
           <p:cNvPr id="38" name="Shape 36"/>
-          <p:cNvSpPr txBox="1"/>
+          <p:cNvSpPr txBox="1">
+            <a:spLocks noGrp="1"/>
+          </p:cNvSpPr>
           <p:nvPr>
             <p:ph type="body" idx="1"/>
           </p:nvPr>
@@ -8395,7 +9336,9 @@
       <p:sp>
         <p:nvSpPr>
           <p:cNvPr id="39" name="Shape 37"/>
-          <p:cNvSpPr txBox="1"/>
+          <p:cNvSpPr txBox="1">
+            <a:spLocks noGrp="1"/>
+          </p:cNvSpPr>
           <p:nvPr>
             <p:ph type="body" idx="2"/>
           </p:nvPr>
@@ -8578,7 +9521,9 @@
       <p:sp>
         <p:nvSpPr>
           <p:cNvPr id="40" name="Shape 38"/>
-          <p:cNvSpPr txBox="1"/>
+          <p:cNvSpPr txBox="1">
+            <a:spLocks noGrp="1"/>
+          </p:cNvSpPr>
           <p:nvPr>
             <p:ph type="body" idx="3"/>
           </p:nvPr>
@@ -8761,7 +9706,9 @@
       <p:sp>
         <p:nvSpPr>
           <p:cNvPr id="41" name="Shape 39"/>
-          <p:cNvSpPr txBox="1"/>
+          <p:cNvSpPr txBox="1">
+            <a:spLocks noGrp="1"/>
+          </p:cNvSpPr>
           <p:nvPr>
             <p:ph type="body" idx="4"/>
           </p:nvPr>
@@ -8944,7 +9891,9 @@
       <p:sp>
         <p:nvSpPr>
           <p:cNvPr id="42" name="Shape 40"/>
-          <p:cNvSpPr txBox="1"/>
+          <p:cNvSpPr txBox="1">
+            <a:spLocks noGrp="1"/>
+          </p:cNvSpPr>
           <p:nvPr>
             <p:ph type="dt" idx="10"/>
           </p:nvPr>
@@ -9073,7 +10022,9 @@
       <p:sp>
         <p:nvSpPr>
           <p:cNvPr id="43" name="Shape 41"/>
-          <p:cNvSpPr txBox="1"/>
+          <p:cNvSpPr txBox="1">
+            <a:spLocks noGrp="1"/>
+          </p:cNvSpPr>
           <p:nvPr>
             <p:ph type="ftr" idx="11"/>
           </p:nvPr>
@@ -9202,7 +10153,9 @@
       <p:sp>
         <p:nvSpPr>
           <p:cNvPr id="44" name="Shape 42"/>
-          <p:cNvSpPr txBox="1"/>
+          <p:cNvSpPr txBox="1">
+            <a:spLocks noGrp="1"/>
+          </p:cNvSpPr>
           <p:nvPr>
             <p:ph type="sldNum" idx="12"/>
           </p:nvPr>
@@ -9300,7 +10253,7 @@
               <a:buNone/>
             </a:pPr>
             <a:fld id="{00000000-1234-1234-1234-123412341234}" type="slidenum">
-              <a:rPr lang="zh-CN"/>
+              <a:rPr lang="en-US" altLang="zh-CN"/>
             </a:fld>
             <a:endParaRPr lang="zh-CN"/>
           </a:p>
@@ -9319,7 +10272,7 @@
   <p:cSld name="TITLE_ONLY">
     <p:spTree>
       <p:nvGrpSpPr>
-        <p:cNvPr id="45" name="Shape 45"/>
+        <p:cNvPr id="1" name="Shape 45"/>
         <p:cNvGrpSpPr/>
         <p:nvPr/>
       </p:nvGrpSpPr>
@@ -9334,7 +10287,9 @@
       <p:sp>
         <p:nvSpPr>
           <p:cNvPr id="46" name="Shape 20"/>
-          <p:cNvSpPr txBox="1"/>
+          <p:cNvSpPr txBox="1">
+            <a:spLocks noGrp="1"/>
+          </p:cNvSpPr>
           <p:nvPr>
             <p:ph type="title"/>
           </p:nvPr>
@@ -9469,7 +10424,9 @@
       <p:sp>
         <p:nvSpPr>
           <p:cNvPr id="47" name="Shape 21"/>
-          <p:cNvSpPr txBox="1"/>
+          <p:cNvSpPr txBox="1">
+            <a:spLocks noGrp="1"/>
+          </p:cNvSpPr>
           <p:nvPr>
             <p:ph type="dt" idx="10"/>
           </p:nvPr>
@@ -9598,7 +10555,9 @@
       <p:sp>
         <p:nvSpPr>
           <p:cNvPr id="48" name="Shape 22"/>
-          <p:cNvSpPr txBox="1"/>
+          <p:cNvSpPr txBox="1">
+            <a:spLocks noGrp="1"/>
+          </p:cNvSpPr>
           <p:nvPr>
             <p:ph type="ftr" idx="11"/>
           </p:nvPr>
@@ -9727,7 +10686,9 @@
       <p:sp>
         <p:nvSpPr>
           <p:cNvPr id="49" name="Shape 23"/>
-          <p:cNvSpPr txBox="1"/>
+          <p:cNvSpPr txBox="1">
+            <a:spLocks noGrp="1"/>
+          </p:cNvSpPr>
           <p:nvPr>
             <p:ph type="sldNum" idx="12"/>
           </p:nvPr>
@@ -9825,7 +10786,7 @@
               <a:buNone/>
             </a:pPr>
             <a:fld id="{00000000-1234-1234-1234-123412341234}" type="slidenum">
-              <a:rPr lang="zh-CN"/>
+              <a:rPr lang="en-US" altLang="zh-CN"/>
             </a:fld>
             <a:endParaRPr lang="zh-CN"/>
           </a:p>
@@ -9844,7 +10805,7 @@
   <p:cSld name="BLANK">
     <p:spTree>
       <p:nvGrpSpPr>
-        <p:cNvPr id="50" name="Shape 50"/>
+        <p:cNvPr id="1" name="Shape 50"/>
         <p:cNvGrpSpPr/>
         <p:nvPr/>
       </p:nvGrpSpPr>
@@ -9859,7 +10820,9 @@
       <p:sp>
         <p:nvSpPr>
           <p:cNvPr id="51" name="Shape 6"/>
-          <p:cNvSpPr txBox="1"/>
+          <p:cNvSpPr txBox="1">
+            <a:spLocks noGrp="1"/>
+          </p:cNvSpPr>
           <p:nvPr>
             <p:ph type="dt" idx="10"/>
           </p:nvPr>
@@ -9988,7 +10951,9 @@
       <p:sp>
         <p:nvSpPr>
           <p:cNvPr id="52" name="Shape 7"/>
-          <p:cNvSpPr txBox="1"/>
+          <p:cNvSpPr txBox="1">
+            <a:spLocks noGrp="1"/>
+          </p:cNvSpPr>
           <p:nvPr>
             <p:ph type="ftr" idx="11"/>
           </p:nvPr>
@@ -10117,7 +11082,9 @@
       <p:sp>
         <p:nvSpPr>
           <p:cNvPr id="53" name="Shape 8"/>
-          <p:cNvSpPr txBox="1"/>
+          <p:cNvSpPr txBox="1">
+            <a:spLocks noGrp="1"/>
+          </p:cNvSpPr>
           <p:nvPr>
             <p:ph type="sldNum" idx="12"/>
           </p:nvPr>
@@ -10215,7 +11182,7 @@
               <a:buNone/>
             </a:pPr>
             <a:fld id="{00000000-1234-1234-1234-123412341234}" type="slidenum">
-              <a:rPr lang="zh-CN"/>
+              <a:rPr lang="en-US" altLang="zh-CN"/>
             </a:fld>
             <a:endParaRPr lang="zh-CN"/>
           </a:p>
@@ -10234,7 +11201,7 @@
   <p:cSld name="OBJECT_WITH_CAPTION_TEXT">
     <p:spTree>
       <p:nvGrpSpPr>
-        <p:cNvPr id="54" name="Shape 54"/>
+        <p:cNvPr id="1" name="Shape 54"/>
         <p:cNvGrpSpPr/>
         <p:nvPr/>
       </p:nvGrpSpPr>
@@ -10249,7 +11216,9 @@
       <p:sp>
         <p:nvSpPr>
           <p:cNvPr id="55" name="Shape 43"/>
-          <p:cNvSpPr txBox="1"/>
+          <p:cNvSpPr txBox="1">
+            <a:spLocks noGrp="1"/>
+          </p:cNvSpPr>
           <p:nvPr>
             <p:ph type="title"/>
           </p:nvPr>
@@ -10385,7 +11354,9 @@
       <p:sp>
         <p:nvSpPr>
           <p:cNvPr id="56" name="Shape 44"/>
-          <p:cNvSpPr txBox="1"/>
+          <p:cNvSpPr txBox="1">
+            <a:spLocks noGrp="1"/>
+          </p:cNvSpPr>
           <p:nvPr>
             <p:ph type="body" idx="1"/>
           </p:nvPr>
@@ -10568,7 +11539,9 @@
       <p:sp>
         <p:nvSpPr>
           <p:cNvPr id="57" name="Shape 45"/>
-          <p:cNvSpPr txBox="1"/>
+          <p:cNvSpPr txBox="1">
+            <a:spLocks noGrp="1"/>
+          </p:cNvSpPr>
           <p:nvPr>
             <p:ph type="body" idx="2"/>
           </p:nvPr>
@@ -10751,7 +11724,9 @@
       <p:sp>
         <p:nvSpPr>
           <p:cNvPr id="58" name="Shape 46"/>
-          <p:cNvSpPr txBox="1"/>
+          <p:cNvSpPr txBox="1">
+            <a:spLocks noGrp="1"/>
+          </p:cNvSpPr>
           <p:nvPr>
             <p:ph type="dt" idx="10"/>
           </p:nvPr>
@@ -10880,7 +11855,9 @@
       <p:sp>
         <p:nvSpPr>
           <p:cNvPr id="59" name="Shape 47"/>
-          <p:cNvSpPr txBox="1"/>
+          <p:cNvSpPr txBox="1">
+            <a:spLocks noGrp="1"/>
+          </p:cNvSpPr>
           <p:nvPr>
             <p:ph type="ftr" idx="11"/>
           </p:nvPr>
@@ -11009,7 +11986,9 @@
       <p:sp>
         <p:nvSpPr>
           <p:cNvPr id="60" name="Shape 48"/>
-          <p:cNvSpPr txBox="1"/>
+          <p:cNvSpPr txBox="1">
+            <a:spLocks noGrp="1"/>
+          </p:cNvSpPr>
           <p:nvPr>
             <p:ph type="sldNum" idx="12"/>
           </p:nvPr>
@@ -11107,7 +12086,7 @@
               <a:buNone/>
             </a:pPr>
             <a:fld id="{00000000-1234-1234-1234-123412341234}" type="slidenum">
-              <a:rPr lang="zh-CN"/>
+              <a:rPr lang="en-US" altLang="zh-CN"/>
             </a:fld>
             <a:endParaRPr lang="zh-CN"/>
           </a:p>
@@ -11126,7 +12105,7 @@
   <p:cSld name="PICTURE_WITH_CAPTION_TEXT">
     <p:spTree>
       <p:nvGrpSpPr>
-        <p:cNvPr id="61" name="Shape 61"/>
+        <p:cNvPr id="1" name="Shape 61"/>
         <p:cNvGrpSpPr/>
         <p:nvPr/>
       </p:nvGrpSpPr>
@@ -11141,7 +12120,9 @@
       <p:sp>
         <p:nvSpPr>
           <p:cNvPr id="62" name="Shape 24"/>
-          <p:cNvSpPr txBox="1"/>
+          <p:cNvSpPr txBox="1">
+            <a:spLocks noGrp="1"/>
+          </p:cNvSpPr>
           <p:nvPr>
             <p:ph type="title"/>
           </p:nvPr>
@@ -11277,7 +12258,9 @@
       <p:sp>
         <p:nvSpPr>
           <p:cNvPr id="63" name="Shape 25"/>
-          <p:cNvSpPr/>
+          <p:cNvSpPr>
+            <a:spLocks noGrp="1"/>
+          </p:cNvSpPr>
           <p:nvPr>
             <p:ph type="pic" idx="2"/>
           </p:nvPr>
@@ -11299,7 +12282,9 @@
       <p:sp>
         <p:nvSpPr>
           <p:cNvPr id="64" name="Shape 26"/>
-          <p:cNvSpPr txBox="1"/>
+          <p:cNvSpPr txBox="1">
+            <a:spLocks noGrp="1"/>
+          </p:cNvSpPr>
           <p:nvPr>
             <p:ph type="body" idx="1"/>
           </p:nvPr>
@@ -11482,7 +12467,9 @@
       <p:sp>
         <p:nvSpPr>
           <p:cNvPr id="65" name="Shape 27"/>
-          <p:cNvSpPr txBox="1"/>
+          <p:cNvSpPr txBox="1">
+            <a:spLocks noGrp="1"/>
+          </p:cNvSpPr>
           <p:nvPr>
             <p:ph type="dt" idx="10"/>
           </p:nvPr>
@@ -11611,7 +12598,9 @@
       <p:sp>
         <p:nvSpPr>
           <p:cNvPr id="66" name="Shape 28"/>
-          <p:cNvSpPr txBox="1"/>
+          <p:cNvSpPr txBox="1">
+            <a:spLocks noGrp="1"/>
+          </p:cNvSpPr>
           <p:nvPr>
             <p:ph type="ftr" idx="11"/>
           </p:nvPr>
@@ -11740,7 +12729,9 @@
       <p:sp>
         <p:nvSpPr>
           <p:cNvPr id="67" name="Shape 29"/>
-          <p:cNvSpPr txBox="1"/>
+          <p:cNvSpPr txBox="1">
+            <a:spLocks noGrp="1"/>
+          </p:cNvSpPr>
           <p:nvPr>
             <p:ph type="sldNum" idx="12"/>
           </p:nvPr>
@@ -11838,7 +12829,7 @@
               <a:buNone/>
             </a:pPr>
             <a:fld id="{00000000-1234-1234-1234-123412341234}" type="slidenum">
-              <a:rPr lang="zh-CN"/>
+              <a:rPr lang="en-US" altLang="zh-CN"/>
             </a:fld>
             <a:endParaRPr lang="zh-CN"/>
           </a:p>
@@ -11865,7 +12856,7 @@
     </p:bg>
     <p:spTree>
       <p:nvGrpSpPr>
-        <p:cNvPr id="5" name="Shape 5"/>
+        <p:cNvPr id="1" name="Shape 5"/>
         <p:cNvGrpSpPr/>
         <p:nvPr/>
       </p:nvGrpSpPr>
@@ -11880,7 +12871,9 @@
       <p:sp>
         <p:nvSpPr>
           <p:cNvPr id="6" name="Shape 1"/>
-          <p:cNvSpPr txBox="1"/>
+          <p:cNvSpPr txBox="1">
+            <a:spLocks noGrp="1"/>
+          </p:cNvSpPr>
           <p:nvPr>
             <p:ph type="title"/>
           </p:nvPr>
@@ -12024,7 +13017,9 @@
       <p:sp>
         <p:nvSpPr>
           <p:cNvPr id="7" name="Shape 2"/>
-          <p:cNvSpPr txBox="1"/>
+          <p:cNvSpPr txBox="1">
+            <a:spLocks noGrp="1"/>
+          </p:cNvSpPr>
           <p:nvPr>
             <p:ph type="body" idx="1"/>
           </p:nvPr>
@@ -12288,7 +13283,9 @@
       <p:sp>
         <p:nvSpPr>
           <p:cNvPr id="8" name="Shape 3"/>
-          <p:cNvSpPr txBox="1"/>
+          <p:cNvSpPr txBox="1">
+            <a:spLocks noGrp="1"/>
+          </p:cNvSpPr>
           <p:nvPr>
             <p:ph type="dt" idx="10"/>
           </p:nvPr>
@@ -12489,7 +13486,9 @@
       <p:sp>
         <p:nvSpPr>
           <p:cNvPr id="9" name="Shape 4"/>
-          <p:cNvSpPr txBox="1"/>
+          <p:cNvSpPr txBox="1">
+            <a:spLocks noGrp="1"/>
+          </p:cNvSpPr>
           <p:nvPr>
             <p:ph type="ftr" idx="11"/>
           </p:nvPr>
@@ -12690,7 +13689,9 @@
       <p:sp>
         <p:nvSpPr>
           <p:cNvPr id="10" name="Shape 5"/>
-          <p:cNvSpPr txBox="1"/>
+          <p:cNvSpPr txBox="1">
+            <a:spLocks noGrp="1"/>
+          </p:cNvSpPr>
           <p:nvPr>
             <p:ph type="sldNum" idx="12"/>
           </p:nvPr>
@@ -12860,7 +13861,7 @@
               <a:buNone/>
             </a:pPr>
             <a:fld id="{00000000-1234-1234-1234-123412341234}" type="slidenum">
-              <a:rPr lang="zh-CN"/>
+              <a:rPr lang="en-US" altLang="zh-CN"/>
             </a:fld>
             <a:endParaRPr lang="zh-CN"/>
           </a:p>
@@ -13590,7 +14591,7 @@
     </p:bg>
     <p:spTree>
       <p:nvGrpSpPr>
-        <p:cNvPr id="5" name="Shape 5"/>
+        <p:cNvPr id="1" name="Shape 5"/>
         <p:cNvGrpSpPr/>
         <p:nvPr/>
       </p:nvGrpSpPr>
@@ -14475,7 +15476,7 @@
               <a:defRPr/>
             </a:pPr>
             <a:r>
-              <a:rPr lang="en-US" sz="2000" b="0" i="0" u="none" strike="noStrike">
+              <a:rPr lang="en-US" sz="2000" b="0" i="0" u="none" strike="noStrike" dirty="0" err="1">
                 <a:solidFill>
                   <a:srgbClr val="333333"/>
                 </a:solidFill>
@@ -14486,7 +15487,7 @@
               </a:rPr>
               <a:t>编译原理与技术课程设计</a:t>
             </a:r>
-            <a:endParaRPr lang="en-US" sz="1100"/>
+            <a:endParaRPr lang="en-US" sz="1100" dirty="0"/>
           </a:p>
         </p:txBody>
       </p:sp>
@@ -14532,7 +15533,7 @@
               <a:defRPr/>
             </a:pPr>
             <a:r>
-              <a:rPr lang="en-US" sz="1600" b="1" i="0" u="none" strike="noStrike">
+              <a:rPr lang="en-US" sz="1600" b="1" i="0" u="none" strike="noStrike" dirty="0">
                 <a:solidFill>
                   <a:srgbClr val="005A9C"/>
                 </a:solidFill>
@@ -14541,9 +15542,57 @@
                 <a:cs typeface="Noto Sans SC" panose="020B0200000000000000" charset="-122"/>
                 <a:sym typeface="Noto Sans SC" panose="020B0200000000000000" charset="-122"/>
               </a:rPr>
-              <a:t>M2 已完成 · 准备进入 M3</a:t>
-            </a:r>
-            <a:endParaRPr lang="en-US" sz="1100"/>
+              <a:t>M2 </a:t>
+            </a:r>
+            <a:r>
+              <a:rPr lang="en-US" sz="1600" b="1" i="0" u="none" strike="noStrike" dirty="0" err="1">
+                <a:solidFill>
+                  <a:srgbClr val="005A9C"/>
+                </a:solidFill>
+                <a:latin typeface="Noto Sans SC" panose="020B0200000000000000" charset="-122"/>
+                <a:ea typeface="Noto Sans SC" panose="020B0200000000000000" charset="-122"/>
+                <a:cs typeface="Noto Sans SC" panose="020B0200000000000000" charset="-122"/>
+                <a:sym typeface="Noto Sans SC" panose="020B0200000000000000" charset="-122"/>
+              </a:rPr>
+              <a:t>已完成</a:t>
+            </a:r>
+            <a:r>
+              <a:rPr lang="en-US" sz="1600" b="1" i="0" u="none" strike="noStrike" dirty="0">
+                <a:solidFill>
+                  <a:srgbClr val="005A9C"/>
+                </a:solidFill>
+                <a:latin typeface="Noto Sans SC" panose="020B0200000000000000" charset="-122"/>
+                <a:ea typeface="Noto Sans SC" panose="020B0200000000000000" charset="-122"/>
+                <a:cs typeface="Noto Sans SC" panose="020B0200000000000000" charset="-122"/>
+                <a:sym typeface="Noto Sans SC" panose="020B0200000000000000" charset="-122"/>
+              </a:rPr>
+              <a:t> · </a:t>
+            </a:r>
+            <a:r>
+              <a:rPr lang="en-US" sz="1600" b="1" i="0" u="none" strike="noStrike" dirty="0" err="1">
+                <a:solidFill>
+                  <a:srgbClr val="005A9C"/>
+                </a:solidFill>
+                <a:latin typeface="Noto Sans SC" panose="020B0200000000000000" charset="-122"/>
+                <a:ea typeface="Noto Sans SC" panose="020B0200000000000000" charset="-122"/>
+                <a:cs typeface="Noto Sans SC" panose="020B0200000000000000" charset="-122"/>
+                <a:sym typeface="Noto Sans SC" panose="020B0200000000000000" charset="-122"/>
+              </a:rPr>
+              <a:t>准备进入</a:t>
+            </a:r>
+            <a:r>
+              <a:rPr lang="en-US" sz="1600" b="1" i="0" u="none" strike="noStrike" dirty="0">
+                <a:solidFill>
+                  <a:srgbClr val="005A9C"/>
+                </a:solidFill>
+                <a:latin typeface="Noto Sans SC" panose="020B0200000000000000" charset="-122"/>
+                <a:ea typeface="Noto Sans SC" panose="020B0200000000000000" charset="-122"/>
+                <a:cs typeface="Noto Sans SC" panose="020B0200000000000000" charset="-122"/>
+                <a:sym typeface="Noto Sans SC" panose="020B0200000000000000" charset="-122"/>
+              </a:rPr>
+              <a:t> M3</a:t>
+            </a:r>
+            <a:endParaRPr lang="en-US" sz="1100" dirty="0"/>
           </a:p>
         </p:txBody>
       </p:sp>
@@ -14612,7 +15661,7 @@
               <a:defRPr/>
             </a:pPr>
             <a:r>
-              <a:rPr lang="en-US" sz="1600" b="1" i="0" u="none" strike="noStrike">
+              <a:rPr lang="en-US" sz="1600" b="1" i="0" u="none" strike="noStrike" dirty="0" err="1">
                 <a:solidFill>
                   <a:srgbClr val="333333"/>
                 </a:solidFill>
@@ -14623,7 +15672,7 @@
               </a:rPr>
               <a:t>组长：丁乐航</a:t>
             </a:r>
-            <a:endParaRPr lang="en-US" sz="1100"/>
+            <a:endParaRPr lang="en-US" sz="1100" dirty="0"/>
           </a:p>
         </p:txBody>
       </p:sp>
@@ -14963,7 +16012,7 @@
               <a:tr h="508000">
                 <a:tc>
                   <a:txBody>
-                    <a:bodyPr rtlCol="0"/>
+                    <a:bodyPr/>
                     <a:lstStyle/>
                     <a:p>
                       <a:pPr indent="0" algn="ctr">
@@ -14987,7 +16036,7 @@
                       <a:endParaRPr lang="en-US" sz="1100"/>
                     </a:p>
                   </a:txBody>
-                  <a:tcPr marL="101600" marR="101600" marT="101600" marB="101600" anchor="t" anchorCtr="0">
+                  <a:tcPr marL="101600" marR="101600" marT="101600" marB="101600">
                     <a:lnL>
                       <a:noFill/>
                     </a:lnL>
@@ -15009,7 +16058,7 @@
                 </a:tc>
                 <a:tc>
                   <a:txBody>
-                    <a:bodyPr rtlCol="0"/>
+                    <a:bodyPr/>
                     <a:lstStyle/>
                     <a:p>
                       <a:pPr indent="0" algn="ctr">
@@ -15033,7 +16082,7 @@
                       <a:endParaRPr lang="en-US" sz="1100"/>
                     </a:p>
                   </a:txBody>
-                  <a:tcPr marL="101600" marR="101600" marT="101600" marB="101600" anchor="t" anchorCtr="0">
+                  <a:tcPr marL="101600" marR="101600" marT="101600" marB="101600">
                     <a:lnL>
                       <a:noFill/>
                     </a:lnL>
@@ -15055,7 +16104,7 @@
                 </a:tc>
                 <a:tc>
                   <a:txBody>
-                    <a:bodyPr rtlCol="0"/>
+                    <a:bodyPr/>
                     <a:lstStyle/>
                     <a:p>
                       <a:pPr indent="0" algn="ctr">
@@ -15079,7 +16128,7 @@
                       <a:endParaRPr lang="en-US" sz="1100"/>
                     </a:p>
                   </a:txBody>
-                  <a:tcPr marL="101600" marR="101600" marT="101600" marB="101600" anchor="t" anchorCtr="0">
+                  <a:tcPr marL="101600" marR="101600" marT="101600" marB="101600">
                     <a:lnL>
                       <a:noFill/>
                     </a:lnL>
@@ -15101,7 +16150,7 @@
                 </a:tc>
                 <a:tc>
                   <a:txBody>
-                    <a:bodyPr rtlCol="0"/>
+                    <a:bodyPr/>
                     <a:lstStyle/>
                     <a:p>
                       <a:pPr indent="0" algn="ctr">
@@ -15125,7 +16174,7 @@
                       <a:endParaRPr lang="en-US" sz="1100"/>
                     </a:p>
                   </a:txBody>
-                  <a:tcPr marL="101600" marR="101600" marT="101600" marB="101600" anchor="t" anchorCtr="0">
+                  <a:tcPr marL="101600" marR="101600" marT="101600" marB="101600">
                     <a:lnL>
                       <a:noFill/>
                     </a:lnL>
@@ -15149,7 +16198,7 @@
               <a:tr h="889000">
                 <a:tc>
                   <a:txBody>
-                    <a:bodyPr rtlCol="0"/>
+                    <a:bodyPr/>
                     <a:lstStyle/>
                     <a:p>
                       <a:pPr indent="0" algn="ctr">
@@ -15173,7 +16222,7 @@
                       <a:endParaRPr lang="en-US" sz="1100"/>
                     </a:p>
                   </a:txBody>
-                  <a:tcPr marL="127000" marR="127000" marT="101600" marB="101600" anchor="t" anchorCtr="0">
+                  <a:tcPr marL="127000" marR="127000" marT="101600" marB="101600">
                     <a:lnL>
                       <a:noFill/>
                     </a:lnL>
@@ -15201,7 +16250,7 @@
                 </a:tc>
                 <a:tc>
                   <a:txBody>
-                    <a:bodyPr rtlCol="0"/>
+                    <a:bodyPr/>
                     <a:lstStyle/>
                     <a:p>
                       <a:pPr indent="0" algn="ctr">
@@ -15225,7 +16274,7 @@
                       <a:endParaRPr lang="en-US" sz="1100"/>
                     </a:p>
                   </a:txBody>
-                  <a:tcPr marL="127000" marR="127000" marT="101600" marB="101600" anchor="t" anchorCtr="0">
+                  <a:tcPr marL="127000" marR="127000" marT="101600" marB="101600">
                     <a:lnL>
                       <a:noFill/>
                     </a:lnL>
@@ -15253,7 +16302,7 @@
                 </a:tc>
                 <a:tc>
                   <a:txBody>
-                    <a:bodyPr rtlCol="0"/>
+                    <a:bodyPr/>
                     <a:lstStyle/>
                     <a:p>
                       <a:pPr indent="0" algn="ctr">
@@ -15277,7 +16326,7 @@
                       <a:endParaRPr lang="en-US" sz="1100"/>
                     </a:p>
                   </a:txBody>
-                  <a:tcPr marL="127000" marR="127000" marT="101600" marB="101600" anchor="t" anchorCtr="0">
+                  <a:tcPr marL="127000" marR="127000" marT="101600" marB="101600">
                     <a:lnL>
                       <a:noFill/>
                     </a:lnL>
@@ -15305,7 +16354,7 @@
                 </a:tc>
                 <a:tc>
                   <a:txBody>
-                    <a:bodyPr rtlCol="0"/>
+                    <a:bodyPr/>
                     <a:lstStyle/>
                     <a:p>
                       <a:pPr indent="0" algn="ctr">
@@ -15329,7 +16378,7 @@
                       <a:endParaRPr lang="en-US" sz="1100"/>
                     </a:p>
                   </a:txBody>
-                  <a:tcPr marL="101600" marR="101600" marT="101600" marB="101600" anchor="t" anchorCtr="0">
+                  <a:tcPr marL="101600" marR="101600" marT="101600" marB="101600">
                     <a:lnL>
                       <a:noFill/>
                     </a:lnL>
@@ -15359,7 +16408,7 @@
               <a:tr h="889000">
                 <a:tc>
                   <a:txBody>
-                    <a:bodyPr rtlCol="0"/>
+                    <a:bodyPr/>
                     <a:lstStyle/>
                     <a:p>
                       <a:pPr indent="0" algn="ctr">
@@ -15383,7 +16432,7 @@
                       <a:endParaRPr lang="en-US" sz="1100"/>
                     </a:p>
                   </a:txBody>
-                  <a:tcPr marL="127000" marR="127000" marT="101600" marB="101600" anchor="t" anchorCtr="0">
+                  <a:tcPr marL="127000" marR="127000" marT="101600" marB="101600">
                     <a:lnL>
                       <a:noFill/>
                     </a:lnL>
@@ -15417,7 +16466,7 @@
                 </a:tc>
                 <a:tc>
                   <a:txBody>
-                    <a:bodyPr rtlCol="0"/>
+                    <a:bodyPr/>
                     <a:lstStyle/>
                     <a:p>
                       <a:pPr indent="0" algn="ctr">
@@ -15441,7 +16490,7 @@
                       <a:endParaRPr lang="en-US" sz="1100"/>
                     </a:p>
                   </a:txBody>
-                  <a:tcPr marL="127000" marR="127000" marT="101600" marB="101600" anchor="t" anchorCtr="0">
+                  <a:tcPr marL="127000" marR="127000" marT="101600" marB="101600">
                     <a:lnL>
                       <a:noFill/>
                     </a:lnL>
@@ -15475,7 +16524,7 @@
                 </a:tc>
                 <a:tc>
                   <a:txBody>
-                    <a:bodyPr rtlCol="0"/>
+                    <a:bodyPr/>
                     <a:lstStyle/>
                     <a:p>
                       <a:pPr indent="0" algn="ctr">
@@ -15485,7 +16534,7 @@
                         <a:defRPr/>
                       </a:pPr>
                       <a:r>
-                        <a:rPr lang="en-US" sz="1400" b="0" i="0" u="none" strike="noStrike">
+                        <a:rPr lang="en-US" sz="1400" b="0" i="0" u="none" strike="noStrike" dirty="0">
                           <a:solidFill>
                             <a:srgbClr val="333333"/>
                           </a:solidFill>
@@ -15494,12 +16543,12 @@
                           <a:cs typeface="Noto Sans SC" panose="020B0200000000000000" charset="-122"/>
                           <a:sym typeface="Noto Sans SC" panose="020B0200000000000000" charset="-122"/>
                         </a:rPr>
-                        <a:t>将规则明确化，并纳入错误码策略（E108）</a:t>
+                        <a:t>将规则明确化并纳入错误码策略（E108）</a:t>
                       </a:r>
-                      <a:endParaRPr lang="en-US" sz="1100"/>
+                      <a:endParaRPr lang="en-US" sz="1100" dirty="0"/>
                     </a:p>
                   </a:txBody>
-                  <a:tcPr marL="127000" marR="127000" marT="101600" marB="101600" anchor="t" anchorCtr="0">
+                  <a:tcPr marL="127000" marR="127000" marT="101600" marB="101600">
                     <a:lnL>
                       <a:noFill/>
                     </a:lnL>
@@ -15533,7 +16582,7 @@
                 </a:tc>
                 <a:tc>
                   <a:txBody>
-                    <a:bodyPr rtlCol="0"/>
+                    <a:bodyPr/>
                     <a:lstStyle/>
                     <a:p>
                       <a:pPr indent="0" algn="ctr">
@@ -15557,7 +16606,7 @@
                       <a:endParaRPr lang="en-US" sz="1100"/>
                     </a:p>
                   </a:txBody>
-                  <a:tcPr marL="101600" marR="101600" marT="101600" marB="101600" anchor="t" anchorCtr="0">
+                  <a:tcPr marL="101600" marR="101600" marT="101600" marB="101600">
                     <a:lnL>
                       <a:noFill/>
                     </a:lnL>
@@ -15593,7 +16642,7 @@
               <a:tr h="889000">
                 <a:tc>
                   <a:txBody>
-                    <a:bodyPr rtlCol="0"/>
+                    <a:bodyPr/>
                     <a:lstStyle/>
                     <a:p>
                       <a:pPr indent="0" algn="ctr">
@@ -15617,7 +16666,7 @@
                       <a:endParaRPr lang="en-US" sz="1100"/>
                     </a:p>
                   </a:txBody>
-                  <a:tcPr marL="127000" marR="127000" marT="101600" marB="101600" anchor="t" anchorCtr="0">
+                  <a:tcPr marL="127000" marR="127000" marT="101600" marB="101600">
                     <a:lnL>
                       <a:noFill/>
                     </a:lnL>
@@ -15651,7 +16700,7 @@
                 </a:tc>
                 <a:tc>
                   <a:txBody>
-                    <a:bodyPr rtlCol="0"/>
+                    <a:bodyPr/>
                     <a:lstStyle/>
                     <a:p>
                       <a:pPr indent="0" algn="ctr">
@@ -15675,7 +16724,7 @@
                       <a:endParaRPr lang="en-US" sz="1100"/>
                     </a:p>
                   </a:txBody>
-                  <a:tcPr marL="127000" marR="127000" marT="101600" marB="101600" anchor="t" anchorCtr="0">
+                  <a:tcPr marL="127000" marR="127000" marT="101600" marB="101600">
                     <a:lnL>
                       <a:noFill/>
                     </a:lnL>
@@ -15709,7 +16758,7 @@
                 </a:tc>
                 <a:tc>
                   <a:txBody>
-                    <a:bodyPr rtlCol="0"/>
+                    <a:bodyPr/>
                     <a:lstStyle/>
                     <a:p>
                       <a:pPr indent="0" algn="ctr">
@@ -15733,7 +16782,7 @@
                       <a:endParaRPr lang="en-US" sz="1100"/>
                     </a:p>
                   </a:txBody>
-                  <a:tcPr marL="127000" marR="127000" marT="101600" marB="101600" anchor="t" anchorCtr="0">
+                  <a:tcPr marL="127000" marR="127000" marT="101600" marB="101600">
                     <a:lnL>
                       <a:noFill/>
                     </a:lnL>
@@ -15767,7 +16816,7 @@
                 </a:tc>
                 <a:tc>
                   <a:txBody>
-                    <a:bodyPr rtlCol="0"/>
+                    <a:bodyPr/>
                     <a:lstStyle/>
                     <a:p>
                       <a:pPr indent="0" algn="ctr">
@@ -15777,7 +16826,7 @@
                         <a:defRPr/>
                       </a:pPr>
                       <a:r>
-                        <a:rPr lang="en-US" sz="1400" b="1" i="0" u="none" strike="noStrike">
+                        <a:rPr lang="en-US" sz="1400" b="1" i="0" u="none" strike="noStrike" dirty="0" err="1">
                           <a:solidFill>
                             <a:srgbClr val="005A9C"/>
                           </a:solidFill>
@@ -15788,10 +16837,10 @@
                         </a:rPr>
                         <a:t>已解决</a:t>
                       </a:r>
-                      <a:endParaRPr lang="en-US" sz="1100"/>
+                      <a:endParaRPr lang="en-US" sz="1100" dirty="0"/>
                     </a:p>
                   </a:txBody>
-                  <a:tcPr marL="101600" marR="101600" marT="101600" marB="101600" anchor="t" anchorCtr="0">
+                  <a:tcPr marL="101600" marR="101600" marT="101600" marB="101600">
                     <a:lnL>
                       <a:noFill/>
                     </a:lnL>
@@ -16946,7 +17995,7 @@
               <a:defRPr/>
             </a:pPr>
             <a:r>
-              <a:rPr lang="en-US" sz="1600" b="0" i="0" u="none" strike="noStrike">
+              <a:rPr lang="en-US" sz="1600" b="0" i="0" u="none" strike="noStrike" dirty="0" err="1">
                 <a:solidFill>
                   <a:srgbClr val="333333"/>
                 </a:solidFill>
@@ -16955,9 +18004,21 @@
                 <a:cs typeface="Noto Sans SC" panose="020B0200000000000000" charset="-122"/>
                 <a:sym typeface="Noto Sans SC" panose="020B0200000000000000" charset="-122"/>
               </a:rPr>
-              <a:t>实现词法分析到语法分析的完整可运行链路，确保核心编译流程通畅。</a:t>
-            </a:r>
-            <a:endParaRPr lang="en-US" sz="1100"/>
+              <a:t>实现词法分析到语法分析的完整可运行链路，确保核心编译流程通畅</a:t>
+            </a:r>
+            <a:r>
+              <a:rPr lang="en-US" sz="1600" b="0" i="0" u="none" strike="noStrike" dirty="0">
+                <a:solidFill>
+                  <a:srgbClr val="333333"/>
+                </a:solidFill>
+                <a:latin typeface="Noto Sans SC" panose="020B0200000000000000" charset="-122"/>
+                <a:ea typeface="Noto Sans SC" panose="020B0200000000000000" charset="-122"/>
+                <a:cs typeface="Noto Sans SC" panose="020B0200000000000000" charset="-122"/>
+                <a:sym typeface="Noto Sans SC" panose="020B0200000000000000" charset="-122"/>
+              </a:rPr>
+              <a:t>。</a:t>
+            </a:r>
+            <a:endParaRPr lang="en-US" sz="1100" dirty="0"/>
           </a:p>
         </p:txBody>
       </p:sp>
@@ -17033,37 +18094,6 @@
           <a:chExt cx="0" cy="0"/>
         </a:xfrm>
       </p:grpSpPr>
-      <p:pic>
-        <p:nvPicPr>
-          <p:cNvPr id="2" name="Picture 2"/>
-          <p:cNvPicPr>
-            <a:picLocks noChangeAspect="1"/>
-          </p:cNvPicPr>
-          <p:nvPr/>
-        </p:nvPicPr>
-        <p:blipFill>
-          <a:blip r:embed="rId1"/>
-          <a:srcRect/>
-          <a:stretch>
-            <a:fillRect/>
-          </a:stretch>
-        </p:blipFill>
-        <p:spPr>
-          <a:xfrm>
-            <a:off x="0" y="0"/>
-            <a:ext cx="12192000" cy="6858000"/>
-          </a:xfrm>
-          <a:prstGeom prst="rect">
-            <a:avLst/>
-          </a:prstGeom>
-          <a:noFill/>
-          <a:ln w="25400" cap="flat" cmpd="sng">
-            <a:noFill/>
-            <a:prstDash val="solid"/>
-            <a:round/>
-          </a:ln>
-        </p:spPr>
-      </p:pic>
       <p:sp>
         <p:nvSpPr>
           <p:cNvPr id="3" name="AutoShape 3"/>
@@ -17205,13 +18235,13 @@
           <p:nvPr/>
         </p:nvPicPr>
         <p:blipFill>
-          <a:blip r:embed="rId2">
+          <a:blip r:embed="rId1">
             <a:extLst>
               <a:ext uri="{28A0092B-C50C-407E-A947-70E740481C1C}">
                 <a14:useLocalDpi xmlns:a14="http://schemas.microsoft.com/office/drawing/2010/main" val="0"/>
               </a:ext>
               <a:ext uri="{96DAC541-7B7A-43D3-8B79-37D633B846F1}">
-                <asvg:svgBlip xmlns:asvg="http://schemas.microsoft.com/office/drawing/2016/SVG/main" r:embed="rId3"/>
+                <asvg:svgBlip xmlns:asvg="http://schemas.microsoft.com/office/drawing/2016/SVG/main" r:embed="rId2"/>
               </a:ext>
             </a:extLst>
           </a:blip>
@@ -17417,13 +18447,13 @@
           <p:nvPr/>
         </p:nvPicPr>
         <p:blipFill>
-          <a:blip r:embed="rId4">
+          <a:blip r:embed="rId3">
             <a:extLst>
               <a:ext uri="{28A0092B-C50C-407E-A947-70E740481C1C}">
                 <a14:useLocalDpi xmlns:a14="http://schemas.microsoft.com/office/drawing/2010/main" val="0"/>
               </a:ext>
               <a:ext uri="{96DAC541-7B7A-43D3-8B79-37D633B846F1}">
-                <asvg:svgBlip xmlns:asvg="http://schemas.microsoft.com/office/drawing/2016/SVG/main" r:embed="rId5"/>
+                <asvg:svgBlip xmlns:asvg="http://schemas.microsoft.com/office/drawing/2016/SVG/main" r:embed="rId4"/>
               </a:ext>
             </a:extLst>
           </a:blip>
@@ -17497,7 +18527,7 @@
         <p:spPr>
           <a:xfrm>
             <a:off x="6667500" y="2095500"/>
-            <a:ext cx="4445000" cy="1270000"/>
+            <a:ext cx="4572000" cy="1270000"/>
           </a:xfrm>
           <a:prstGeom prst="rect">
             <a:avLst/>
@@ -17520,7 +18550,7 @@
               <a:defRPr/>
             </a:pPr>
             <a:r>
-              <a:rPr lang="en-US" sz="1400" b="0" i="0" u="none" strike="noStrike">
+              <a:rPr lang="en-US" sz="1400" b="0" i="0" u="none" strike="noStrike" dirty="0">
                 <a:solidFill>
                   <a:srgbClr val="333333"/>
                 </a:solidFill>
@@ -17531,7 +18561,7 @@
               </a:rPr>
               <a:t>项目整体运行稳定，代码、文档与测试口径保持高度一致。已为进入M3阶段的语法分析开发工作奠定了坚实基础。</a:t>
             </a:r>
-            <a:endParaRPr lang="en-US" sz="1100"/>
+            <a:endParaRPr lang="en-US" sz="1100" dirty="0"/>
           </a:p>
         </p:txBody>
       </p:sp>
@@ -17629,13 +18659,13 @@
           <p:nvPr/>
         </p:nvPicPr>
         <p:blipFill>
-          <a:blip r:embed="rId6">
+          <a:blip r:embed="rId5">
             <a:extLst>
               <a:ext uri="{28A0092B-C50C-407E-A947-70E740481C1C}">
                 <a14:useLocalDpi xmlns:a14="http://schemas.microsoft.com/office/drawing/2010/main" val="0"/>
               </a:ext>
               <a:ext uri="{96DAC541-7B7A-43D3-8B79-37D633B846F1}">
-                <asvg:svgBlip xmlns:asvg="http://schemas.microsoft.com/office/drawing/2016/SVG/main" r:embed="rId7"/>
+                <asvg:svgBlip xmlns:asvg="http://schemas.microsoft.com/office/drawing/2016/SVG/main" r:embed="rId6"/>
               </a:ext>
             </a:extLst>
           </a:blip>
@@ -17747,242 +18777,6 @@
           </a:p>
         </p:txBody>
       </p:sp>
-      <p:sp>
-        <p:nvSpPr>
-          <p:cNvPr id="19" name="AutoShape 19"/>
-          <p:cNvSpPr/>
-          <p:nvPr/>
-        </p:nvSpPr>
-        <p:spPr>
-          <a:xfrm>
-            <a:off x="6350000" y="3810000"/>
-            <a:ext cx="5080000" cy="2159000"/>
-          </a:xfrm>
-          <a:prstGeom prst="roundRect">
-            <a:avLst>
-              <a:gd name="adj" fmla="val 5882"/>
-            </a:avLst>
-          </a:prstGeom>
-          <a:solidFill>
-            <a:srgbClr val="FFFFFF">
-              <a:alpha val="100000"/>
-            </a:srgbClr>
-          </a:solidFill>
-          <a:ln cap="flat" cmpd="sng">
-            <a:solidFill>
-              <a:srgbClr val="E6CFCF">
-                <a:alpha val="100000"/>
-              </a:srgbClr>
-            </a:solidFill>
-            <a:prstDash val="solid"/>
-            <a:round/>
-          </a:ln>
-          <a:effectLst>
-            <a:outerShdw blurRad="127000" dist="50800" dir="5400000" algn="tl" rotWithShape="0">
-              <a:srgbClr val="000000">
-                <a:alpha val="8000"/>
-              </a:srgbClr>
-            </a:outerShdw>
-          </a:effectLst>
-        </p:spPr>
-        <p:txBody>
-          <a:bodyPr vert="horz" wrap="square" lIns="63500" tIns="63500" rIns="63500" bIns="63500" rtlCol="0" anchor="ctr"/>
-          <a:lstStyle/>
-          <a:p>
-            <a:pPr algn="ctr">
-              <a:defRPr/>
-            </a:pPr>
-          </a:p>
-        </p:txBody>
-      </p:sp>
-      <p:sp>
-        <p:nvSpPr>
-          <p:cNvPr id="20" name="AutoShape 20"/>
-          <p:cNvSpPr/>
-          <p:nvPr/>
-        </p:nvSpPr>
-        <p:spPr>
-          <a:xfrm>
-            <a:off x="6350000" y="3810000"/>
-            <a:ext cx="76200" cy="2159000"/>
-          </a:xfrm>
-          <a:prstGeom prst="roundRect">
-            <a:avLst>
-              <a:gd name="adj" fmla="val 0"/>
-            </a:avLst>
-          </a:prstGeom>
-          <a:solidFill>
-            <a:srgbClr val="005A9C">
-              <a:alpha val="100000"/>
-            </a:srgbClr>
-          </a:solidFill>
-          <a:ln w="25400" cap="flat" cmpd="sng">
-            <a:noFill/>
-            <a:prstDash val="solid"/>
-            <a:round/>
-          </a:ln>
-        </p:spPr>
-        <p:txBody>
-          <a:bodyPr vert="horz" wrap="square" lIns="63500" tIns="63500" rIns="63500" bIns="63500" rtlCol="0" anchor="ctr"/>
-          <a:lstStyle/>
-          <a:p>
-            <a:pPr algn="ctr">
-              <a:defRPr/>
-            </a:pPr>
-          </a:p>
-        </p:txBody>
-      </p:sp>
-      <p:pic>
-        <p:nvPicPr>
-          <p:cNvPr id="21" name="Picture 21"/>
-          <p:cNvPicPr>
-            <a:picLocks noChangeAspect="1"/>
-          </p:cNvPicPr>
-          <p:nvPr/>
-        </p:nvPicPr>
-        <p:blipFill>
-          <a:blip r:embed="rId8">
-            <a:extLst>
-              <a:ext uri="{28A0092B-C50C-407E-A947-70E740481C1C}">
-                <a14:useLocalDpi xmlns:a14="http://schemas.microsoft.com/office/drawing/2010/main" val="0"/>
-              </a:ext>
-              <a:ext uri="{96DAC541-7B7A-43D3-8B79-37D633B846F1}">
-                <asvg:svgBlip xmlns:asvg="http://schemas.microsoft.com/office/drawing/2016/SVG/main" r:embed="rId9"/>
-              </a:ext>
-            </a:extLst>
-          </a:blip>
-          <a:stretch>
-            <a:fillRect/>
-          </a:stretch>
-        </p:blipFill>
-        <p:spPr>
-          <a:xfrm>
-            <a:off x="6667500" y="4064000"/>
-            <a:ext cx="406400" cy="406400"/>
-          </a:xfrm>
-          <a:prstGeom prst="rect">
-            <a:avLst/>
-          </a:prstGeom>
-        </p:spPr>
-      </p:pic>
-      <p:sp>
-        <p:nvSpPr>
-          <p:cNvPr id="22" name="AutoShape 22"/>
-          <p:cNvSpPr/>
-          <p:nvPr/>
-        </p:nvSpPr>
-        <p:spPr>
-          <a:xfrm>
-            <a:off x="7175500" y="4038600"/>
-            <a:ext cx="4064000" cy="381000"/>
-          </a:xfrm>
-          <a:prstGeom prst="rect">
-            <a:avLst/>
-          </a:prstGeom>
-          <a:noFill/>
-          <a:ln w="12700" cap="flat" cmpd="sng">
-            <a:noFill/>
-            <a:prstDash val="solid"/>
-            <a:round/>
-          </a:ln>
-        </p:spPr>
-        <p:txBody>
-          <a:bodyPr vert="horz" wrap="square" lIns="0" tIns="0" rIns="0" bIns="0" rtlCol="0" anchor="ctr" anchorCtr="0"/>
-          <a:lstStyle/>
-          <a:p>
-            <a:pPr indent="0" algn="l">
-              <a:lnSpc>
-                <a:spcPct val="125000"/>
-              </a:lnSpc>
-              <a:defRPr/>
-            </a:pPr>
-            <a:r>
-              <a:rPr lang="en-US" sz="2000" b="1" i="0" u="none" strike="noStrike">
-                <a:solidFill>
-                  <a:srgbClr val="005A9C"/>
-                </a:solidFill>
-                <a:latin typeface="Noto Sans SC" panose="020B0200000000000000" charset="-122"/>
-                <a:ea typeface="Noto Sans SC" panose="020B0200000000000000" charset="-122"/>
-                <a:cs typeface="Noto Sans SC" panose="020B0200000000000000" charset="-122"/>
-                <a:sym typeface="Noto Sans SC" panose="020B0200000000000000" charset="-122"/>
-              </a:rPr>
-              <a:t>答辩准备与期望</a:t>
-            </a:r>
-            <a:endParaRPr lang="en-US" sz="1100"/>
-          </a:p>
-        </p:txBody>
-      </p:sp>
-      <p:sp>
-        <p:nvSpPr>
-          <p:cNvPr id="23" name="AutoShape 23"/>
-          <p:cNvSpPr/>
-          <p:nvPr/>
-        </p:nvSpPr>
-        <p:spPr>
-          <a:xfrm>
-            <a:off x="6667500" y="4508500"/>
-            <a:ext cx="4445000" cy="1270000"/>
-          </a:xfrm>
-          <a:prstGeom prst="rect">
-            <a:avLst/>
-          </a:prstGeom>
-          <a:noFill/>
-          <a:ln w="12700" cap="flat" cmpd="sng">
-            <a:noFill/>
-            <a:prstDash val="solid"/>
-            <a:round/>
-          </a:ln>
-        </p:spPr>
-        <p:txBody>
-          <a:bodyPr vert="horz" wrap="square" lIns="0" tIns="0" rIns="0" bIns="0" rtlCol="0" anchor="t" anchorCtr="0"/>
-          <a:lstStyle/>
-          <a:p>
-            <a:pPr indent="0" algn="l">
-              <a:lnSpc>
-                <a:spcPct val="108000"/>
-              </a:lnSpc>
-              <a:defRPr/>
-            </a:pPr>
-            <a:r>
-              <a:rPr lang="en-US" sz="1400" b="0" i="0" u="none" strike="noStrike">
-                <a:solidFill>
-                  <a:srgbClr val="333333"/>
-                </a:solidFill>
-                <a:latin typeface="Noto Sans SC" panose="020B0200000000000000" charset="-122"/>
-                <a:ea typeface="Noto Sans SC" panose="020B0200000000000000" charset="-122"/>
-                <a:cs typeface="Noto Sans SC" panose="020B0200000000000000" charset="-122"/>
-                <a:sym typeface="Noto Sans SC" panose="020B0200000000000000" charset="-122"/>
-              </a:rPr>
-              <a:t>已准备好接受M1/M2阶段细节质询。特别希望听取各位老师对M3阶段语法错误恢复策略及后续语义联调计划的指导意见。</a:t>
-            </a:r>
-            <a:endParaRPr lang="en-US" sz="1100"/>
-          </a:p>
-        </p:txBody>
-      </p:sp>
-      <p:pic>
-        <p:nvPicPr>
-          <p:cNvPr id="24" name="Picture 24"/>
-          <p:cNvPicPr>
-            <a:picLocks noChangeAspect="1"/>
-          </p:cNvPicPr>
-          <p:nvPr/>
-        </p:nvPicPr>
-        <p:blipFill>
-          <a:blip r:embed="rId10"/>
-          <a:stretch>
-            <a:fillRect/>
-          </a:stretch>
-        </p:blipFill>
-        <p:spPr>
-          <a:xfrm>
-            <a:off x="10668000" y="6190112"/>
-            <a:ext cx="1524000" cy="667888"/>
-          </a:xfrm>
-          <a:prstGeom prst="rect">
-            <a:avLst/>
-          </a:prstGeom>
-        </p:spPr>
-      </p:pic>
     </p:spTree>
   </p:cSld>
   <p:clrMapOvr>
@@ -18018,37 +18812,6 @@
           <a:chExt cx="0" cy="0"/>
         </a:xfrm>
       </p:grpSpPr>
-      <p:pic>
-        <p:nvPicPr>
-          <p:cNvPr id="2" name="Picture 2"/>
-          <p:cNvPicPr>
-            <a:picLocks noChangeAspect="1"/>
-          </p:cNvPicPr>
-          <p:nvPr/>
-        </p:nvPicPr>
-        <p:blipFill>
-          <a:blip r:embed="rId1"/>
-          <a:srcRect/>
-          <a:stretch>
-            <a:fillRect/>
-          </a:stretch>
-        </p:blipFill>
-        <p:spPr>
-          <a:xfrm>
-            <a:off x="0" y="0"/>
-            <a:ext cx="12192000" cy="6858000"/>
-          </a:xfrm>
-          <a:prstGeom prst="rect">
-            <a:avLst/>
-          </a:prstGeom>
-          <a:noFill/>
-          <a:ln w="25400" cap="flat" cmpd="sng">
-            <a:noFill/>
-            <a:prstDash val="solid"/>
-            <a:round/>
-          </a:ln>
-        </p:spPr>
-      </p:pic>
       <p:sp>
         <p:nvSpPr>
           <p:cNvPr id="3" name="AutoShape 3"/>
@@ -18081,7 +18844,7 @@
               <a:defRPr/>
             </a:pPr>
             <a:r>
-              <a:rPr lang="en-US" sz="3200" b="1" i="0" u="none" strike="noStrike">
+              <a:rPr lang="en-US" sz="3200" b="1" i="0" u="none" strike="noStrike" dirty="0" err="1">
                 <a:solidFill>
                   <a:srgbClr val="333333"/>
                 </a:solidFill>
@@ -18092,7 +18855,7 @@
               </a:rPr>
               <a:t>项目目标与验收约束</a:t>
             </a:r>
-            <a:endParaRPr lang="en-US" sz="1100"/>
+            <a:endParaRPr lang="en-US" sz="1100" dirty="0"/>
           </a:p>
         </p:txBody>
       </p:sp>
@@ -18153,13 +18916,13 @@
           <p:nvPr/>
         </p:nvPicPr>
         <p:blipFill>
-          <a:blip r:embed="rId2">
+          <a:blip r:embed="rId1">
             <a:extLst>
               <a:ext uri="{28A0092B-C50C-407E-A947-70E740481C1C}">
                 <a14:useLocalDpi xmlns:a14="http://schemas.microsoft.com/office/drawing/2010/main" val="0"/>
               </a:ext>
               <a:ext uri="{96DAC541-7B7A-43D3-8B79-37D633B846F1}">
-                <asvg:svgBlip xmlns:asvg="http://schemas.microsoft.com/office/drawing/2016/SVG/main" r:embed="rId3"/>
+                <asvg:svgBlip xmlns:asvg="http://schemas.microsoft.com/office/drawing/2016/SVG/main" r:embed="rId2"/>
               </a:ext>
             </a:extLst>
           </a:blip>
@@ -18259,7 +19022,7 @@
               <a:defRPr/>
             </a:pPr>
             <a:r>
-              <a:rPr lang="en-US" sz="1400" b="1" i="0" u="none" strike="noStrike">
+              <a:rPr lang="en-US" sz="1400" b="1" i="0" u="none" strike="noStrike" dirty="0" err="1">
                 <a:solidFill>
                   <a:srgbClr val="333333"/>
                 </a:solidFill>
@@ -18268,9 +19031,21 @@
                 <a:cs typeface="Noto Sans SC" panose="020B0200000000000000" charset="-122"/>
                 <a:sym typeface="Noto Sans SC" panose="020B0200000000000000" charset="-122"/>
               </a:rPr>
-              <a:t>总目标：</a:t>
-            </a:r>
-            <a:endParaRPr lang="en-US" sz="1100"/>
+              <a:t>总目标</a:t>
+            </a:r>
+            <a:r>
+              <a:rPr lang="en-US" sz="1400" b="1" i="0" u="none" strike="noStrike" dirty="0">
+                <a:solidFill>
+                  <a:srgbClr val="333333"/>
+                </a:solidFill>
+                <a:latin typeface="Noto Sans SC" panose="020B0200000000000000" charset="-122"/>
+                <a:ea typeface="Noto Sans SC" panose="020B0200000000000000" charset="-122"/>
+                <a:cs typeface="Noto Sans SC" panose="020B0200000000000000" charset="-122"/>
+                <a:sym typeface="Noto Sans SC" panose="020B0200000000000000" charset="-122"/>
+              </a:rPr>
+              <a:t>：</a:t>
+            </a:r>
+            <a:endParaRPr lang="en-US" sz="1100" dirty="0"/>
           </a:p>
           <a:p>
             <a:pPr indent="0" algn="l">
@@ -18279,7 +19054,7 @@
               </a:lnSpc>
             </a:pPr>
             <a:r>
-              <a:rPr lang="en-US" sz="1300" b="0" i="0" u="none" strike="noStrike">
+              <a:rPr lang="en-US" sz="1300" b="0" i="0" u="none" strike="noStrike" dirty="0">
                 <a:solidFill>
                   <a:srgbClr val="555555"/>
                 </a:solidFill>
@@ -18288,9 +19063,57 @@
                 <a:cs typeface="Noto Sans SC" panose="020B0200000000000000" charset="-122"/>
                 <a:sym typeface="Noto Sans SC" panose="020B0200000000000000" charset="-122"/>
               </a:rPr>
-              <a:t>将 Pascal-S 程序翻译为可编译运行的 C 程序。</a:t>
-            </a:r>
-            <a:endParaRPr lang="en-US" sz="1300" b="0" i="0" u="none" strike="noStrike">
+              <a:t>将 Pascal-S </a:t>
+            </a:r>
+            <a:r>
+              <a:rPr lang="en-US" sz="1300" b="0" i="0" u="none" strike="noStrike" dirty="0" err="1">
+                <a:solidFill>
+                  <a:srgbClr val="555555"/>
+                </a:solidFill>
+                <a:latin typeface="Noto Sans SC" panose="020B0200000000000000" charset="-122"/>
+                <a:ea typeface="Noto Sans SC" panose="020B0200000000000000" charset="-122"/>
+                <a:cs typeface="Noto Sans SC" panose="020B0200000000000000" charset="-122"/>
+                <a:sym typeface="Noto Sans SC" panose="020B0200000000000000" charset="-122"/>
+              </a:rPr>
+              <a:t>程序翻译为可编译运行的</a:t>
+            </a:r>
+            <a:r>
+              <a:rPr lang="en-US" sz="1300" b="0" i="0" u="none" strike="noStrike" dirty="0">
+                <a:solidFill>
+                  <a:srgbClr val="555555"/>
+                </a:solidFill>
+                <a:latin typeface="Noto Sans SC" panose="020B0200000000000000" charset="-122"/>
+                <a:ea typeface="Noto Sans SC" panose="020B0200000000000000" charset="-122"/>
+                <a:cs typeface="Noto Sans SC" panose="020B0200000000000000" charset="-122"/>
+                <a:sym typeface="Noto Sans SC" panose="020B0200000000000000" charset="-122"/>
+              </a:rPr>
+              <a:t> C </a:t>
+            </a:r>
+            <a:r>
+              <a:rPr lang="en-US" sz="1300" b="0" i="0" u="none" strike="noStrike" dirty="0" err="1">
+                <a:solidFill>
+                  <a:srgbClr val="555555"/>
+                </a:solidFill>
+                <a:latin typeface="Noto Sans SC" panose="020B0200000000000000" charset="-122"/>
+                <a:ea typeface="Noto Sans SC" panose="020B0200000000000000" charset="-122"/>
+                <a:cs typeface="Noto Sans SC" panose="020B0200000000000000" charset="-122"/>
+                <a:sym typeface="Noto Sans SC" panose="020B0200000000000000" charset="-122"/>
+              </a:rPr>
+              <a:t>程序</a:t>
+            </a:r>
+            <a:r>
+              <a:rPr lang="en-US" sz="1300" b="0" i="0" u="none" strike="noStrike" dirty="0">
+                <a:solidFill>
+                  <a:srgbClr val="555555"/>
+                </a:solidFill>
+                <a:latin typeface="Noto Sans SC" panose="020B0200000000000000" charset="-122"/>
+                <a:ea typeface="Noto Sans SC" panose="020B0200000000000000" charset="-122"/>
+                <a:cs typeface="Noto Sans SC" panose="020B0200000000000000" charset="-122"/>
+                <a:sym typeface="Noto Sans SC" panose="020B0200000000000000" charset="-122"/>
+              </a:rPr>
+              <a:t>。</a:t>
+            </a:r>
+            <a:endParaRPr lang="en-US" sz="1300" b="0" i="0" u="none" strike="noStrike" dirty="0">
               <a:solidFill>
                 <a:srgbClr val="555555"/>
               </a:solidFill>
@@ -18310,7 +19133,7 @@
               </a:spcBef>
             </a:pPr>
             <a:r>
-              <a:rPr lang="en-US" sz="1400" b="1" i="0" u="none" strike="noStrike">
+              <a:rPr lang="en-US" sz="1400" b="1" i="0" u="none" strike="noStrike" dirty="0" err="1">
                 <a:solidFill>
                   <a:srgbClr val="333333"/>
                 </a:solidFill>
@@ -18319,9 +19142,21 @@
                 <a:cs typeface="Noto Sans SC" panose="020B0200000000000000" charset="-122"/>
                 <a:sym typeface="Noto Sans SC" panose="020B0200000000000000" charset="-122"/>
               </a:rPr>
-              <a:t>核心功能链路：</a:t>
-            </a:r>
-            <a:endParaRPr lang="en-US" sz="1400" b="1" i="0" u="none" strike="noStrike">
+              <a:t>核心功能链路</a:t>
+            </a:r>
+            <a:r>
+              <a:rPr lang="en-US" sz="1400" b="1" i="0" u="none" strike="noStrike" dirty="0">
+                <a:solidFill>
+                  <a:srgbClr val="333333"/>
+                </a:solidFill>
+                <a:latin typeface="Noto Sans SC" panose="020B0200000000000000" charset="-122"/>
+                <a:ea typeface="Noto Sans SC" panose="020B0200000000000000" charset="-122"/>
+                <a:cs typeface="Noto Sans SC" panose="020B0200000000000000" charset="-122"/>
+                <a:sym typeface="Noto Sans SC" panose="020B0200000000000000" charset="-122"/>
+              </a:rPr>
+              <a:t>：</a:t>
+            </a:r>
+            <a:endParaRPr lang="en-US" sz="1400" b="1" i="0" u="none" strike="noStrike" dirty="0">
               <a:solidFill>
                 <a:srgbClr val="333333"/>
               </a:solidFill>
@@ -18338,7 +19173,7 @@
               </a:lnSpc>
             </a:pPr>
             <a:r>
-              <a:rPr lang="en-US" sz="1300" b="0" i="0" u="none" strike="noStrike">
+              <a:rPr lang="en-US" sz="1300" b="0" i="0" u="none" strike="noStrike" dirty="0" err="1">
                 <a:solidFill>
                   <a:srgbClr val="555555"/>
                 </a:solidFill>
@@ -18347,9 +19182,105 @@
                 <a:cs typeface="Noto Sans SC" panose="020B0200000000000000" charset="-122"/>
                 <a:sym typeface="Noto Sans SC" panose="020B0200000000000000" charset="-122"/>
               </a:rPr>
-              <a:t>词法分析 → 语法分析 → 语义分析 → 代码生成 → 测试验证</a:t>
-            </a:r>
-            <a:endParaRPr lang="en-US" sz="1300" b="0" i="0" u="none" strike="noStrike">
+              <a:t>词法分析</a:t>
+            </a:r>
+            <a:r>
+              <a:rPr lang="en-US" sz="1300" b="0" i="0" u="none" strike="noStrike" dirty="0">
+                <a:solidFill>
+                  <a:srgbClr val="555555"/>
+                </a:solidFill>
+                <a:latin typeface="Noto Sans SC" panose="020B0200000000000000" charset="-122"/>
+                <a:ea typeface="Noto Sans SC" panose="020B0200000000000000" charset="-122"/>
+                <a:cs typeface="Noto Sans SC" panose="020B0200000000000000" charset="-122"/>
+                <a:sym typeface="Noto Sans SC" panose="020B0200000000000000" charset="-122"/>
+              </a:rPr>
+              <a:t> → </a:t>
+            </a:r>
+            <a:r>
+              <a:rPr lang="en-US" sz="1300" b="0" i="0" u="none" strike="noStrike" dirty="0" err="1">
+                <a:solidFill>
+                  <a:srgbClr val="555555"/>
+                </a:solidFill>
+                <a:latin typeface="Noto Sans SC" panose="020B0200000000000000" charset="-122"/>
+                <a:ea typeface="Noto Sans SC" panose="020B0200000000000000" charset="-122"/>
+                <a:cs typeface="Noto Sans SC" panose="020B0200000000000000" charset="-122"/>
+                <a:sym typeface="Noto Sans SC" panose="020B0200000000000000" charset="-122"/>
+              </a:rPr>
+              <a:t>语法分析</a:t>
+            </a:r>
+            <a:r>
+              <a:rPr lang="en-US" sz="1300" b="0" i="0" u="none" strike="noStrike" dirty="0">
+                <a:solidFill>
+                  <a:srgbClr val="555555"/>
+                </a:solidFill>
+                <a:latin typeface="Noto Sans SC" panose="020B0200000000000000" charset="-122"/>
+                <a:ea typeface="Noto Sans SC" panose="020B0200000000000000" charset="-122"/>
+                <a:cs typeface="Noto Sans SC" panose="020B0200000000000000" charset="-122"/>
+                <a:sym typeface="Noto Sans SC" panose="020B0200000000000000" charset="-122"/>
+              </a:rPr>
+              <a:t> → </a:t>
+            </a:r>
+            <a:r>
+              <a:rPr lang="en-US" sz="1300" b="0" i="0" u="none" strike="noStrike" dirty="0" err="1">
+                <a:solidFill>
+                  <a:srgbClr val="555555"/>
+                </a:solidFill>
+                <a:latin typeface="Noto Sans SC" panose="020B0200000000000000" charset="-122"/>
+                <a:ea typeface="Noto Sans SC" panose="020B0200000000000000" charset="-122"/>
+                <a:cs typeface="Noto Sans SC" panose="020B0200000000000000" charset="-122"/>
+                <a:sym typeface="Noto Sans SC" panose="020B0200000000000000" charset="-122"/>
+              </a:rPr>
+              <a:t>语义分析</a:t>
+            </a:r>
+            <a:r>
+              <a:rPr lang="en-US" sz="1300" b="0" i="0" u="none" strike="noStrike" dirty="0">
+                <a:solidFill>
+                  <a:srgbClr val="555555"/>
+                </a:solidFill>
+                <a:latin typeface="Noto Sans SC" panose="020B0200000000000000" charset="-122"/>
+                <a:ea typeface="Noto Sans SC" panose="020B0200000000000000" charset="-122"/>
+                <a:cs typeface="Noto Sans SC" panose="020B0200000000000000" charset="-122"/>
+                <a:sym typeface="Noto Sans SC" panose="020B0200000000000000" charset="-122"/>
+              </a:rPr>
+              <a:t> → </a:t>
+            </a:r>
+            <a:r>
+              <a:rPr lang="en-US" sz="1300" b="0" i="0" u="none" strike="noStrike" dirty="0" err="1">
+                <a:solidFill>
+                  <a:srgbClr val="555555"/>
+                </a:solidFill>
+                <a:latin typeface="Noto Sans SC" panose="020B0200000000000000" charset="-122"/>
+                <a:ea typeface="Noto Sans SC" panose="020B0200000000000000" charset="-122"/>
+                <a:cs typeface="Noto Sans SC" panose="020B0200000000000000" charset="-122"/>
+                <a:sym typeface="Noto Sans SC" panose="020B0200000000000000" charset="-122"/>
+              </a:rPr>
+              <a:t>代码生成</a:t>
+            </a:r>
+            <a:r>
+              <a:rPr lang="en-US" sz="1300" b="0" i="0" u="none" strike="noStrike" dirty="0">
+                <a:solidFill>
+                  <a:srgbClr val="555555"/>
+                </a:solidFill>
+                <a:latin typeface="Noto Sans SC" panose="020B0200000000000000" charset="-122"/>
+                <a:ea typeface="Noto Sans SC" panose="020B0200000000000000" charset="-122"/>
+                <a:cs typeface="Noto Sans SC" panose="020B0200000000000000" charset="-122"/>
+                <a:sym typeface="Noto Sans SC" panose="020B0200000000000000" charset="-122"/>
+              </a:rPr>
+              <a:t> → </a:t>
+            </a:r>
+            <a:r>
+              <a:rPr lang="en-US" sz="1300" b="0" i="0" u="none" strike="noStrike" dirty="0" err="1">
+                <a:solidFill>
+                  <a:srgbClr val="555555"/>
+                </a:solidFill>
+                <a:latin typeface="Noto Sans SC" panose="020B0200000000000000" charset="-122"/>
+                <a:ea typeface="Noto Sans SC" panose="020B0200000000000000" charset="-122"/>
+                <a:cs typeface="Noto Sans SC" panose="020B0200000000000000" charset="-122"/>
+                <a:sym typeface="Noto Sans SC" panose="020B0200000000000000" charset="-122"/>
+              </a:rPr>
+              <a:t>测试验证</a:t>
+            </a:r>
+            <a:endParaRPr lang="en-US" sz="1300" b="0" i="0" u="none" strike="noStrike" dirty="0">
               <a:solidFill>
                 <a:srgbClr val="555555"/>
               </a:solidFill>
@@ -18418,13 +19349,13 @@
           <p:nvPr/>
         </p:nvPicPr>
         <p:blipFill>
-          <a:blip r:embed="rId4">
+          <a:blip r:embed="rId3">
             <a:extLst>
               <a:ext uri="{28A0092B-C50C-407E-A947-70E740481C1C}">
                 <a14:useLocalDpi xmlns:a14="http://schemas.microsoft.com/office/drawing/2010/main" val="0"/>
               </a:ext>
               <a:ext uri="{96DAC541-7B7A-43D3-8B79-37D633B846F1}">
-                <asvg:svgBlip xmlns:asvg="http://schemas.microsoft.com/office/drawing/2016/SVG/main" r:embed="rId5"/>
+                <asvg:svgBlip xmlns:asvg="http://schemas.microsoft.com/office/drawing/2016/SVG/main" r:embed="rId4"/>
               </a:ext>
             </a:extLst>
           </a:blip>
@@ -18712,13 +19643,13 @@
           <p:nvPr/>
         </p:nvPicPr>
         <p:blipFill>
-          <a:blip r:embed="rId6">
+          <a:blip r:embed="rId5">
             <a:extLst>
               <a:ext uri="{28A0092B-C50C-407E-A947-70E740481C1C}">
                 <a14:useLocalDpi xmlns:a14="http://schemas.microsoft.com/office/drawing/2010/main" val="0"/>
               </a:ext>
               <a:ext uri="{96DAC541-7B7A-43D3-8B79-37D633B846F1}">
-                <asvg:svgBlip xmlns:asvg="http://schemas.microsoft.com/office/drawing/2016/SVG/main" r:embed="rId7"/>
+                <asvg:svgBlip xmlns:asvg="http://schemas.microsoft.com/office/drawing/2016/SVG/main" r:embed="rId6"/>
               </a:ext>
             </a:extLst>
           </a:blip>
@@ -18818,7 +19749,7 @@
               <a:defRPr/>
             </a:pPr>
             <a:r>
-              <a:rPr lang="en-US" sz="1400" b="1" i="0" u="none" strike="noStrike">
+              <a:rPr lang="en-US" sz="1400" b="1" i="0" u="none" strike="noStrike" dirty="0" err="1">
                 <a:solidFill>
                   <a:srgbClr val="333333"/>
                 </a:solidFill>
@@ -18827,9 +19758,45 @@
                 <a:cs typeface="Noto Sans SC" panose="020B0200000000000000" charset="-122"/>
                 <a:sym typeface="Noto Sans SC" panose="020B0200000000000000" charset="-122"/>
               </a:rPr>
-              <a:t>聚焦已完成里程碑：</a:t>
-            </a:r>
-            <a:endParaRPr lang="en-US" sz="1100"/>
+              <a:t>已完成</a:t>
+            </a:r>
+            <a:r>
+              <a:rPr lang="zh-CN" altLang="en-US" sz="1400" b="1" i="0" u="none" strike="noStrike" dirty="0">
+                <a:solidFill>
+                  <a:srgbClr val="333333"/>
+                </a:solidFill>
+                <a:latin typeface="Noto Sans SC" panose="020B0200000000000000" charset="-122"/>
+                <a:ea typeface="Noto Sans SC" panose="020B0200000000000000" charset="-122"/>
+                <a:cs typeface="Noto Sans SC" panose="020B0200000000000000" charset="-122"/>
+                <a:sym typeface="Noto Sans SC" panose="020B0200000000000000" charset="-122"/>
+              </a:rPr>
+              <a:t>的</a:t>
+            </a:r>
+            <a:r>
+              <a:rPr lang="en-US" sz="1400" b="1" i="0" u="none" strike="noStrike" dirty="0" err="1">
+                <a:solidFill>
+                  <a:srgbClr val="333333"/>
+                </a:solidFill>
+                <a:latin typeface="Noto Sans SC" panose="020B0200000000000000" charset="-122"/>
+                <a:ea typeface="Noto Sans SC" panose="020B0200000000000000" charset="-122"/>
+                <a:cs typeface="Noto Sans SC" panose="020B0200000000000000" charset="-122"/>
+                <a:sym typeface="Noto Sans SC" panose="020B0200000000000000" charset="-122"/>
+              </a:rPr>
+              <a:t>里程碑</a:t>
+            </a:r>
+            <a:r>
+              <a:rPr lang="en-US" sz="1400" b="1" i="0" u="none" strike="noStrike" dirty="0">
+                <a:solidFill>
+                  <a:srgbClr val="333333"/>
+                </a:solidFill>
+                <a:latin typeface="Noto Sans SC" panose="020B0200000000000000" charset="-122"/>
+                <a:ea typeface="Noto Sans SC" panose="020B0200000000000000" charset="-122"/>
+                <a:cs typeface="Noto Sans SC" panose="020B0200000000000000" charset="-122"/>
+                <a:sym typeface="Noto Sans SC" panose="020B0200000000000000" charset="-122"/>
+              </a:rPr>
+              <a:t>：</a:t>
+            </a:r>
+            <a:endParaRPr lang="en-US" sz="1100" dirty="0"/>
           </a:p>
           <a:p>
             <a:pPr indent="0" algn="l">
@@ -18841,7 +19808,7 @@
               </a:spcBef>
             </a:pPr>
             <a:r>
-              <a:rPr lang="en-US" sz="1400" b="1" i="0" u="none" strike="noStrike">
+              <a:rPr lang="en-US" sz="1400" b="1" i="0" u="none" strike="noStrike" dirty="0">
                 <a:solidFill>
                   <a:srgbClr val="005A9C"/>
                 </a:solidFill>
@@ -18850,9 +19817,21 @@
                 <a:cs typeface="Noto Sans SC" panose="020B0200000000000000" charset="-122"/>
                 <a:sym typeface="Noto Sans SC" panose="020B0200000000000000" charset="-122"/>
               </a:rPr>
-              <a:t>M1 工程搭建与基础框架</a:t>
-            </a:r>
-            <a:endParaRPr lang="en-US" sz="1400" b="1" i="0" u="none" strike="noStrike">
+              <a:t>M1 </a:t>
+            </a:r>
+            <a:r>
+              <a:rPr lang="en-US" sz="1400" b="1" i="0" u="none" strike="noStrike" dirty="0" err="1">
+                <a:solidFill>
+                  <a:srgbClr val="005A9C"/>
+                </a:solidFill>
+                <a:latin typeface="Noto Sans SC" panose="020B0200000000000000" charset="-122"/>
+                <a:ea typeface="Noto Sans SC" panose="020B0200000000000000" charset="-122"/>
+                <a:cs typeface="Noto Sans SC" panose="020B0200000000000000" charset="-122"/>
+                <a:sym typeface="Noto Sans SC" panose="020B0200000000000000" charset="-122"/>
+              </a:rPr>
+              <a:t>工程搭建与基础框架</a:t>
+            </a:r>
+            <a:endParaRPr lang="en-US" sz="1400" b="1" i="0" u="none" strike="noStrike" dirty="0">
               <a:solidFill>
                 <a:srgbClr val="005A9C"/>
               </a:solidFill>
@@ -18869,7 +19848,7 @@
               </a:lnSpc>
             </a:pPr>
             <a:r>
-              <a:rPr lang="en-US" sz="1300" b="0" i="0" u="none" strike="noStrike">
+              <a:rPr lang="en-US" sz="1300" b="0" i="0" u="none" strike="noStrike" dirty="0" err="1">
                 <a:solidFill>
                   <a:srgbClr val="555555"/>
                 </a:solidFill>
@@ -18878,9 +19857,21 @@
                 <a:cs typeface="Noto Sans SC" panose="020B0200000000000000" charset="-122"/>
                 <a:sym typeface="Noto Sans SC" panose="020B0200000000000000" charset="-122"/>
               </a:rPr>
-              <a:t>完成项目初始化、环境配置及模块划分。</a:t>
-            </a:r>
-            <a:endParaRPr lang="en-US" sz="1300" b="0" i="0" u="none" strike="noStrike">
+              <a:t>完成项目初始化、环境配置及模块划分</a:t>
+            </a:r>
+            <a:r>
+              <a:rPr lang="en-US" sz="1300" b="0" i="0" u="none" strike="noStrike" dirty="0">
+                <a:solidFill>
+                  <a:srgbClr val="555555"/>
+                </a:solidFill>
+                <a:latin typeface="Noto Sans SC" panose="020B0200000000000000" charset="-122"/>
+                <a:ea typeface="Noto Sans SC" panose="020B0200000000000000" charset="-122"/>
+                <a:cs typeface="Noto Sans SC" panose="020B0200000000000000" charset="-122"/>
+                <a:sym typeface="Noto Sans SC" panose="020B0200000000000000" charset="-122"/>
+              </a:rPr>
+              <a:t>。</a:t>
+            </a:r>
+            <a:endParaRPr lang="en-US" sz="1300" b="0" i="0" u="none" strike="noStrike" dirty="0">
               <a:solidFill>
                 <a:srgbClr val="555555"/>
               </a:solidFill>
@@ -18900,7 +19891,7 @@
               </a:spcBef>
             </a:pPr>
             <a:r>
-              <a:rPr lang="en-US" sz="1400" b="1" i="0" u="none" strike="noStrike">
+              <a:rPr lang="en-US" sz="1400" b="1" i="0" u="none" strike="noStrike" dirty="0">
                 <a:solidFill>
                   <a:srgbClr val="005A9C"/>
                 </a:solidFill>
@@ -18909,9 +19900,21 @@
                 <a:cs typeface="Noto Sans SC" panose="020B0200000000000000" charset="-122"/>
                 <a:sym typeface="Noto Sans SC" panose="020B0200000000000000" charset="-122"/>
               </a:rPr>
-              <a:t>M2 词法分析器实现</a:t>
-            </a:r>
-            <a:endParaRPr lang="en-US" sz="1400" b="1" i="0" u="none" strike="noStrike">
+              <a:t>M2 </a:t>
+            </a:r>
+            <a:r>
+              <a:rPr lang="en-US" sz="1400" b="1" i="0" u="none" strike="noStrike" dirty="0" err="1">
+                <a:solidFill>
+                  <a:srgbClr val="005A9C"/>
+                </a:solidFill>
+                <a:latin typeface="Noto Sans SC" panose="020B0200000000000000" charset="-122"/>
+                <a:ea typeface="Noto Sans SC" panose="020B0200000000000000" charset="-122"/>
+                <a:cs typeface="Noto Sans SC" panose="020B0200000000000000" charset="-122"/>
+                <a:sym typeface="Noto Sans SC" panose="020B0200000000000000" charset="-122"/>
+              </a:rPr>
+              <a:t>词法分析器实现</a:t>
+            </a:r>
+            <a:endParaRPr lang="en-US" sz="1400" b="1" i="0" u="none" strike="noStrike" dirty="0">
               <a:solidFill>
                 <a:srgbClr val="005A9C"/>
               </a:solidFill>
@@ -18928,7 +19931,7 @@
               </a:lnSpc>
             </a:pPr>
             <a:r>
-              <a:rPr lang="en-US" sz="1300" b="0" i="0" u="none" strike="noStrike">
+              <a:rPr lang="en-US" sz="1300" b="0" i="0" u="none" strike="noStrike" dirty="0" err="1">
                 <a:solidFill>
                   <a:srgbClr val="555555"/>
                 </a:solidFill>
@@ -18937,9 +19940,69 @@
                 <a:cs typeface="Noto Sans SC" panose="020B0200000000000000" charset="-122"/>
                 <a:sym typeface="Noto Sans SC" panose="020B0200000000000000" charset="-122"/>
               </a:rPr>
-              <a:t>完成 Lex 规则编写，实现 Token 识别与输出。</a:t>
-            </a:r>
-            <a:endParaRPr lang="en-US" sz="1300" b="0" i="0" u="none" strike="noStrike">
+              <a:t>完成</a:t>
+            </a:r>
+            <a:r>
+              <a:rPr lang="en-US" sz="1300" b="0" i="0" u="none" strike="noStrike" dirty="0">
+                <a:solidFill>
+                  <a:srgbClr val="555555"/>
+                </a:solidFill>
+                <a:latin typeface="Noto Sans SC" panose="020B0200000000000000" charset="-122"/>
+                <a:ea typeface="Noto Sans SC" panose="020B0200000000000000" charset="-122"/>
+                <a:cs typeface="Noto Sans SC" panose="020B0200000000000000" charset="-122"/>
+                <a:sym typeface="Noto Sans SC" panose="020B0200000000000000" charset="-122"/>
+              </a:rPr>
+              <a:t> Lex </a:t>
+            </a:r>
+            <a:r>
+              <a:rPr lang="en-US" sz="1300" b="0" i="0" u="none" strike="noStrike" dirty="0" err="1">
+                <a:solidFill>
+                  <a:srgbClr val="555555"/>
+                </a:solidFill>
+                <a:latin typeface="Noto Sans SC" panose="020B0200000000000000" charset="-122"/>
+                <a:ea typeface="Noto Sans SC" panose="020B0200000000000000" charset="-122"/>
+                <a:cs typeface="Noto Sans SC" panose="020B0200000000000000" charset="-122"/>
+                <a:sym typeface="Noto Sans SC" panose="020B0200000000000000" charset="-122"/>
+              </a:rPr>
+              <a:t>规则编写，实现</a:t>
+            </a:r>
+            <a:r>
+              <a:rPr lang="en-US" sz="1300" b="0" i="0" u="none" strike="noStrike" dirty="0">
+                <a:solidFill>
+                  <a:srgbClr val="555555"/>
+                </a:solidFill>
+                <a:latin typeface="Noto Sans SC" panose="020B0200000000000000" charset="-122"/>
+                <a:ea typeface="Noto Sans SC" panose="020B0200000000000000" charset="-122"/>
+                <a:cs typeface="Noto Sans SC" panose="020B0200000000000000" charset="-122"/>
+                <a:sym typeface="Noto Sans SC" panose="020B0200000000000000" charset="-122"/>
+              </a:rPr>
+              <a:t> Token </a:t>
+            </a:r>
+            <a:r>
+              <a:rPr lang="en-US" sz="1300" b="0" i="0" u="none" strike="noStrike" dirty="0" err="1">
+                <a:solidFill>
+                  <a:srgbClr val="555555"/>
+                </a:solidFill>
+                <a:latin typeface="Noto Sans SC" panose="020B0200000000000000" charset="-122"/>
+                <a:ea typeface="Noto Sans SC" panose="020B0200000000000000" charset="-122"/>
+                <a:cs typeface="Noto Sans SC" panose="020B0200000000000000" charset="-122"/>
+                <a:sym typeface="Noto Sans SC" panose="020B0200000000000000" charset="-122"/>
+              </a:rPr>
+              <a:t>识别与输出</a:t>
+            </a:r>
+            <a:r>
+              <a:rPr lang="en-US" sz="1300" b="0" i="0" u="none" strike="noStrike" dirty="0">
+                <a:solidFill>
+                  <a:srgbClr val="555555"/>
+                </a:solidFill>
+                <a:latin typeface="Noto Sans SC" panose="020B0200000000000000" charset="-122"/>
+                <a:ea typeface="Noto Sans SC" panose="020B0200000000000000" charset="-122"/>
+                <a:cs typeface="Noto Sans SC" panose="020B0200000000000000" charset="-122"/>
+                <a:sym typeface="Noto Sans SC" panose="020B0200000000000000" charset="-122"/>
+              </a:rPr>
+              <a:t>。</a:t>
+            </a:r>
+            <a:endParaRPr lang="en-US" sz="1300" b="0" i="0" u="none" strike="noStrike" dirty="0">
               <a:solidFill>
                 <a:srgbClr val="555555"/>
               </a:solidFill>
@@ -18986,37 +20049,6 @@
           <a:chExt cx="0" cy="0"/>
         </a:xfrm>
       </p:grpSpPr>
-      <p:pic>
-        <p:nvPicPr>
-          <p:cNvPr id="2" name="Picture 2"/>
-          <p:cNvPicPr>
-            <a:picLocks noChangeAspect="1"/>
-          </p:cNvPicPr>
-          <p:nvPr/>
-        </p:nvPicPr>
-        <p:blipFill>
-          <a:blip r:embed="rId1"/>
-          <a:srcRect/>
-          <a:stretch>
-            <a:fillRect/>
-          </a:stretch>
-        </p:blipFill>
-        <p:spPr>
-          <a:xfrm>
-            <a:off x="0" y="0"/>
-            <a:ext cx="12192000" cy="6858000"/>
-          </a:xfrm>
-          <a:prstGeom prst="rect">
-            <a:avLst/>
-          </a:prstGeom>
-          <a:noFill/>
-          <a:ln w="25400" cap="flat" cmpd="sng">
-            <a:noFill/>
-            <a:prstDash val="solid"/>
-            <a:round/>
-          </a:ln>
-        </p:spPr>
-      </p:pic>
       <p:sp>
         <p:nvSpPr>
           <p:cNvPr id="3" name="AutoShape 3"/>
@@ -19049,7 +20081,7 @@
               <a:defRPr/>
             </a:pPr>
             <a:r>
-              <a:rPr lang="en-US" sz="3200" b="1" i="0" u="none" strike="noStrike">
+              <a:rPr lang="en-US" sz="3200" b="1" i="0" u="none" strike="noStrike" dirty="0" err="1">
                 <a:solidFill>
                   <a:srgbClr val="333333"/>
                 </a:solidFill>
@@ -19060,7 +20092,7 @@
               </a:rPr>
               <a:t>里程碑计划与当前位置</a:t>
             </a:r>
-            <a:endParaRPr lang="en-US" sz="1100"/>
+            <a:endParaRPr lang="en-US" sz="1100" dirty="0"/>
           </a:p>
         </p:txBody>
       </p:sp>
@@ -19114,13 +20146,13 @@
           <p:nvPr/>
         </p:nvPicPr>
         <p:blipFill>
-          <a:blip r:embed="rId2">
+          <a:blip r:embed="rId1">
             <a:extLst>
               <a:ext uri="{28A0092B-C50C-407E-A947-70E740481C1C}">
                 <a14:useLocalDpi xmlns:a14="http://schemas.microsoft.com/office/drawing/2010/main" val="0"/>
               </a:ext>
               <a:ext uri="{96DAC541-7B7A-43D3-8B79-37D633B846F1}">
-                <asvg:svgBlip xmlns:asvg="http://schemas.microsoft.com/office/drawing/2016/SVG/main" r:embed="rId3"/>
+                <asvg:svgBlip xmlns:asvg="http://schemas.microsoft.com/office/drawing/2016/SVG/main" r:embed="rId2"/>
               </a:ext>
             </a:extLst>
           </a:blip>
@@ -19384,13 +20416,13 @@
           <p:nvPr/>
         </p:nvPicPr>
         <p:blipFill>
-          <a:blip r:embed="rId4">
+          <a:blip r:embed="rId3">
             <a:extLst>
               <a:ext uri="{28A0092B-C50C-407E-A947-70E740481C1C}">
                 <a14:useLocalDpi xmlns:a14="http://schemas.microsoft.com/office/drawing/2010/main" val="0"/>
               </a:ext>
               <a:ext uri="{96DAC541-7B7A-43D3-8B79-37D633B846F1}">
-                <asvg:svgBlip xmlns:asvg="http://schemas.microsoft.com/office/drawing/2016/SVG/main" r:embed="rId5"/>
+                <asvg:svgBlip xmlns:asvg="http://schemas.microsoft.com/office/drawing/2016/SVG/main" r:embed="rId4"/>
               </a:ext>
             </a:extLst>
           </a:blip>
@@ -19659,13 +20691,13 @@
           <p:nvPr/>
         </p:nvPicPr>
         <p:blipFill>
-          <a:blip r:embed="rId6">
+          <a:blip r:embed="rId5">
             <a:extLst>
               <a:ext uri="{28A0092B-C50C-407E-A947-70E740481C1C}">
                 <a14:useLocalDpi xmlns:a14="http://schemas.microsoft.com/office/drawing/2010/main" val="0"/>
               </a:ext>
               <a:ext uri="{96DAC541-7B7A-43D3-8B79-37D633B846F1}">
-                <asvg:svgBlip xmlns:asvg="http://schemas.microsoft.com/office/drawing/2016/SVG/main" r:embed="rId7"/>
+                <asvg:svgBlip xmlns:asvg="http://schemas.microsoft.com/office/drawing/2016/SVG/main" r:embed="rId6"/>
               </a:ext>
             </a:extLst>
           </a:blip>
@@ -19926,13 +20958,13 @@
           <p:nvPr/>
         </p:nvPicPr>
         <p:blipFill>
-          <a:blip r:embed="rId8">
+          <a:blip r:embed="rId7">
             <a:extLst>
               <a:ext uri="{28A0092B-C50C-407E-A947-70E740481C1C}">
                 <a14:useLocalDpi xmlns:a14="http://schemas.microsoft.com/office/drawing/2010/main" val="0"/>
               </a:ext>
               <a:ext uri="{96DAC541-7B7A-43D3-8B79-37D633B846F1}">
-                <asvg:svgBlip xmlns:asvg="http://schemas.microsoft.com/office/drawing/2016/SVG/main" r:embed="rId9"/>
+                <asvg:svgBlip xmlns:asvg="http://schemas.microsoft.com/office/drawing/2016/SVG/main" r:embed="rId8"/>
               </a:ext>
             </a:extLst>
           </a:blip>
@@ -20094,13 +21126,13 @@
           <p:nvPr/>
         </p:nvPicPr>
         <p:blipFill>
-          <a:blip r:embed="rId10">
+          <a:blip r:embed="rId9">
             <a:extLst>
               <a:ext uri="{28A0092B-C50C-407E-A947-70E740481C1C}">
                 <a14:useLocalDpi xmlns:a14="http://schemas.microsoft.com/office/drawing/2010/main" val="0"/>
               </a:ext>
               <a:ext uri="{96DAC541-7B7A-43D3-8B79-37D633B846F1}">
-                <asvg:svgBlip xmlns:asvg="http://schemas.microsoft.com/office/drawing/2016/SVG/main" r:embed="rId11"/>
+                <asvg:svgBlip xmlns:asvg="http://schemas.microsoft.com/office/drawing/2016/SVG/main" r:embed="rId10"/>
               </a:ext>
             </a:extLst>
           </a:blip>
@@ -21258,37 +22290,6 @@
           <a:chExt cx="0" cy="0"/>
         </a:xfrm>
       </p:grpSpPr>
-      <p:pic>
-        <p:nvPicPr>
-          <p:cNvPr id="2" name="Picture 2"/>
-          <p:cNvPicPr>
-            <a:picLocks noChangeAspect="1"/>
-          </p:cNvPicPr>
-          <p:nvPr/>
-        </p:nvPicPr>
-        <p:blipFill>
-          <a:blip r:embed="rId1"/>
-          <a:srcRect/>
-          <a:stretch>
-            <a:fillRect/>
-          </a:stretch>
-        </p:blipFill>
-        <p:spPr>
-          <a:xfrm>
-            <a:off x="0" y="0"/>
-            <a:ext cx="12192000" cy="6858000"/>
-          </a:xfrm>
-          <a:prstGeom prst="rect">
-            <a:avLst/>
-          </a:prstGeom>
-          <a:noFill/>
-          <a:ln w="25400" cap="flat" cmpd="sng">
-            <a:noFill/>
-            <a:prstDash val="solid"/>
-            <a:round/>
-          </a:ln>
-        </p:spPr>
-      </p:pic>
       <p:sp>
         <p:nvSpPr>
           <p:cNvPr id="3" name="AutoShape 3"/>
@@ -21426,13 +22427,13 @@
           <p:nvPr/>
         </p:nvPicPr>
         <p:blipFill>
-          <a:blip r:embed="rId2">
+          <a:blip r:embed="rId1">
             <a:extLst>
               <a:ext uri="{28A0092B-C50C-407E-A947-70E740481C1C}">
                 <a14:useLocalDpi xmlns:a14="http://schemas.microsoft.com/office/drawing/2010/main" val="0"/>
               </a:ext>
               <a:ext uri="{96DAC541-7B7A-43D3-8B79-37D633B846F1}">
-                <asvg:svgBlip xmlns:asvg="http://schemas.microsoft.com/office/drawing/2016/SVG/main" r:embed="rId3"/>
+                <asvg:svgBlip xmlns:asvg="http://schemas.microsoft.com/office/drawing/2016/SVG/main" r:embed="rId2"/>
               </a:ext>
             </a:extLst>
           </a:blip>
@@ -21634,13 +22635,13 @@
           <p:nvPr/>
         </p:nvPicPr>
         <p:blipFill>
-          <a:blip r:embed="rId4">
+          <a:blip r:embed="rId3">
             <a:extLst>
               <a:ext uri="{28A0092B-C50C-407E-A947-70E740481C1C}">
                 <a14:useLocalDpi xmlns:a14="http://schemas.microsoft.com/office/drawing/2010/main" val="0"/>
               </a:ext>
               <a:ext uri="{96DAC541-7B7A-43D3-8B79-37D633B846F1}">
-                <asvg:svgBlip xmlns:asvg="http://schemas.microsoft.com/office/drawing/2016/SVG/main" r:embed="rId5"/>
+                <asvg:svgBlip xmlns:asvg="http://schemas.microsoft.com/office/drawing/2016/SVG/main" r:embed="rId4"/>
               </a:ext>
             </a:extLst>
           </a:blip>
@@ -21842,13 +22843,13 @@
           <p:nvPr/>
         </p:nvPicPr>
         <p:blipFill>
-          <a:blip r:embed="rId6">
+          <a:blip r:embed="rId5">
             <a:extLst>
               <a:ext uri="{28A0092B-C50C-407E-A947-70E740481C1C}">
                 <a14:useLocalDpi xmlns:a14="http://schemas.microsoft.com/office/drawing/2010/main" val="0"/>
               </a:ext>
               <a:ext uri="{96DAC541-7B7A-43D3-8B79-37D633B846F1}">
-                <asvg:svgBlip xmlns:asvg="http://schemas.microsoft.com/office/drawing/2016/SVG/main" r:embed="rId7"/>
+                <asvg:svgBlip xmlns:asvg="http://schemas.microsoft.com/office/drawing/2016/SVG/main" r:embed="rId6"/>
               </a:ext>
             </a:extLst>
           </a:blip>
@@ -22050,13 +23051,13 @@
           <p:nvPr/>
         </p:nvPicPr>
         <p:blipFill>
-          <a:blip r:embed="rId8">
+          <a:blip r:embed="rId7">
             <a:extLst>
               <a:ext uri="{28A0092B-C50C-407E-A947-70E740481C1C}">
                 <a14:useLocalDpi xmlns:a14="http://schemas.microsoft.com/office/drawing/2010/main" val="0"/>
               </a:ext>
               <a:ext uri="{96DAC541-7B7A-43D3-8B79-37D633B846F1}">
-                <asvg:svgBlip xmlns:asvg="http://schemas.microsoft.com/office/drawing/2016/SVG/main" r:embed="rId9"/>
+                <asvg:svgBlip xmlns:asvg="http://schemas.microsoft.com/office/drawing/2016/SVG/main" r:embed="rId8"/>
               </a:ext>
             </a:extLst>
           </a:blip>
@@ -22303,37 +23304,6 @@
           <a:chExt cx="0" cy="0"/>
         </a:xfrm>
       </p:grpSpPr>
-      <p:pic>
-        <p:nvPicPr>
-          <p:cNvPr id="2" name="Picture 2"/>
-          <p:cNvPicPr>
-            <a:picLocks noChangeAspect="1"/>
-          </p:cNvPicPr>
-          <p:nvPr/>
-        </p:nvPicPr>
-        <p:blipFill>
-          <a:blip r:embed="rId1"/>
-          <a:srcRect/>
-          <a:stretch>
-            <a:fillRect/>
-          </a:stretch>
-        </p:blipFill>
-        <p:spPr>
-          <a:xfrm>
-            <a:off x="0" y="0"/>
-            <a:ext cx="12192000" cy="6858000"/>
-          </a:xfrm>
-          <a:prstGeom prst="rect">
-            <a:avLst/>
-          </a:prstGeom>
-          <a:noFill/>
-          <a:ln w="25400" cap="flat" cmpd="sng">
-            <a:noFill/>
-            <a:prstDash val="solid"/>
-            <a:round/>
-          </a:ln>
-        </p:spPr>
-      </p:pic>
       <p:sp>
         <p:nvSpPr>
           <p:cNvPr id="3" name="AutoShape 3"/>
@@ -22381,50 +23351,6 @@
           </a:p>
         </p:txBody>
       </p:sp>
-      <p:pic>
-        <p:nvPicPr>
-          <p:cNvPr id="4" name="Picture 4"/>
-          <p:cNvPicPr>
-            <a:picLocks noChangeAspect="1"/>
-          </p:cNvPicPr>
-          <p:nvPr/>
-        </p:nvPicPr>
-        <p:blipFill>
-          <a:blip r:embed="rId2"/>
-          <a:srcRect/>
-          <a:stretch>
-            <a:fillRect/>
-          </a:stretch>
-        </p:blipFill>
-        <p:spPr>
-          <a:xfrm>
-            <a:off x="762000" y="1397000"/>
-            <a:ext cx="2794000" cy="2794000"/>
-          </a:xfrm>
-          <a:prstGeom prst="roundRect">
-            <a:avLst>
-              <a:gd name="adj" fmla="val 4545"/>
-            </a:avLst>
-          </a:prstGeom>
-          <a:noFill/>
-          <a:ln w="12700" cap="flat" cmpd="sng">
-            <a:solidFill>
-              <a:srgbClr val="CCCCCC">
-                <a:alpha val="100000"/>
-              </a:srgbClr>
-            </a:solidFill>
-            <a:prstDash val="solid"/>
-            <a:round/>
-          </a:ln>
-          <a:effectLst>
-            <a:outerShdw blurRad="101600" dist="50800" dir="5400000" algn="tl" rotWithShape="0">
-              <a:srgbClr val="000000">
-                <a:alpha val="10000"/>
-              </a:srgbClr>
-            </a:outerShdw>
-          </a:effectLst>
-        </p:spPr>
-      </p:pic>
       <p:sp>
         <p:nvSpPr>
           <p:cNvPr id="5" name="AutoShape 5"/>
@@ -22433,7 +23359,7 @@
         </p:nvSpPr>
         <p:spPr>
           <a:xfrm>
-            <a:off x="762000" y="4318000"/>
+            <a:off x="762000" y="5752231"/>
             <a:ext cx="2794000" cy="381000"/>
           </a:xfrm>
           <a:prstGeom prst="rect">
@@ -22457,7 +23383,7 @@
               <a:defRPr/>
             </a:pPr>
             <a:r>
-              <a:rPr lang="en-US" sz="1400" b="0" i="0" u="none" strike="noStrike">
+              <a:rPr lang="en-US" sz="1400" b="0" i="0" u="none" strike="noStrike" dirty="0" err="1">
                 <a:solidFill>
                   <a:srgbClr val="666666"/>
                 </a:solidFill>
@@ -22468,7 +23394,7 @@
               </a:rPr>
               <a:t>词法分析核心流程架构</a:t>
             </a:r>
-            <a:endParaRPr lang="en-US" sz="1100"/>
+            <a:endParaRPr lang="en-US" sz="1100" dirty="0"/>
           </a:p>
         </p:txBody>
       </p:sp>
@@ -22476,7 +23402,11 @@
         <p:nvSpPr>
           <p:cNvPr id="6" name="AutoShape 6"/>
           <p:cNvSpPr/>
-          <p:nvPr/>
+          <p:nvPr>
+            <p:custDataLst>
+              <p:tags r:id="rId1"/>
+            </p:custDataLst>
+          </p:nvPr>
         </p:nvSpPr>
         <p:spPr>
           <a:xfrm>
@@ -22526,7 +23456,11 @@
           <p:cNvPicPr>
             <a:picLocks noChangeAspect="1"/>
           </p:cNvPicPr>
-          <p:nvPr/>
+          <p:nvPr>
+            <p:custDataLst>
+              <p:tags r:id="rId2"/>
+            </p:custDataLst>
+          </p:nvPr>
         </p:nvPicPr>
         <p:blipFill>
           <a:blip r:embed="rId3">
@@ -22557,7 +23491,11 @@
         <p:nvSpPr>
           <p:cNvPr id="8" name="AutoShape 8"/>
           <p:cNvSpPr/>
-          <p:nvPr/>
+          <p:nvPr>
+            <p:custDataLst>
+              <p:tags r:id="rId5"/>
+            </p:custDataLst>
+          </p:nvPr>
         </p:nvSpPr>
         <p:spPr>
           <a:xfrm>
@@ -22604,7 +23542,11 @@
         <p:nvSpPr>
           <p:cNvPr id="9" name="AutoShape 9"/>
           <p:cNvSpPr/>
-          <p:nvPr/>
+          <p:nvPr>
+            <p:custDataLst>
+              <p:tags r:id="rId6"/>
+            </p:custDataLst>
+          </p:nvPr>
         </p:nvSpPr>
         <p:spPr>
           <a:xfrm>
@@ -22651,7 +23593,11 @@
         <p:nvSpPr>
           <p:cNvPr id="10" name="AutoShape 10"/>
           <p:cNvSpPr/>
-          <p:nvPr/>
+          <p:nvPr>
+            <p:custDataLst>
+              <p:tags r:id="rId7"/>
+            </p:custDataLst>
+          </p:nvPr>
         </p:nvSpPr>
         <p:spPr>
           <a:xfrm>
@@ -22701,16 +23647,20 @@
           <p:cNvPicPr>
             <a:picLocks noChangeAspect="1"/>
           </p:cNvPicPr>
-          <p:nvPr/>
+          <p:nvPr>
+            <p:custDataLst>
+              <p:tags r:id="rId8"/>
+            </p:custDataLst>
+          </p:nvPr>
         </p:nvPicPr>
         <p:blipFill>
-          <a:blip r:embed="rId5">
+          <a:blip r:embed="rId9">
             <a:extLst>
               <a:ext uri="{28A0092B-C50C-407E-A947-70E740481C1C}">
                 <a14:useLocalDpi xmlns:a14="http://schemas.microsoft.com/office/drawing/2010/main" val="0"/>
               </a:ext>
               <a:ext uri="{96DAC541-7B7A-43D3-8B79-37D633B846F1}">
-                <asvg:svgBlip xmlns:asvg="http://schemas.microsoft.com/office/drawing/2016/SVG/main" r:embed="rId6"/>
+                <asvg:svgBlip xmlns:asvg="http://schemas.microsoft.com/office/drawing/2016/SVG/main" r:embed="rId10"/>
               </a:ext>
             </a:extLst>
           </a:blip>
@@ -22732,7 +23682,11 @@
         <p:nvSpPr>
           <p:cNvPr id="12" name="AutoShape 12"/>
           <p:cNvSpPr/>
-          <p:nvPr/>
+          <p:nvPr>
+            <p:custDataLst>
+              <p:tags r:id="rId11"/>
+            </p:custDataLst>
+          </p:nvPr>
         </p:nvSpPr>
         <p:spPr>
           <a:xfrm>
@@ -22779,7 +23733,11 @@
         <p:nvSpPr>
           <p:cNvPr id="13" name="AutoShape 13"/>
           <p:cNvSpPr/>
-          <p:nvPr/>
+          <p:nvPr>
+            <p:custDataLst>
+              <p:tags r:id="rId12"/>
+            </p:custDataLst>
+          </p:nvPr>
         </p:nvSpPr>
         <p:spPr>
           <a:xfrm>
@@ -22826,7 +23784,11 @@
         <p:nvSpPr>
           <p:cNvPr id="14" name="AutoShape 14"/>
           <p:cNvSpPr/>
-          <p:nvPr/>
+          <p:nvPr>
+            <p:custDataLst>
+              <p:tags r:id="rId13"/>
+            </p:custDataLst>
+          </p:nvPr>
         </p:nvSpPr>
         <p:spPr>
           <a:xfrm>
@@ -22876,16 +23838,20 @@
           <p:cNvPicPr>
             <a:picLocks noChangeAspect="1"/>
           </p:cNvPicPr>
-          <p:nvPr/>
+          <p:nvPr>
+            <p:custDataLst>
+              <p:tags r:id="rId14"/>
+            </p:custDataLst>
+          </p:nvPr>
         </p:nvPicPr>
         <p:blipFill>
-          <a:blip r:embed="rId7">
+          <a:blip r:embed="rId15">
             <a:extLst>
               <a:ext uri="{28A0092B-C50C-407E-A947-70E740481C1C}">
                 <a14:useLocalDpi xmlns:a14="http://schemas.microsoft.com/office/drawing/2010/main" val="0"/>
               </a:ext>
               <a:ext uri="{96DAC541-7B7A-43D3-8B79-37D633B846F1}">
-                <asvg:svgBlip xmlns:asvg="http://schemas.microsoft.com/office/drawing/2016/SVG/main" r:embed="rId8"/>
+                <asvg:svgBlip xmlns:asvg="http://schemas.microsoft.com/office/drawing/2016/SVG/main" r:embed="rId16"/>
               </a:ext>
             </a:extLst>
           </a:blip>
@@ -22907,7 +23873,11 @@
         <p:nvSpPr>
           <p:cNvPr id="16" name="AutoShape 16"/>
           <p:cNvSpPr/>
-          <p:nvPr/>
+          <p:nvPr>
+            <p:custDataLst>
+              <p:tags r:id="rId17"/>
+            </p:custDataLst>
+          </p:nvPr>
         </p:nvSpPr>
         <p:spPr>
           <a:xfrm>
@@ -22954,7 +23924,11 @@
         <p:nvSpPr>
           <p:cNvPr id="17" name="AutoShape 17"/>
           <p:cNvSpPr/>
-          <p:nvPr/>
+          <p:nvPr>
+            <p:custDataLst>
+              <p:tags r:id="rId18"/>
+            </p:custDataLst>
+          </p:nvPr>
         </p:nvSpPr>
         <p:spPr>
           <a:xfrm>
@@ -23001,7 +23975,11 @@
         <p:nvSpPr>
           <p:cNvPr id="18" name="AutoShape 18"/>
           <p:cNvSpPr/>
-          <p:nvPr/>
+          <p:nvPr>
+            <p:custDataLst>
+              <p:tags r:id="rId19"/>
+            </p:custDataLst>
+          </p:nvPr>
         </p:nvSpPr>
         <p:spPr>
           <a:xfrm>
@@ -23051,16 +24029,20 @@
           <p:cNvPicPr>
             <a:picLocks noChangeAspect="1"/>
           </p:cNvPicPr>
-          <p:nvPr/>
+          <p:nvPr>
+            <p:custDataLst>
+              <p:tags r:id="rId20"/>
+            </p:custDataLst>
+          </p:nvPr>
         </p:nvPicPr>
         <p:blipFill>
-          <a:blip r:embed="rId9">
+          <a:blip r:embed="rId21">
             <a:extLst>
               <a:ext uri="{28A0092B-C50C-407E-A947-70E740481C1C}">
                 <a14:useLocalDpi xmlns:a14="http://schemas.microsoft.com/office/drawing/2010/main" val="0"/>
               </a:ext>
               <a:ext uri="{96DAC541-7B7A-43D3-8B79-37D633B846F1}">
-                <asvg:svgBlip xmlns:asvg="http://schemas.microsoft.com/office/drawing/2016/SVG/main" r:embed="rId10"/>
+                <asvg:svgBlip xmlns:asvg="http://schemas.microsoft.com/office/drawing/2016/SVG/main" r:embed="rId22"/>
               </a:ext>
             </a:extLst>
           </a:blip>
@@ -23082,7 +24064,11 @@
         <p:nvSpPr>
           <p:cNvPr id="20" name="AutoShape 20"/>
           <p:cNvSpPr/>
-          <p:nvPr/>
+          <p:nvPr>
+            <p:custDataLst>
+              <p:tags r:id="rId23"/>
+            </p:custDataLst>
+          </p:nvPr>
         </p:nvSpPr>
         <p:spPr>
           <a:xfrm>
@@ -23129,7 +24115,11 @@
         <p:nvSpPr>
           <p:cNvPr id="21" name="AutoShape 21"/>
           <p:cNvSpPr/>
-          <p:nvPr/>
+          <p:nvPr>
+            <p:custDataLst>
+              <p:tags r:id="rId24"/>
+            </p:custDataLst>
+          </p:nvPr>
         </p:nvSpPr>
         <p:spPr>
           <a:xfrm>
@@ -23169,6 +24159,76 @@
               <a:t>关键字/标识符大小写不敏感；支持整数、实数、字符常量；精准识别 :=、..、&lt;&gt; 等复合符号。</a:t>
             </a:r>
             <a:endParaRPr lang="en-US" sz="1100"/>
+          </a:p>
+        </p:txBody>
+      </p:sp>
+      <p:pic>
+        <p:nvPicPr>
+          <p:cNvPr id="23" name="图片 22"/>
+          <p:cNvPicPr>
+            <a:picLocks noChangeAspect="1"/>
+          </p:cNvPicPr>
+          <p:nvPr/>
+        </p:nvPicPr>
+        <p:blipFill>
+          <a:blip r:embed="rId25"/>
+          <a:stretch>
+            <a:fillRect/>
+          </a:stretch>
+        </p:blipFill>
+        <p:spPr>
+          <a:xfrm>
+            <a:off x="937055" y="1504669"/>
+            <a:ext cx="2443889" cy="4178862"/>
+          </a:xfrm>
+          <a:prstGeom prst="rect">
+            <a:avLst/>
+          </a:prstGeom>
+        </p:spPr>
+      </p:pic>
+      <p:sp>
+        <p:nvSpPr>
+          <p:cNvPr id="24" name="矩形 23"/>
+          <p:cNvSpPr/>
+          <p:nvPr/>
+        </p:nvSpPr>
+        <p:spPr>
+          <a:xfrm>
+            <a:off x="2774950" y="1397000"/>
+            <a:ext cx="781050" cy="736600"/>
+          </a:xfrm>
+          <a:prstGeom prst="rect">
+            <a:avLst/>
+          </a:prstGeom>
+          <a:solidFill>
+            <a:schemeClr val="bg1"/>
+          </a:solidFill>
+          <a:ln>
+            <a:noFill/>
+          </a:ln>
+        </p:spPr>
+        <p:style>
+          <a:lnRef idx="2">
+            <a:schemeClr val="accent1">
+              <a:shade val="15000"/>
+            </a:schemeClr>
+          </a:lnRef>
+          <a:fillRef idx="1">
+            <a:schemeClr val="accent1"/>
+          </a:fillRef>
+          <a:effectRef idx="0">
+            <a:schemeClr val="accent1"/>
+          </a:effectRef>
+          <a:fontRef idx="minor">
+            <a:schemeClr val="lt1"/>
+          </a:fontRef>
+        </p:style>
+        <p:txBody>
+          <a:bodyPr rtlCol="0" anchor="ctr"/>
+          <a:lstStyle/>
+          <a:p>
+            <a:pPr algn="ctr"/>
+            <a:endParaRPr lang="zh-CN" altLang="en-US" dirty="0"/>
           </a:p>
         </p:txBody>
       </p:sp>
@@ -23207,37 +24267,6 @@
           <a:chExt cx="0" cy="0"/>
         </a:xfrm>
       </p:grpSpPr>
-      <p:pic>
-        <p:nvPicPr>
-          <p:cNvPr id="2" name="Picture 2"/>
-          <p:cNvPicPr>
-            <a:picLocks noChangeAspect="1"/>
-          </p:cNvPicPr>
-          <p:nvPr/>
-        </p:nvPicPr>
-        <p:blipFill>
-          <a:blip r:embed="rId1"/>
-          <a:srcRect/>
-          <a:stretch>
-            <a:fillRect/>
-          </a:stretch>
-        </p:blipFill>
-        <p:spPr>
-          <a:xfrm>
-            <a:off x="0" y="0"/>
-            <a:ext cx="12192000" cy="6858000"/>
-          </a:xfrm>
-          <a:prstGeom prst="rect">
-            <a:avLst/>
-          </a:prstGeom>
-          <a:noFill/>
-          <a:ln w="25400" cap="flat" cmpd="sng">
-            <a:noFill/>
-            <a:prstDash val="solid"/>
-            <a:round/>
-          </a:ln>
-        </p:spPr>
-      </p:pic>
       <p:sp>
         <p:nvSpPr>
           <p:cNvPr id="3" name="AutoShape 3"/>
@@ -23279,7 +24308,7 @@
                 <a:cs typeface="Noto Sans SC" panose="020B0200000000000000" charset="-122"/>
                 <a:sym typeface="Noto Sans SC" panose="020B0200000000000000" charset="-122"/>
               </a:rPr>
-              <a:t>M2 冻结规则与错误码映射</a:t>
+              <a:t>M2 错误码映射</a:t>
             </a:r>
             <a:endParaRPr lang="en-US" sz="1100"/>
           </a:p>
@@ -23348,7 +24377,7 @@
               <a:tr h="508000">
                 <a:tc>
                   <a:txBody>
-                    <a:bodyPr rtlCol="0"/>
+                    <a:bodyPr/>
                     <a:lstStyle/>
                     <a:p>
                       <a:pPr indent="0" algn="ctr">
@@ -23372,7 +24401,7 @@
                       <a:endParaRPr lang="en-US" sz="1100"/>
                     </a:p>
                   </a:txBody>
-                  <a:tcPr marL="101600" marR="101600" marT="101600" marB="101600" anchor="t" anchorCtr="0">
+                  <a:tcPr marL="101600" marR="101600" marT="101600" marB="101600">
                     <a:lnL>
                       <a:noFill/>
                     </a:lnL>
@@ -23394,7 +24423,7 @@
                 </a:tc>
                 <a:tc>
                   <a:txBody>
-                    <a:bodyPr rtlCol="0"/>
+                    <a:bodyPr/>
                     <a:lstStyle/>
                     <a:p>
                       <a:pPr indent="0" algn="ctr">
@@ -23418,7 +24447,7 @@
                       <a:endParaRPr lang="en-US" sz="1100"/>
                     </a:p>
                   </a:txBody>
-                  <a:tcPr marL="101600" marR="101600" marT="101600" marB="101600" anchor="t" anchorCtr="0">
+                  <a:tcPr marL="101600" marR="101600" marT="101600" marB="101600">
                     <a:lnL>
                       <a:noFill/>
                     </a:lnL>
@@ -23440,7 +24469,7 @@
                 </a:tc>
                 <a:tc>
                   <a:txBody>
-                    <a:bodyPr rtlCol="0"/>
+                    <a:bodyPr/>
                     <a:lstStyle/>
                     <a:p>
                       <a:pPr indent="0" algn="ctr">
@@ -23464,7 +24493,7 @@
                       <a:endParaRPr lang="en-US" sz="1100"/>
                     </a:p>
                   </a:txBody>
-                  <a:tcPr marL="101600" marR="101600" marT="101600" marB="101600" anchor="t" anchorCtr="0">
+                  <a:tcPr marL="101600" marR="101600" marT="101600" marB="101600">
                     <a:lnL>
                       <a:noFill/>
                     </a:lnL>
@@ -23488,7 +24517,7 @@
               <a:tr h="457200">
                 <a:tc>
                   <a:txBody>
-                    <a:bodyPr rtlCol="0"/>
+                    <a:bodyPr/>
                     <a:lstStyle/>
                     <a:p>
                       <a:pPr marL="127000" indent="0" algn="l">
@@ -23512,7 +24541,7 @@
                       <a:endParaRPr lang="en-US" sz="1100"/>
                     </a:p>
                   </a:txBody>
-                  <a:tcPr marL="101600" marR="101600" marT="101600" marB="101600" anchor="t" anchorCtr="0">
+                  <a:tcPr marL="101600" marR="101600" marT="101600" marB="101600">
                     <a:lnL>
                       <a:noFill/>
                     </a:lnL>
@@ -23534,7 +24563,7 @@
                 </a:tc>
                 <a:tc>
                   <a:txBody>
-                    <a:bodyPr rtlCol="0"/>
+                    <a:bodyPr/>
                     <a:lstStyle/>
                     <a:p>
                       <a:pPr marL="127000" indent="0" algn="l">
@@ -23558,7 +24587,7 @@
                       <a:endParaRPr lang="en-US" sz="1100"/>
                     </a:p>
                   </a:txBody>
-                  <a:tcPr marL="101600" marR="101600" marT="101600" marB="101600" anchor="t" anchorCtr="0">
+                  <a:tcPr marL="101600" marR="101600" marT="101600" marB="101600">
                     <a:lnL>
                       <a:noFill/>
                     </a:lnL>
@@ -23580,7 +24609,7 @@
                 </a:tc>
                 <a:tc>
                   <a:txBody>
-                    <a:bodyPr rtlCol="0"/>
+                    <a:bodyPr/>
                     <a:lstStyle/>
                     <a:p>
                       <a:pPr indent="0" algn="ctr">
@@ -23604,7 +24633,7 @@
                       <a:endParaRPr lang="en-US" sz="1100"/>
                     </a:p>
                   </a:txBody>
-                  <a:tcPr marL="101600" marR="101600" marT="101600" marB="101600" anchor="t" anchorCtr="0">
+                  <a:tcPr marL="101600" marR="101600" marT="101600" marB="101600">
                     <a:lnL>
                       <a:noFill/>
                     </a:lnL>
@@ -23628,7 +24657,7 @@
               <a:tr h="457200">
                 <a:tc>
                   <a:txBody>
-                    <a:bodyPr rtlCol="0"/>
+                    <a:bodyPr/>
                     <a:lstStyle/>
                     <a:p>
                       <a:pPr marL="127000" indent="0" algn="l">
@@ -23652,7 +24681,7 @@
                       <a:endParaRPr lang="en-US" sz="1100"/>
                     </a:p>
                   </a:txBody>
-                  <a:tcPr marL="101600" marR="101600" marT="101600" marB="101600" anchor="t" anchorCtr="0">
+                  <a:tcPr marL="101600" marR="101600" marT="101600" marB="101600">
                     <a:lnL>
                       <a:noFill/>
                     </a:lnL>
@@ -23674,7 +24703,7 @@
                 </a:tc>
                 <a:tc>
                   <a:txBody>
-                    <a:bodyPr rtlCol="0"/>
+                    <a:bodyPr/>
                     <a:lstStyle/>
                     <a:p>
                       <a:pPr marL="127000" indent="0" algn="l">
@@ -23698,7 +24727,7 @@
                       <a:endParaRPr lang="en-US" sz="1100"/>
                     </a:p>
                   </a:txBody>
-                  <a:tcPr marL="101600" marR="101600" marT="101600" marB="101600" anchor="t" anchorCtr="0">
+                  <a:tcPr marL="101600" marR="101600" marT="101600" marB="101600">
                     <a:lnL>
                       <a:noFill/>
                     </a:lnL>
@@ -23720,7 +24749,7 @@
                 </a:tc>
                 <a:tc>
                   <a:txBody>
-                    <a:bodyPr rtlCol="0"/>
+                    <a:bodyPr/>
                     <a:lstStyle/>
                     <a:p>
                       <a:pPr indent="0" algn="ctr">
@@ -23744,7 +24773,7 @@
                       <a:endParaRPr lang="en-US" sz="1100"/>
                     </a:p>
                   </a:txBody>
-                  <a:tcPr marL="101600" marR="101600" marT="101600" marB="101600" anchor="t" anchorCtr="0">
+                  <a:tcPr marL="101600" marR="101600" marT="101600" marB="101600">
                     <a:lnL>
                       <a:noFill/>
                     </a:lnL>
@@ -23768,7 +24797,7 @@
               <a:tr h="457200">
                 <a:tc>
                   <a:txBody>
-                    <a:bodyPr rtlCol="0"/>
+                    <a:bodyPr/>
                     <a:lstStyle/>
                     <a:p>
                       <a:pPr marL="127000" indent="0" algn="l">
@@ -23792,7 +24821,7 @@
                       <a:endParaRPr lang="en-US" sz="1100"/>
                     </a:p>
                   </a:txBody>
-                  <a:tcPr marL="101600" marR="101600" marT="101600" marB="101600" anchor="t" anchorCtr="0">
+                  <a:tcPr marL="101600" marR="101600" marT="101600" marB="101600">
                     <a:lnL>
                       <a:noFill/>
                     </a:lnL>
@@ -23814,7 +24843,7 @@
                 </a:tc>
                 <a:tc>
                   <a:txBody>
-                    <a:bodyPr rtlCol="0"/>
+                    <a:bodyPr/>
                     <a:lstStyle/>
                     <a:p>
                       <a:pPr marL="127000" indent="0" algn="l">
@@ -23838,7 +24867,7 @@
                       <a:endParaRPr lang="en-US" sz="1100"/>
                     </a:p>
                   </a:txBody>
-                  <a:tcPr marL="101600" marR="101600" marT="101600" marB="101600" anchor="t" anchorCtr="0">
+                  <a:tcPr marL="101600" marR="101600" marT="101600" marB="101600">
                     <a:lnL>
                       <a:noFill/>
                     </a:lnL>
@@ -23860,7 +24889,7 @@
                 </a:tc>
                 <a:tc>
                   <a:txBody>
-                    <a:bodyPr rtlCol="0"/>
+                    <a:bodyPr/>
                     <a:lstStyle/>
                     <a:p>
                       <a:pPr indent="0" algn="ctr">
@@ -23884,7 +24913,7 @@
                       <a:endParaRPr lang="en-US" sz="1100"/>
                     </a:p>
                   </a:txBody>
-                  <a:tcPr marL="101600" marR="101600" marT="101600" marB="101600" anchor="t" anchorCtr="0">
+                  <a:tcPr marL="101600" marR="101600" marT="101600" marB="101600">
                     <a:lnL>
                       <a:noFill/>
                     </a:lnL>
@@ -23908,7 +24937,7 @@
               <a:tr h="457200">
                 <a:tc>
                   <a:txBody>
-                    <a:bodyPr rtlCol="0"/>
+                    <a:bodyPr/>
                     <a:lstStyle/>
                     <a:p>
                       <a:pPr marL="127000" indent="0" algn="l">
@@ -23932,7 +24961,7 @@
                       <a:endParaRPr lang="en-US" sz="1100"/>
                     </a:p>
                   </a:txBody>
-                  <a:tcPr marL="101600" marR="101600" marT="101600" marB="101600" anchor="t" anchorCtr="0">
+                  <a:tcPr marL="101600" marR="101600" marT="101600" marB="101600">
                     <a:lnL>
                       <a:noFill/>
                     </a:lnL>
@@ -23954,7 +24983,7 @@
                 </a:tc>
                 <a:tc>
                   <a:txBody>
-                    <a:bodyPr rtlCol="0"/>
+                    <a:bodyPr/>
                     <a:lstStyle/>
                     <a:p>
                       <a:pPr marL="127000" indent="0" algn="l">
@@ -23978,7 +25007,7 @@
                       <a:endParaRPr lang="en-US" sz="1100"/>
                     </a:p>
                   </a:txBody>
-                  <a:tcPr marL="101600" marR="101600" marT="101600" marB="101600" anchor="t" anchorCtr="0">
+                  <a:tcPr marL="101600" marR="101600" marT="101600" marB="101600">
                     <a:lnL>
                       <a:noFill/>
                     </a:lnL>
@@ -24000,7 +25029,7 @@
                 </a:tc>
                 <a:tc>
                   <a:txBody>
-                    <a:bodyPr rtlCol="0"/>
+                    <a:bodyPr/>
                     <a:lstStyle/>
                     <a:p>
                       <a:pPr indent="0" algn="ctr">
@@ -24024,7 +25053,7 @@
                       <a:endParaRPr lang="en-US" sz="1100"/>
                     </a:p>
                   </a:txBody>
-                  <a:tcPr marL="101600" marR="101600" marT="101600" marB="101600" anchor="t" anchorCtr="0">
+                  <a:tcPr marL="101600" marR="101600" marT="101600" marB="101600">
                     <a:lnL>
                       <a:noFill/>
                     </a:lnL>
@@ -24048,7 +25077,7 @@
               <a:tr h="457200">
                 <a:tc>
                   <a:txBody>
-                    <a:bodyPr rtlCol="0"/>
+                    <a:bodyPr/>
                     <a:lstStyle/>
                     <a:p>
                       <a:pPr marL="127000" indent="0" algn="l">
@@ -24072,7 +25101,7 @@
                       <a:endParaRPr lang="en-US" sz="1100"/>
                     </a:p>
                   </a:txBody>
-                  <a:tcPr marL="101600" marR="101600" marT="101600" marB="101600" anchor="t" anchorCtr="0">
+                  <a:tcPr marL="101600" marR="101600" marT="101600" marB="101600">
                     <a:lnL>
                       <a:noFill/>
                     </a:lnL>
@@ -24094,7 +25123,7 @@
                 </a:tc>
                 <a:tc>
                   <a:txBody>
-                    <a:bodyPr rtlCol="0"/>
+                    <a:bodyPr/>
                     <a:lstStyle/>
                     <a:p>
                       <a:pPr marL="127000" indent="0" algn="l">
@@ -24118,7 +25147,7 @@
                       <a:endParaRPr lang="en-US" sz="1100"/>
                     </a:p>
                   </a:txBody>
-                  <a:tcPr marL="101600" marR="101600" marT="101600" marB="101600" anchor="t" anchorCtr="0">
+                  <a:tcPr marL="101600" marR="101600" marT="101600" marB="101600">
                     <a:lnL>
                       <a:noFill/>
                     </a:lnL>
@@ -24140,7 +25169,7 @@
                 </a:tc>
                 <a:tc>
                   <a:txBody>
-                    <a:bodyPr rtlCol="0"/>
+                    <a:bodyPr/>
                     <a:lstStyle/>
                     <a:p>
                       <a:pPr indent="0" algn="ctr">
@@ -24164,7 +25193,7 @@
                       <a:endParaRPr lang="en-US" sz="1100"/>
                     </a:p>
                   </a:txBody>
-                  <a:tcPr marL="101600" marR="101600" marT="101600" marB="101600" anchor="t" anchorCtr="0">
+                  <a:tcPr marL="101600" marR="101600" marT="101600" marB="101600">
                     <a:lnL>
                       <a:noFill/>
                     </a:lnL>
@@ -24239,13 +25268,13 @@
           <p:nvPr/>
         </p:nvPicPr>
         <p:blipFill>
-          <a:blip r:embed="rId2">
+          <a:blip r:embed="rId1">
             <a:extLst>
               <a:ext uri="{28A0092B-C50C-407E-A947-70E740481C1C}">
                 <a14:useLocalDpi xmlns:a14="http://schemas.microsoft.com/office/drawing/2010/main" val="0"/>
               </a:ext>
               <a:ext uri="{96DAC541-7B7A-43D3-8B79-37D633B846F1}">
-                <asvg:svgBlip xmlns:asvg="http://schemas.microsoft.com/office/drawing/2016/SVG/main" r:embed="rId3"/>
+                <asvg:svgBlip xmlns:asvg="http://schemas.microsoft.com/office/drawing/2016/SVG/main" r:embed="rId2"/>
               </a:ext>
             </a:extLst>
           </a:blip>
@@ -24421,74 +25450,6 @@
           <a:chExt cx="0" cy="0"/>
         </a:xfrm>
       </p:grpSpPr>
-      <p:pic>
-        <p:nvPicPr>
-          <p:cNvPr id="2" name="Picture 2"/>
-          <p:cNvPicPr>
-            <a:picLocks noChangeAspect="1"/>
-          </p:cNvPicPr>
-          <p:nvPr/>
-        </p:nvPicPr>
-        <p:blipFill>
-          <a:blip r:embed="rId1"/>
-          <a:srcRect/>
-          <a:stretch>
-            <a:fillRect/>
-          </a:stretch>
-        </p:blipFill>
-        <p:spPr>
-          <a:xfrm>
-            <a:off x="0" y="0"/>
-            <a:ext cx="12192000" cy="6858000"/>
-          </a:xfrm>
-          <a:prstGeom prst="rect">
-            <a:avLst/>
-          </a:prstGeom>
-          <a:noFill/>
-          <a:ln w="25400" cap="flat" cmpd="sng">
-            <a:noFill/>
-            <a:prstDash val="solid"/>
-            <a:round/>
-          </a:ln>
-        </p:spPr>
-      </p:pic>
-      <p:sp>
-        <p:nvSpPr>
-          <p:cNvPr id="3" name="AutoShape 3"/>
-          <p:cNvSpPr/>
-          <p:nvPr/>
-        </p:nvSpPr>
-        <p:spPr>
-          <a:xfrm>
-            <a:off x="0" y="0"/>
-            <a:ext cx="12192000" cy="6858000"/>
-          </a:xfrm>
-          <a:prstGeom prst="roundRect">
-            <a:avLst>
-              <a:gd name="adj" fmla="val 0"/>
-            </a:avLst>
-          </a:prstGeom>
-          <a:solidFill>
-            <a:srgbClr val="FFFFFF">
-              <a:alpha val="85000"/>
-            </a:srgbClr>
-          </a:solidFill>
-          <a:ln w="25400" cap="flat" cmpd="sng">
-            <a:noFill/>
-            <a:prstDash val="solid"/>
-            <a:round/>
-          </a:ln>
-        </p:spPr>
-        <p:txBody>
-          <a:bodyPr vert="horz" wrap="square" lIns="63500" tIns="63500" rIns="63500" bIns="63500" rtlCol="0" anchor="ctr"/>
-          <a:lstStyle/>
-          <a:p>
-            <a:pPr algn="ctr">
-              <a:defRPr/>
-            </a:pPr>
-          </a:p>
-        </p:txBody>
-      </p:sp>
       <p:sp>
         <p:nvSpPr>
           <p:cNvPr id="4" name="AutoShape 4"/>
@@ -24521,7 +25482,7 @@
               <a:defRPr/>
             </a:pPr>
             <a:r>
-              <a:rPr lang="en-US" sz="3200" b="1" i="0" u="none" strike="noStrike">
+              <a:rPr lang="en-US" sz="3200" b="1" i="0" u="none" strike="noStrike" dirty="0">
                 <a:solidFill>
                   <a:srgbClr val="333333"/>
                 </a:solidFill>
@@ -24530,100 +25491,33 @@
                 <a:cs typeface="Noto Sans SC" panose="020B0200000000000000" charset="-122"/>
                 <a:sym typeface="Noto Sans SC" panose="020B0200000000000000" charset="-122"/>
               </a:rPr>
-              <a:t>M2 测试设计（自动化+样例）</a:t>
-            </a:r>
-            <a:endParaRPr lang="en-US" sz="1100"/>
-          </a:p>
-        </p:txBody>
-      </p:sp>
-      <p:pic>
-        <p:nvPicPr>
-          <p:cNvPr id="5" name="Picture 5"/>
-          <p:cNvPicPr>
-            <a:picLocks noChangeAspect="1"/>
-          </p:cNvPicPr>
-          <p:nvPr/>
-        </p:nvPicPr>
-        <p:blipFill>
-          <a:blip r:embed="rId2"/>
-          <a:srcRect/>
-          <a:stretch>
-            <a:fillRect/>
-          </a:stretch>
-        </p:blipFill>
-        <p:spPr>
-          <a:xfrm>
-            <a:off x="762000" y="1397000"/>
-            <a:ext cx="2794000" cy="2794000"/>
-          </a:xfrm>
-          <a:prstGeom prst="roundRect">
-            <a:avLst>
-              <a:gd name="adj" fmla="val 4545"/>
-            </a:avLst>
-          </a:prstGeom>
-          <a:noFill/>
-          <a:ln w="12700" cap="flat" cmpd="sng">
-            <a:solidFill>
-              <a:srgbClr val="CCCCCC">
-                <a:alpha val="100000"/>
-              </a:srgbClr>
-            </a:solidFill>
-            <a:prstDash val="solid"/>
-            <a:round/>
-          </a:ln>
-          <a:effectLst>
-            <a:outerShdw blurRad="101600" dist="50800" dir="5400000" algn="tl" rotWithShape="0">
-              <a:srgbClr val="000000">
-                <a:alpha val="10000"/>
-              </a:srgbClr>
-            </a:outerShdw>
-          </a:effectLst>
-        </p:spPr>
-      </p:pic>
-      <p:sp>
-        <p:nvSpPr>
-          <p:cNvPr id="6" name="AutoShape 6"/>
-          <p:cNvSpPr/>
-          <p:nvPr/>
-        </p:nvSpPr>
-        <p:spPr>
-          <a:xfrm>
-            <a:off x="762000" y="4318000"/>
-            <a:ext cx="2794000" cy="381000"/>
-          </a:xfrm>
-          <a:prstGeom prst="rect">
-            <a:avLst/>
-          </a:prstGeom>
-          <a:noFill/>
-          <a:ln w="12700" cap="flat" cmpd="sng">
-            <a:noFill/>
-            <a:prstDash val="solid"/>
-            <a:round/>
-          </a:ln>
-        </p:spPr>
-        <p:txBody>
-          <a:bodyPr vert="horz" wrap="square" lIns="0" tIns="0" rIns="0" bIns="0" rtlCol="0" anchor="ctr" anchorCtr="0"/>
-          <a:lstStyle/>
-          <a:p>
-            <a:pPr indent="0" algn="ctr">
-              <a:lnSpc>
-                <a:spcPct val="125000"/>
-              </a:lnSpc>
-              <a:defRPr/>
-            </a:pPr>
-            <a:r>
-              <a:rPr lang="en-US" sz="1400" b="0" i="0" u="none" strike="noStrike">
-                <a:solidFill>
-                  <a:srgbClr val="666666"/>
+              <a:t>M2 </a:t>
+            </a:r>
+            <a:r>
+              <a:rPr lang="en-US" sz="3200" b="1" i="0" u="none" strike="noStrike" dirty="0" err="1">
+                <a:solidFill>
+                  <a:srgbClr val="333333"/>
                 </a:solidFill>
                 <a:latin typeface="Noto Sans SC" panose="020B0200000000000000" charset="-122"/>
                 <a:ea typeface="Noto Sans SC" panose="020B0200000000000000" charset="-122"/>
                 <a:cs typeface="Noto Sans SC" panose="020B0200000000000000" charset="-122"/>
                 <a:sym typeface="Noto Sans SC" panose="020B0200000000000000" charset="-122"/>
               </a:rPr>
-              <a:t>图1：测试覆盖矩阵示意</a:t>
-            </a:r>
-            <a:endParaRPr lang="en-US" sz="1100"/>
+              <a:t>测试设计（自动化+样例</a:t>
+            </a:r>
+            <a:r>
+              <a:rPr lang="en-US" sz="3200" b="1" i="0" u="none" strike="noStrike" dirty="0">
+                <a:solidFill>
+                  <a:srgbClr val="333333"/>
+                </a:solidFill>
+                <a:latin typeface="Noto Sans SC" panose="020B0200000000000000" charset="-122"/>
+                <a:ea typeface="Noto Sans SC" panose="020B0200000000000000" charset="-122"/>
+                <a:cs typeface="Noto Sans SC" panose="020B0200000000000000" charset="-122"/>
+                <a:sym typeface="Noto Sans SC" panose="020B0200000000000000" charset="-122"/>
+              </a:rPr>
+              <a:t>）</a:t>
+            </a:r>
+            <a:endParaRPr lang="en-US" sz="1100" dirty="0"/>
           </a:p>
         </p:txBody>
       </p:sp>
@@ -24635,7 +25529,7 @@
         </p:nvSpPr>
         <p:spPr>
           <a:xfrm>
-            <a:off x="3937000" y="1397000"/>
+            <a:off x="2301240" y="1592580"/>
             <a:ext cx="7112000" cy="1143000"/>
           </a:xfrm>
           <a:prstGeom prst="roundRect">
@@ -24684,13 +25578,13 @@
           <p:nvPr/>
         </p:nvPicPr>
         <p:blipFill>
-          <a:blip r:embed="rId3">
+          <a:blip r:embed="rId1">
             <a:extLst>
               <a:ext uri="{28A0092B-C50C-407E-A947-70E740481C1C}">
                 <a14:useLocalDpi xmlns:a14="http://schemas.microsoft.com/office/drawing/2010/main" val="0"/>
               </a:ext>
               <a:ext uri="{96DAC541-7B7A-43D3-8B79-37D633B846F1}">
-                <asvg:svgBlip xmlns:asvg="http://schemas.microsoft.com/office/drawing/2016/SVG/main" r:embed="rId4"/>
+                <asvg:svgBlip xmlns:asvg="http://schemas.microsoft.com/office/drawing/2016/SVG/main" r:embed="rId2"/>
               </a:ext>
             </a:extLst>
           </a:blip>
@@ -24700,7 +25594,7 @@
         </p:blipFill>
         <p:spPr>
           <a:xfrm>
-            <a:off x="4191000" y="1587500"/>
+            <a:off x="2555240" y="1719580"/>
             <a:ext cx="406400" cy="406400"/>
           </a:xfrm>
           <a:prstGeom prst="rect">
@@ -24716,7 +25610,7 @@
         </p:nvSpPr>
         <p:spPr>
           <a:xfrm>
-            <a:off x="4699000" y="1549400"/>
+            <a:off x="3063240" y="1681480"/>
             <a:ext cx="6096000" cy="330200"/>
           </a:xfrm>
           <a:prstGeom prst="rect">
@@ -24763,7 +25657,7 @@
         </p:nvSpPr>
         <p:spPr>
           <a:xfrm>
-            <a:off x="4699000" y="1930400"/>
+            <a:off x="3063240" y="2062480"/>
             <a:ext cx="6096000" cy="508000"/>
           </a:xfrm>
           <a:prstGeom prst="rect">
@@ -24787,7 +25681,7 @@
               <a:defRPr/>
             </a:pPr>
             <a:r>
-              <a:rPr lang="en-US" sz="1400" b="0" i="0" u="none" strike="noStrike">
+              <a:rPr lang="en-US" sz="1400" b="0" i="0" u="none" strike="noStrike" dirty="0" err="1">
                 <a:solidFill>
                   <a:srgbClr val="333333"/>
                 </a:solidFill>
@@ -24799,7 +25693,7 @@
               <a:t>采用</a:t>
             </a:r>
             <a:r>
-              <a:rPr lang="en-US" sz="1400" b="1" i="0" u="none" strike="noStrike">
+              <a:rPr lang="en-US" sz="1400" b="1" i="0" u="none" strike="noStrike" dirty="0" err="1">
                 <a:solidFill>
                   <a:srgbClr val="333333"/>
                 </a:solidFill>
@@ -24808,10 +25702,10 @@
                 <a:cs typeface="Noto Sans SC" panose="020B0200000000000000" charset="-122"/>
                 <a:sym typeface="Noto Sans SC" panose="020B0200000000000000" charset="-122"/>
               </a:rPr>
-              <a:t>CMake + CTest</a:t>
-            </a:r>
-            <a:r>
-              <a:rPr lang="en-US" sz="1400" b="0" i="0" u="none" strike="noStrike">
+              <a:t>CMake</a:t>
+            </a:r>
+            <a:r>
+              <a:rPr lang="en-US" sz="1400" b="1" i="0" u="none" strike="noStrike" dirty="0">
                 <a:solidFill>
                   <a:srgbClr val="333333"/>
                 </a:solidFill>
@@ -24820,22 +25714,22 @@
                 <a:cs typeface="Noto Sans SC" panose="020B0200000000000000" charset="-122"/>
                 <a:sym typeface="Noto Sans SC" panose="020B0200000000000000" charset="-122"/>
               </a:rPr>
-              <a:t>驱动，支持一键构建运行；核心单元测试在</a:t>
-            </a:r>
-            <a:r>
-              <a:rPr lang="en-US" sz="1400" b="0" i="0" u="none" strike="noStrike">
-                <a:solidFill>
-                  <a:srgbClr val="005A9C"/>
+              <a:t> + </a:t>
+            </a:r>
+            <a:r>
+              <a:rPr lang="en-US" sz="1400" b="1" i="0" u="none" strike="noStrike" dirty="0" err="1">
+                <a:solidFill>
+                  <a:srgbClr val="333333"/>
                 </a:solidFill>
                 <a:latin typeface="Noto Sans SC" panose="020B0200000000000000" charset="-122"/>
                 <a:ea typeface="Noto Sans SC" panose="020B0200000000000000" charset="-122"/>
                 <a:cs typeface="Noto Sans SC" panose="020B0200000000000000" charset="-122"/>
                 <a:sym typeface="Noto Sans SC" panose="020B0200000000000000" charset="-122"/>
               </a:rPr>
-              <a:t>tests/lexer_tests.cpp</a:t>
-            </a:r>
-            <a:r>
-              <a:rPr lang="en-US" sz="1400" b="0" i="0" u="none" strike="noStrike">
+              <a:t>CTest</a:t>
+            </a:r>
+            <a:r>
+              <a:rPr lang="en-US" sz="1400" b="0" i="0" u="none" strike="noStrike" dirty="0" err="1">
                 <a:solidFill>
                   <a:srgbClr val="333333"/>
                 </a:solidFill>
@@ -24844,9 +25738,69 @@
                 <a:cs typeface="Noto Sans SC" panose="020B0200000000000000" charset="-122"/>
                 <a:sym typeface="Noto Sans SC" panose="020B0200000000000000" charset="-122"/>
               </a:rPr>
-              <a:t>中实现，确保执行效率。</a:t>
-            </a:r>
-            <a:endParaRPr lang="en-US" sz="1100"/>
+              <a:t>驱动，支持一键构建运行；核心单元测试在</a:t>
+            </a:r>
+            <a:r>
+              <a:rPr lang="en-US" sz="1400" b="0" i="0" u="none" strike="noStrike" dirty="0" err="1">
+                <a:solidFill>
+                  <a:srgbClr val="005A9C"/>
+                </a:solidFill>
+                <a:latin typeface="Noto Sans SC" panose="020B0200000000000000" charset="-122"/>
+                <a:ea typeface="Noto Sans SC" panose="020B0200000000000000" charset="-122"/>
+                <a:cs typeface="Noto Sans SC" panose="020B0200000000000000" charset="-122"/>
+                <a:sym typeface="Noto Sans SC" panose="020B0200000000000000" charset="-122"/>
+              </a:rPr>
+              <a:t>tests</a:t>
+            </a:r>
+            <a:r>
+              <a:rPr lang="en-US" sz="1400" b="0" i="0" u="none" strike="noStrike" dirty="0">
+                <a:solidFill>
+                  <a:srgbClr val="005A9C"/>
+                </a:solidFill>
+                <a:latin typeface="Noto Sans SC" panose="020B0200000000000000" charset="-122"/>
+                <a:ea typeface="Noto Sans SC" panose="020B0200000000000000" charset="-122"/>
+                <a:cs typeface="Noto Sans SC" panose="020B0200000000000000" charset="-122"/>
+                <a:sym typeface="Noto Sans SC" panose="020B0200000000000000" charset="-122"/>
+              </a:rPr>
+              <a:t>/</a:t>
+            </a:r>
+            <a:r>
+              <a:rPr lang="en-US" sz="1400" b="0" i="0" u="none" strike="noStrike" dirty="0" err="1">
+                <a:solidFill>
+                  <a:srgbClr val="005A9C"/>
+                </a:solidFill>
+                <a:latin typeface="Noto Sans SC" panose="020B0200000000000000" charset="-122"/>
+                <a:ea typeface="Noto Sans SC" panose="020B0200000000000000" charset="-122"/>
+                <a:cs typeface="Noto Sans SC" panose="020B0200000000000000" charset="-122"/>
+                <a:sym typeface="Noto Sans SC" panose="020B0200000000000000" charset="-122"/>
+              </a:rPr>
+              <a:t>lexer_tests.cpp</a:t>
+            </a:r>
+            <a:r>
+              <a:rPr lang="en-US" sz="1400" b="0" i="0" u="none" strike="noStrike" dirty="0" err="1">
+                <a:solidFill>
+                  <a:srgbClr val="333333"/>
+                </a:solidFill>
+                <a:latin typeface="Noto Sans SC" panose="020B0200000000000000" charset="-122"/>
+                <a:ea typeface="Noto Sans SC" panose="020B0200000000000000" charset="-122"/>
+                <a:cs typeface="Noto Sans SC" panose="020B0200000000000000" charset="-122"/>
+                <a:sym typeface="Noto Sans SC" panose="020B0200000000000000" charset="-122"/>
+              </a:rPr>
+              <a:t>中实现，确保执行效率</a:t>
+            </a:r>
+            <a:r>
+              <a:rPr lang="en-US" sz="1400" b="0" i="0" u="none" strike="noStrike" dirty="0">
+                <a:solidFill>
+                  <a:srgbClr val="333333"/>
+                </a:solidFill>
+                <a:latin typeface="Noto Sans SC" panose="020B0200000000000000" charset="-122"/>
+                <a:ea typeface="Noto Sans SC" panose="020B0200000000000000" charset="-122"/>
+                <a:cs typeface="Noto Sans SC" panose="020B0200000000000000" charset="-122"/>
+                <a:sym typeface="Noto Sans SC" panose="020B0200000000000000" charset="-122"/>
+              </a:rPr>
+              <a:t>。</a:t>
+            </a:r>
+            <a:endParaRPr lang="en-US" sz="1100" dirty="0"/>
           </a:p>
         </p:txBody>
       </p:sp>
@@ -24858,7 +25812,7 @@
         </p:nvSpPr>
         <p:spPr>
           <a:xfrm>
-            <a:off x="3937000" y="2730500"/>
+            <a:off x="2301240" y="2862580"/>
             <a:ext cx="7112000" cy="1397000"/>
           </a:xfrm>
           <a:prstGeom prst="roundRect">
@@ -24907,13 +25861,13 @@
           <p:nvPr/>
         </p:nvPicPr>
         <p:blipFill>
-          <a:blip r:embed="rId5">
+          <a:blip r:embed="rId3">
             <a:extLst>
               <a:ext uri="{28A0092B-C50C-407E-A947-70E740481C1C}">
                 <a14:useLocalDpi xmlns:a14="http://schemas.microsoft.com/office/drawing/2010/main" val="0"/>
               </a:ext>
               <a:ext uri="{96DAC541-7B7A-43D3-8B79-37D633B846F1}">
-                <asvg:svgBlip xmlns:asvg="http://schemas.microsoft.com/office/drawing/2016/SVG/main" r:embed="rId6"/>
+                <asvg:svgBlip xmlns:asvg="http://schemas.microsoft.com/office/drawing/2016/SVG/main" r:embed="rId4"/>
               </a:ext>
             </a:extLst>
           </a:blip>
@@ -24923,7 +25877,7 @@
         </p:blipFill>
         <p:spPr>
           <a:xfrm>
-            <a:off x="4191000" y="2921000"/>
+            <a:off x="2555240" y="3053080"/>
             <a:ext cx="406400" cy="406400"/>
           </a:xfrm>
           <a:prstGeom prst="rect">
@@ -24939,7 +25893,7 @@
         </p:nvSpPr>
         <p:spPr>
           <a:xfrm>
-            <a:off x="4699000" y="2882900"/>
+            <a:off x="3063240" y="3014980"/>
             <a:ext cx="6096000" cy="330200"/>
           </a:xfrm>
           <a:prstGeom prst="rect">
@@ -24986,7 +25940,7 @@
         </p:nvSpPr>
         <p:spPr>
           <a:xfrm>
-            <a:off x="4699000" y="3263900"/>
+            <a:off x="3063240" y="3395980"/>
             <a:ext cx="6096000" cy="762000"/>
           </a:xfrm>
           <a:prstGeom prst="rect">
@@ -25010,7 +25964,7 @@
               <a:defRPr/>
             </a:pPr>
             <a:r>
-              <a:rPr lang="en-US" sz="1400" b="1" i="0" u="none" strike="noStrike">
+              <a:rPr lang="en-US" sz="1400" b="1" i="0" u="none" strike="noStrike" dirty="0">
                 <a:solidFill>
                   <a:srgbClr val="333333"/>
                 </a:solidFill>
@@ -25022,7 +25976,7 @@
               <a:t>正常样例：</a:t>
             </a:r>
             <a:r>
-              <a:rPr lang="en-US" sz="1400" b="0" i="0" u="none" strike="noStrike">
+              <a:rPr lang="en-US" sz="1400" b="0" i="0" u="none" strike="noStrike" dirty="0">
                 <a:solidFill>
                   <a:srgbClr val="333333"/>
                 </a:solidFill>
@@ -25031,9 +25985,33 @@
                 <a:cs typeface="Noto Sans SC" panose="020B0200000000000000" charset="-122"/>
                 <a:sym typeface="Noto Sans SC" panose="020B0200000000000000" charset="-122"/>
               </a:rPr>
-              <a:t>01_features.pas - 覆盖所有合法词法特性，验证识别正确性。</a:t>
-            </a:r>
-            <a:endParaRPr lang="en-US" sz="1100"/>
+              <a:t>01_features.pas - </a:t>
+            </a:r>
+            <a:r>
+              <a:rPr lang="en-US" sz="1400" b="0" i="0" u="none" strike="noStrike" dirty="0" err="1">
+                <a:solidFill>
+                  <a:srgbClr val="333333"/>
+                </a:solidFill>
+                <a:latin typeface="Noto Sans SC" panose="020B0200000000000000" charset="-122"/>
+                <a:ea typeface="Noto Sans SC" panose="020B0200000000000000" charset="-122"/>
+                <a:cs typeface="Noto Sans SC" panose="020B0200000000000000" charset="-122"/>
+                <a:sym typeface="Noto Sans SC" panose="020B0200000000000000" charset="-122"/>
+              </a:rPr>
+              <a:t>覆盖所有合法词法特性，验证识别正确性</a:t>
+            </a:r>
+            <a:r>
+              <a:rPr lang="en-US" sz="1400" b="0" i="0" u="none" strike="noStrike" dirty="0">
+                <a:solidFill>
+                  <a:srgbClr val="333333"/>
+                </a:solidFill>
+                <a:latin typeface="Noto Sans SC" panose="020B0200000000000000" charset="-122"/>
+                <a:ea typeface="Noto Sans SC" panose="020B0200000000000000" charset="-122"/>
+                <a:cs typeface="Noto Sans SC" panose="020B0200000000000000" charset="-122"/>
+                <a:sym typeface="Noto Sans SC" panose="020B0200000000000000" charset="-122"/>
+              </a:rPr>
+              <a:t>。</a:t>
+            </a:r>
+            <a:endParaRPr lang="en-US" sz="1100" dirty="0"/>
           </a:p>
           <a:p>
             <a:pPr indent="0" algn="l">
@@ -25042,7 +26020,7 @@
               </a:lnSpc>
             </a:pPr>
             <a:r>
-              <a:rPr lang="en-US" sz="1400" b="1" i="0" u="none" strike="noStrike">
+              <a:rPr lang="en-US" sz="1400" b="1" i="0" u="none" strike="noStrike" dirty="0">
                 <a:solidFill>
                   <a:srgbClr val="333333"/>
                 </a:solidFill>
@@ -25054,7 +26032,7 @@
               <a:t>异常样例：</a:t>
             </a:r>
             <a:r>
-              <a:rPr lang="en-US" sz="1400" b="0" i="0" u="none" strike="noStrike">
+              <a:rPr lang="en-US" sz="1400" b="0" i="0" u="none" strike="noStrike" dirty="0">
                 <a:solidFill>
                   <a:srgbClr val="333333"/>
                 </a:solidFill>
@@ -25063,9 +26041,33 @@
                 <a:cs typeface="Noto Sans SC" panose="020B0200000000000000" charset="-122"/>
                 <a:sym typeface="Noto Sans SC" panose="020B0200000000000000" charset="-122"/>
               </a:rPr>
-              <a:t>02_lex_error.pas - 包含各类词法错误，验证错误检测与报告机制。</a:t>
-            </a:r>
-            <a:endParaRPr lang="en-US" sz="1400" b="0" i="0" u="none" strike="noStrike">
+              <a:t>02_lex_error.pas - </a:t>
+            </a:r>
+            <a:r>
+              <a:rPr lang="en-US" sz="1400" b="0" i="0" u="none" strike="noStrike" dirty="0" err="1">
+                <a:solidFill>
+                  <a:srgbClr val="333333"/>
+                </a:solidFill>
+                <a:latin typeface="Noto Sans SC" panose="020B0200000000000000" charset="-122"/>
+                <a:ea typeface="Noto Sans SC" panose="020B0200000000000000" charset="-122"/>
+                <a:cs typeface="Noto Sans SC" panose="020B0200000000000000" charset="-122"/>
+                <a:sym typeface="Noto Sans SC" panose="020B0200000000000000" charset="-122"/>
+              </a:rPr>
+              <a:t>包含各类词法错误，验证错误检测与报告机制</a:t>
+            </a:r>
+            <a:r>
+              <a:rPr lang="en-US" sz="1400" b="0" i="0" u="none" strike="noStrike" dirty="0">
+                <a:solidFill>
+                  <a:srgbClr val="333333"/>
+                </a:solidFill>
+                <a:latin typeface="Noto Sans SC" panose="020B0200000000000000" charset="-122"/>
+                <a:ea typeface="Noto Sans SC" panose="020B0200000000000000" charset="-122"/>
+                <a:cs typeface="Noto Sans SC" panose="020B0200000000000000" charset="-122"/>
+                <a:sym typeface="Noto Sans SC" panose="020B0200000000000000" charset="-122"/>
+              </a:rPr>
+              <a:t>。</a:t>
+            </a:r>
+            <a:endParaRPr lang="en-US" sz="1400" b="0" i="0" u="none" strike="noStrike" dirty="0">
               <a:solidFill>
                 <a:srgbClr val="333333"/>
               </a:solidFill>
@@ -25085,7 +26087,7 @@
         </p:nvSpPr>
         <p:spPr>
           <a:xfrm>
-            <a:off x="3937000" y="4318000"/>
+            <a:off x="2301240" y="4450080"/>
             <a:ext cx="7112000" cy="1143000"/>
           </a:xfrm>
           <a:prstGeom prst="roundRect">
@@ -25134,13 +26136,13 @@
           <p:nvPr/>
         </p:nvPicPr>
         <p:blipFill>
-          <a:blip r:embed="rId7">
+          <a:blip r:embed="rId5">
             <a:extLst>
               <a:ext uri="{28A0092B-C50C-407E-A947-70E740481C1C}">
                 <a14:useLocalDpi xmlns:a14="http://schemas.microsoft.com/office/drawing/2010/main" val="0"/>
               </a:ext>
               <a:ext uri="{96DAC541-7B7A-43D3-8B79-37D633B846F1}">
-                <asvg:svgBlip xmlns:asvg="http://schemas.microsoft.com/office/drawing/2016/SVG/main" r:embed="rId8"/>
+                <asvg:svgBlip xmlns:asvg="http://schemas.microsoft.com/office/drawing/2016/SVG/main" r:embed="rId6"/>
               </a:ext>
             </a:extLst>
           </a:blip>
@@ -25150,7 +26152,7 @@
         </p:blipFill>
         <p:spPr>
           <a:xfrm>
-            <a:off x="4191000" y="4508500"/>
+            <a:off x="2555240" y="4640580"/>
             <a:ext cx="406400" cy="406400"/>
           </a:xfrm>
           <a:prstGeom prst="rect">
@@ -25166,7 +26168,7 @@
         </p:nvSpPr>
         <p:spPr>
           <a:xfrm>
-            <a:off x="4699000" y="4470400"/>
+            <a:off x="3063240" y="4602480"/>
             <a:ext cx="6096000" cy="330200"/>
           </a:xfrm>
           <a:prstGeom prst="rect">
@@ -25213,7 +26215,7 @@
         </p:nvSpPr>
         <p:spPr>
           <a:xfrm>
-            <a:off x="4699000" y="4851400"/>
+            <a:off x="3063240" y="4983480"/>
             <a:ext cx="6096000" cy="508000"/>
           </a:xfrm>
           <a:prstGeom prst="rect">
@@ -25260,7 +26262,7 @@
         </p:nvSpPr>
         <p:spPr>
           <a:xfrm>
-            <a:off x="0" y="6781800"/>
+            <a:off x="0" y="6858000"/>
             <a:ext cx="12192000" cy="76200"/>
           </a:xfrm>
           <a:prstGeom prst="roundRect">
@@ -25424,7 +26426,7 @@
               <a:defRPr/>
             </a:pPr>
             <a:r>
-              <a:rPr lang="en-US" sz="3200" b="1" i="0" u="none" strike="noStrike">
+              <a:rPr lang="en-US" sz="3200" b="1" i="0" u="none" strike="noStrike" dirty="0">
                 <a:solidFill>
                   <a:srgbClr val="333333"/>
                 </a:solidFill>
@@ -25433,9 +26435,21 @@
                 <a:cs typeface="Noto Sans SC" panose="020B0200000000000000" charset="-122"/>
                 <a:sym typeface="Noto Sans SC" panose="020B0200000000000000" charset="-122"/>
               </a:rPr>
-              <a:t>M2 实测结果与证据</a:t>
-            </a:r>
-            <a:endParaRPr lang="en-US" sz="1100"/>
+              <a:t>M2 </a:t>
+            </a:r>
+            <a:r>
+              <a:rPr lang="en-US" sz="3200" b="1" i="0" u="none" strike="noStrike" dirty="0" err="1">
+                <a:solidFill>
+                  <a:srgbClr val="333333"/>
+                </a:solidFill>
+                <a:latin typeface="Noto Sans SC" panose="020B0200000000000000" charset="-122"/>
+                <a:ea typeface="Noto Sans SC" panose="020B0200000000000000" charset="-122"/>
+                <a:cs typeface="Noto Sans SC" panose="020B0200000000000000" charset="-122"/>
+                <a:sym typeface="Noto Sans SC" panose="020B0200000000000000" charset="-122"/>
+              </a:rPr>
+              <a:t>实测结果与证据</a:t>
+            </a:r>
+            <a:endParaRPr lang="en-US" sz="1100" dirty="0"/>
           </a:p>
         </p:txBody>
       </p:sp>
@@ -26141,7 +27155,7 @@
               <a:defRPr/>
             </a:pPr>
             <a:r>
-              <a:rPr lang="en-US" sz="1800" b="1" i="0" u="none" strike="noStrike">
+              <a:rPr lang="en-US" sz="1800" b="1" i="0" u="none" strike="noStrike" dirty="0" err="1">
                 <a:solidFill>
                   <a:srgbClr val="005A9C"/>
                 </a:solidFill>
@@ -26152,7 +27166,7 @@
               </a:rPr>
               <a:t>非法样例鲁棒性</a:t>
             </a:r>
-            <a:endParaRPr lang="en-US" sz="1100"/>
+            <a:endParaRPr lang="en-US" sz="1100" dirty="0"/>
           </a:p>
         </p:txBody>
       </p:sp>
@@ -26192,7 +27206,7 @@
               <a:defRPr/>
             </a:pPr>
             <a:r>
-              <a:rPr lang="en-US" sz="1400" b="0" i="0" u="none" strike="noStrike">
+              <a:rPr lang="en-US" sz="1400" b="0" i="0" u="none" strike="noStrike" dirty="0">
                 <a:solidFill>
                   <a:srgbClr val="333333"/>
                 </a:solidFill>
@@ -26204,7 +27218,7 @@
               <a:t>运行含错误代码的样例，程序准确输出</a:t>
             </a:r>
             <a:r>
-              <a:rPr lang="en-US" sz="1400" b="1" i="0" u="none" strike="noStrike">
+              <a:rPr lang="en-US" sz="1400" b="1" i="0" u="none" strike="noStrike" dirty="0">
                 <a:solidFill>
                   <a:srgbClr val="EF4444"/>
                 </a:solidFill>
@@ -26216,7 +27230,7 @@
               <a:t>E105/E108</a:t>
             </a:r>
             <a:r>
-              <a:rPr lang="en-US" sz="1400" b="0" i="0" u="none" strike="noStrike">
+              <a:rPr lang="en-US" sz="1400" b="0" i="0" u="none" strike="noStrike" dirty="0">
                 <a:solidFill>
                   <a:srgbClr val="333333"/>
                 </a:solidFill>
@@ -26227,7 +27241,7 @@
               </a:rPr>
               <a:t>错误码，返回退出码 7，异常处理机制生效。</a:t>
             </a:r>
-            <a:endParaRPr lang="en-US" sz="1100"/>
+            <a:endParaRPr lang="en-US" sz="1100" dirty="0"/>
           </a:p>
         </p:txBody>
       </p:sp>
@@ -26349,6 +27363,7 @@
         </p:nvPicPr>
         <p:blipFill>
           <a:blip r:embed="rId14"/>
+          <a:srcRect r="58139"/>
           <a:stretch>
             <a:fillRect/>
           </a:stretch>
@@ -26356,7 +27371,7 @@
         <p:spPr>
           <a:xfrm>
             <a:off x="6223000" y="1619250"/>
-            <a:ext cx="1856740" cy="1460500"/>
+            <a:ext cx="1856738" cy="1460500"/>
           </a:xfrm>
           <a:prstGeom prst="rect">
             <a:avLst/>
@@ -26380,7 +27395,7 @@
         <p:spPr>
           <a:xfrm>
             <a:off x="870585" y="1619250"/>
-            <a:ext cx="1605915" cy="1236345"/>
+            <a:ext cx="1796415" cy="1236345"/>
           </a:xfrm>
           <a:prstGeom prst="rect">
             <a:avLst/>
@@ -26397,14 +27412,15 @@
         </p:nvPicPr>
         <p:blipFill>
           <a:blip r:embed="rId16"/>
+          <a:srcRect r="32933"/>
           <a:stretch>
             <a:fillRect/>
           </a:stretch>
         </p:blipFill>
         <p:spPr>
           <a:xfrm>
-            <a:off x="755015" y="3911600"/>
-            <a:ext cx="1911985" cy="1117600"/>
+            <a:off x="744220" y="3873500"/>
+            <a:ext cx="1922780" cy="1117600"/>
           </a:xfrm>
           <a:prstGeom prst="rect">
             <a:avLst/>
@@ -26421,6 +27437,7 @@
         </p:nvPicPr>
         <p:blipFill>
           <a:blip r:embed="rId17"/>
+          <a:srcRect r="67727"/>
           <a:stretch>
             <a:fillRect/>
           </a:stretch>
@@ -26428,7 +27445,7 @@
         <p:spPr>
           <a:xfrm>
             <a:off x="6223000" y="3691890"/>
-            <a:ext cx="1936115" cy="1442085"/>
+            <a:ext cx="1856739" cy="1442085"/>
           </a:xfrm>
           <a:prstGeom prst="rect">
             <a:avLst/>
@@ -26445,23 +27462,65 @@
 
 <file path=ppt/tags/tag1.xml><?xml version="1.0" encoding="utf-8"?>
 <p:tagLst xmlns:p="http://schemas.openxmlformats.org/presentationml/2006/main">
-  <p:tag name="KSO_WM_DIAGRAM_VIRTUALLY_FRAME" val="{&quot;height&quot;:320,&quot;left&quot;:60,&quot;top&quot;:110,&quot;width&quot;:840}"/>
+  <p:tag name="KSO_WM_DIAGRAM_VIRTUALLY_FRAME" val="{&quot;height&quot;:370,&quot;left&quot;:320,&quot;top&quot;:110,&quot;width&quot;:520}"/>
 </p:tagLst>
 </file>
 
 <file path=ppt/tags/tag10.xml><?xml version="1.0" encoding="utf-8"?>
 <p:tagLst xmlns:p="http://schemas.openxmlformats.org/presentationml/2006/main">
-  <p:tag name="KSO_WM_DIAGRAM_VIRTUALLY_FRAME" val="{&quot;height&quot;:320,&quot;left&quot;:60,&quot;top&quot;:110,&quot;width&quot;:840}"/>
+  <p:tag name="KSO_WM_DIAGRAM_VIRTUALLY_FRAME" val="{&quot;height&quot;:370,&quot;left&quot;:320,&quot;top&quot;:110,&quot;width&quot;:520}"/>
 </p:tagLst>
 </file>
 
 <file path=ppt/tags/tag11.xml><?xml version="1.0" encoding="utf-8"?>
 <p:tagLst xmlns:p="http://schemas.openxmlformats.org/presentationml/2006/main">
+  <p:tag name="KSO_WM_DIAGRAM_VIRTUALLY_FRAME" val="{&quot;height&quot;:370,&quot;left&quot;:320,&quot;top&quot;:110,&quot;width&quot;:520}"/>
+</p:tagLst>
+</file>
+
+<file path=ppt/tags/tag12.xml><?xml version="1.0" encoding="utf-8"?>
+<p:tagLst xmlns:p="http://schemas.openxmlformats.org/presentationml/2006/main">
+  <p:tag name="KSO_WM_DIAGRAM_VIRTUALLY_FRAME" val="{&quot;height&quot;:370,&quot;left&quot;:320,&quot;top&quot;:110,&quot;width&quot;:520}"/>
+</p:tagLst>
+</file>
+
+<file path=ppt/tags/tag13.xml><?xml version="1.0" encoding="utf-8"?>
+<p:tagLst xmlns:p="http://schemas.openxmlformats.org/presentationml/2006/main">
+  <p:tag name="KSO_WM_DIAGRAM_VIRTUALLY_FRAME" val="{&quot;height&quot;:370,&quot;left&quot;:320,&quot;top&quot;:110,&quot;width&quot;:520}"/>
+</p:tagLst>
+</file>
+
+<file path=ppt/tags/tag14.xml><?xml version="1.0" encoding="utf-8"?>
+<p:tagLst xmlns:p="http://schemas.openxmlformats.org/presentationml/2006/main">
+  <p:tag name="KSO_WM_DIAGRAM_VIRTUALLY_FRAME" val="{&quot;height&quot;:370,&quot;left&quot;:320,&quot;top&quot;:110,&quot;width&quot;:520}"/>
+</p:tagLst>
+</file>
+
+<file path=ppt/tags/tag15.xml><?xml version="1.0" encoding="utf-8"?>
+<p:tagLst xmlns:p="http://schemas.openxmlformats.org/presentationml/2006/main">
+  <p:tag name="KSO_WM_DIAGRAM_VIRTUALLY_FRAME" val="{&quot;height&quot;:370,&quot;left&quot;:320,&quot;top&quot;:110,&quot;width&quot;:520}"/>
+</p:tagLst>
+</file>
+
+<file path=ppt/tags/tag16.xml><?xml version="1.0" encoding="utf-8"?>
+<p:tagLst xmlns:p="http://schemas.openxmlformats.org/presentationml/2006/main">
+  <p:tag name="KSO_WM_DIAGRAM_VIRTUALLY_FRAME" val="{&quot;height&quot;:370,&quot;left&quot;:320,&quot;top&quot;:110,&quot;width&quot;:520}"/>
+</p:tagLst>
+</file>
+
+<file path=ppt/tags/tag17.xml><?xml version="1.0" encoding="utf-8"?>
+<p:tagLst xmlns:p="http://schemas.openxmlformats.org/presentationml/2006/main">
   <p:tag name="KSO_WM_DIAGRAM_VIRTUALLY_FRAME" val="{&quot;height&quot;:320,&quot;left&quot;:60,&quot;top&quot;:110,&quot;width&quot;:840}"/>
 </p:tagLst>
 </file>
 
-<file path=ppt/tags/tag12.xml><?xml version="1.0" encoding="utf-8"?>
+<file path=ppt/tags/tag18.xml><?xml version="1.0" encoding="utf-8"?>
+<p:tagLst xmlns:p="http://schemas.openxmlformats.org/presentationml/2006/main">
+  <p:tag name="KSO_WM_DIAGRAM_VIRTUALLY_FRAME" val="{&quot;height&quot;:320,&quot;left&quot;:60,&quot;top&quot;:110,&quot;width&quot;:840}"/>
+</p:tagLst>
+</file>
+
+<file path=ppt/tags/tag19.xml><?xml version="1.0" encoding="utf-8"?>
 <p:tagLst xmlns:p="http://schemas.openxmlformats.org/presentationml/2006/main">
   <p:tag name="KSO_WM_DIAGRAM_VIRTUALLY_FRAME" val="{&quot;height&quot;:320,&quot;left&quot;:60,&quot;top&quot;:110,&quot;width&quot;:840}"/>
 </p:tagLst>
@@ -26469,49 +27528,103 @@
 
 <file path=ppt/tags/tag2.xml><?xml version="1.0" encoding="utf-8"?>
 <p:tagLst xmlns:p="http://schemas.openxmlformats.org/presentationml/2006/main">
+  <p:tag name="KSO_WM_DIAGRAM_VIRTUALLY_FRAME" val="{&quot;height&quot;:370,&quot;left&quot;:320,&quot;top&quot;:110,&quot;width&quot;:520}"/>
+</p:tagLst>
+</file>
+
+<file path=ppt/tags/tag20.xml><?xml version="1.0" encoding="utf-8"?>
+<p:tagLst xmlns:p="http://schemas.openxmlformats.org/presentationml/2006/main">
+  <p:tag name="KSO_WM_DIAGRAM_VIRTUALLY_FRAME" val="{&quot;height&quot;:320,&quot;left&quot;:60,&quot;top&quot;:110,&quot;width&quot;:840}"/>
+</p:tagLst>
+</file>
+
+<file path=ppt/tags/tag21.xml><?xml version="1.0" encoding="utf-8"?>
+<p:tagLst xmlns:p="http://schemas.openxmlformats.org/presentationml/2006/main">
+  <p:tag name="KSO_WM_DIAGRAM_VIRTUALLY_FRAME" val="{&quot;height&quot;:320,&quot;left&quot;:60,&quot;top&quot;:110,&quot;width&quot;:840}"/>
+</p:tagLst>
+</file>
+
+<file path=ppt/tags/tag22.xml><?xml version="1.0" encoding="utf-8"?>
+<p:tagLst xmlns:p="http://schemas.openxmlformats.org/presentationml/2006/main">
+  <p:tag name="KSO_WM_DIAGRAM_VIRTUALLY_FRAME" val="{&quot;height&quot;:320,&quot;left&quot;:60,&quot;top&quot;:110,&quot;width&quot;:840}"/>
+</p:tagLst>
+</file>
+
+<file path=ppt/tags/tag23.xml><?xml version="1.0" encoding="utf-8"?>
+<p:tagLst xmlns:p="http://schemas.openxmlformats.org/presentationml/2006/main">
+  <p:tag name="KSO_WM_DIAGRAM_VIRTUALLY_FRAME" val="{&quot;height&quot;:320,&quot;left&quot;:60,&quot;top&quot;:110,&quot;width&quot;:840}"/>
+</p:tagLst>
+</file>
+
+<file path=ppt/tags/tag24.xml><?xml version="1.0" encoding="utf-8"?>
+<p:tagLst xmlns:p="http://schemas.openxmlformats.org/presentationml/2006/main">
+  <p:tag name="KSO_WM_DIAGRAM_VIRTUALLY_FRAME" val="{&quot;height&quot;:320,&quot;left&quot;:60,&quot;top&quot;:110,&quot;width&quot;:840}"/>
+</p:tagLst>
+</file>
+
+<file path=ppt/tags/tag25.xml><?xml version="1.0" encoding="utf-8"?>
+<p:tagLst xmlns:p="http://schemas.openxmlformats.org/presentationml/2006/main">
+  <p:tag name="KSO_WM_DIAGRAM_VIRTUALLY_FRAME" val="{&quot;height&quot;:320,&quot;left&quot;:60,&quot;top&quot;:110,&quot;width&quot;:840}"/>
+</p:tagLst>
+</file>
+
+<file path=ppt/tags/tag26.xml><?xml version="1.0" encoding="utf-8"?>
+<p:tagLst xmlns:p="http://schemas.openxmlformats.org/presentationml/2006/main">
+  <p:tag name="KSO_WM_DIAGRAM_VIRTUALLY_FRAME" val="{&quot;height&quot;:320,&quot;left&quot;:60,&quot;top&quot;:110,&quot;width&quot;:840}"/>
+</p:tagLst>
+</file>
+
+<file path=ppt/tags/tag27.xml><?xml version="1.0" encoding="utf-8"?>
+<p:tagLst xmlns:p="http://schemas.openxmlformats.org/presentationml/2006/main">
+  <p:tag name="KSO_WM_DIAGRAM_VIRTUALLY_FRAME" val="{&quot;height&quot;:320,&quot;left&quot;:60,&quot;top&quot;:110,&quot;width&quot;:840}"/>
+</p:tagLst>
+</file>
+
+<file path=ppt/tags/tag28.xml><?xml version="1.0" encoding="utf-8"?>
+<p:tagLst xmlns:p="http://schemas.openxmlformats.org/presentationml/2006/main">
   <p:tag name="KSO_WM_DIAGRAM_VIRTUALLY_FRAME" val="{&quot;height&quot;:320,&quot;left&quot;:60,&quot;top&quot;:110,&quot;width&quot;:840}"/>
 </p:tagLst>
 </file>
 
 <file path=ppt/tags/tag3.xml><?xml version="1.0" encoding="utf-8"?>
 <p:tagLst xmlns:p="http://schemas.openxmlformats.org/presentationml/2006/main">
-  <p:tag name="KSO_WM_DIAGRAM_VIRTUALLY_FRAME" val="{&quot;height&quot;:320,&quot;left&quot;:60,&quot;top&quot;:110,&quot;width&quot;:840}"/>
+  <p:tag name="KSO_WM_DIAGRAM_VIRTUALLY_FRAME" val="{&quot;height&quot;:370,&quot;left&quot;:320,&quot;top&quot;:110,&quot;width&quot;:520}"/>
 </p:tagLst>
 </file>
 
 <file path=ppt/tags/tag4.xml><?xml version="1.0" encoding="utf-8"?>
 <p:tagLst xmlns:p="http://schemas.openxmlformats.org/presentationml/2006/main">
-  <p:tag name="KSO_WM_DIAGRAM_VIRTUALLY_FRAME" val="{&quot;height&quot;:320,&quot;left&quot;:60,&quot;top&quot;:110,&quot;width&quot;:840}"/>
+  <p:tag name="KSO_WM_DIAGRAM_VIRTUALLY_FRAME" val="{&quot;height&quot;:370,&quot;left&quot;:320,&quot;top&quot;:110,&quot;width&quot;:520}"/>
 </p:tagLst>
 </file>
 
 <file path=ppt/tags/tag5.xml><?xml version="1.0" encoding="utf-8"?>
 <p:tagLst xmlns:p="http://schemas.openxmlformats.org/presentationml/2006/main">
-  <p:tag name="KSO_WM_DIAGRAM_VIRTUALLY_FRAME" val="{&quot;height&quot;:320,&quot;left&quot;:60,&quot;top&quot;:110,&quot;width&quot;:840}"/>
+  <p:tag name="KSO_WM_DIAGRAM_VIRTUALLY_FRAME" val="{&quot;height&quot;:370,&quot;left&quot;:320,&quot;top&quot;:110,&quot;width&quot;:520}"/>
 </p:tagLst>
 </file>
 
 <file path=ppt/tags/tag6.xml><?xml version="1.0" encoding="utf-8"?>
 <p:tagLst xmlns:p="http://schemas.openxmlformats.org/presentationml/2006/main">
-  <p:tag name="KSO_WM_DIAGRAM_VIRTUALLY_FRAME" val="{&quot;height&quot;:320,&quot;left&quot;:60,&quot;top&quot;:110,&quot;width&quot;:840}"/>
+  <p:tag name="KSO_WM_DIAGRAM_VIRTUALLY_FRAME" val="{&quot;height&quot;:370,&quot;left&quot;:320,&quot;top&quot;:110,&quot;width&quot;:520}"/>
 </p:tagLst>
 </file>
 
 <file path=ppt/tags/tag7.xml><?xml version="1.0" encoding="utf-8"?>
 <p:tagLst xmlns:p="http://schemas.openxmlformats.org/presentationml/2006/main">
-  <p:tag name="KSO_WM_DIAGRAM_VIRTUALLY_FRAME" val="{&quot;height&quot;:320,&quot;left&quot;:60,&quot;top&quot;:110,&quot;width&quot;:840}"/>
+  <p:tag name="KSO_WM_DIAGRAM_VIRTUALLY_FRAME" val="{&quot;height&quot;:370,&quot;left&quot;:320,&quot;top&quot;:110,&quot;width&quot;:520}"/>
 </p:tagLst>
 </file>
 
 <file path=ppt/tags/tag8.xml><?xml version="1.0" encoding="utf-8"?>
 <p:tagLst xmlns:p="http://schemas.openxmlformats.org/presentationml/2006/main">
-  <p:tag name="KSO_WM_DIAGRAM_VIRTUALLY_FRAME" val="{&quot;height&quot;:320,&quot;left&quot;:60,&quot;top&quot;:110,&quot;width&quot;:840}"/>
+  <p:tag name="KSO_WM_DIAGRAM_VIRTUALLY_FRAME" val="{&quot;height&quot;:370,&quot;left&quot;:320,&quot;top&quot;:110,&quot;width&quot;:520}"/>
 </p:tagLst>
 </file>
 
 <file path=ppt/tags/tag9.xml><?xml version="1.0" encoding="utf-8"?>
 <p:tagLst xmlns:p="http://schemas.openxmlformats.org/presentationml/2006/main">
-  <p:tag name="KSO_WM_DIAGRAM_VIRTUALLY_FRAME" val="{&quot;height&quot;:320,&quot;left&quot;:60,&quot;top&quot;:110,&quot;width&quot;:840}"/>
+  <p:tag name="KSO_WM_DIAGRAM_VIRTUALLY_FRAME" val="{&quot;height&quot;:370,&quot;left&quot;:320,&quot;top&quot;:110,&quot;width&quot;:520}"/>
 </p:tagLst>
 </file>
 
